--- a/slides/zeroth_review.pptx
+++ b/slides/zeroth_review.pptx
@@ -3332,6 +3332,41 @@
                 <a:latin typeface="Calibri"/>
               </a:rPr>
               <a:t>Course: 23AID201</a:t>
+            </a:r>
+          </a:p>
+        </p:txBody>
+      </p:sp>
+      <p:sp>
+        <p:nvSpPr>
+          <p:cNvPr id="8" name="TextBox 7"/>
+          <p:cNvSpPr txBox="1"/>
+          <p:nvPr/>
+        </p:nvSpPr>
+        <p:spPr>
+          <a:xfrm>
+            <a:off x="11155680" y="6446520"/>
+            <a:ext cx="822960" cy="320040"/>
+          </a:xfrm>
+          <a:prstGeom prst="rect">
+            <a:avLst/>
+          </a:prstGeom>
+          <a:noFill/>
+        </p:spPr>
+        <p:txBody>
+          <a:bodyPr wrap="square" anchor="t" lIns="0" rIns="0" tIns="0" bIns="0">
+            <a:spAutoFit/>
+          </a:bodyPr>
+          <a:lstStyle/>
+          <a:p>
+            <a:pPr algn="r"/>
+            <a:r>
+              <a:rPr sz="1100" b="0" i="0">
+                <a:solidFill>
+                  <a:srgbClr val="93C5FD"/>
+                </a:solidFill>
+                <a:latin typeface="Calibri"/>
+              </a:rPr>
+              <a:t>1 / 9</a:t>
             </a:r>
           </a:p>
         </p:txBody>

--- a/slides/zeroth_review.pptx
+++ b/slides/zeroth_review.pptx
@@ -14,6 +14,9 @@
     <p:sldId id="262" r:id="rId13"/>
     <p:sldId id="263" r:id="rId14"/>
     <p:sldId id="264" r:id="rId15"/>
+    <p:sldId id="265" r:id="rId16"/>
+    <p:sldId id="266" r:id="rId17"/>
+    <p:sldId id="267" r:id="rId18"/>
   </p:sldIdLst>
   <p:sldSz cx="12191695" cy="6858000" type="screen4x3"/>
   <p:notesSz cx="6858000" cy="9144000"/>
@@ -3192,7 +3195,7 @@
         </p:nvSpPr>
         <p:spPr>
           <a:xfrm>
-            <a:off x="914400" y="1188720"/>
+            <a:off x="914400" y="960120"/>
             <a:ext cx="10332720" cy="1828800"/>
           </a:xfrm>
           <a:prstGeom prst="rect">
@@ -3208,7 +3211,7 @@
           <a:p>
             <a:pPr algn="ctr"/>
             <a:r>
-              <a:rPr sz="3200" b="1" i="0">
+              <a:rPr sz="3000" b="1" i="0">
                 <a:solidFill>
                   <a:srgbClr val="FFFFFF"/>
                 </a:solidFill>
@@ -3220,7 +3223,7 @@
           <a:p>
             <a:pPr algn="ctr"/>
             <a:r>
-              <a:rPr sz="3200" b="1" i="0">
+              <a:rPr sz="3000" b="1" i="0">
                 <a:solidFill>
                   <a:srgbClr val="FFFFFF"/>
                 </a:solidFill>
@@ -3239,7 +3242,7 @@
         </p:nvSpPr>
         <p:spPr>
           <a:xfrm>
-            <a:off x="914400" y="3063240"/>
+            <a:off x="914400" y="2788920"/>
             <a:ext cx="10332720" cy="457200"/>
           </a:xfrm>
           <a:prstGeom prst="rect">
@@ -3255,7 +3258,7 @@
           <a:p>
             <a:pPr algn="ctr"/>
             <a:r>
-              <a:rPr sz="1800" b="0" i="1">
+              <a:rPr sz="1700" b="0" i="1">
                 <a:solidFill>
                   <a:srgbClr val="93C5FD"/>
                 </a:solidFill>
@@ -3274,8 +3277,8 @@
         </p:nvSpPr>
         <p:spPr>
           <a:xfrm>
-            <a:off x="914400" y="4892040"/>
-            <a:ext cx="10332720" cy="731520"/>
+            <a:off x="914400" y="3246120"/>
+            <a:ext cx="10332720" cy="365760"/>
           </a:xfrm>
           <a:prstGeom prst="rect">
             <a:avLst/>
@@ -3290,13 +3293,13 @@
           <a:p>
             <a:pPr algn="ctr"/>
             <a:r>
-              <a:rPr sz="1300" b="0" i="0">
+              <a:rPr sz="1500" b="1" i="0">
                 <a:solidFill>
                   <a:srgbClr val="FFFFFF"/>
                 </a:solidFill>
                 <a:latin typeface="Calibri"/>
               </a:rPr>
-              <a:t>G Venugopalan (CB.AI.U4AID25115)   |   Vipin Sudhakar (CB.AI.U4AID25166)   |   Rithvik Arulprakash (CB.AI.U4AID25148)   |   Harshith Kv (CB.AI.U4AID25119)</a:t>
+              <a:t>Group: B9</a:t>
             </a:r>
           </a:p>
         </p:txBody>
@@ -3309,7 +3312,7 @@
         </p:nvSpPr>
         <p:spPr>
           <a:xfrm>
-            <a:off x="914400" y="5349240"/>
+            <a:off x="914400" y="3977639"/>
             <a:ext cx="10332720" cy="365760"/>
           </a:xfrm>
           <a:prstGeom prst="rect">
@@ -3325,6 +3328,146 @@
           <a:p>
             <a:pPr algn="ctr"/>
             <a:r>
+              <a:rPr sz="1400" b="0" i="0">
+                <a:solidFill>
+                  <a:srgbClr val="FFFFFF"/>
+                </a:solidFill>
+                <a:latin typeface="Calibri"/>
+              </a:rPr>
+              <a:t>G Venugopalan   —   CB.AI.U4AID25115</a:t>
+            </a:r>
+          </a:p>
+        </p:txBody>
+      </p:sp>
+      <p:sp>
+        <p:nvSpPr>
+          <p:cNvPr id="8" name="TextBox 7"/>
+          <p:cNvSpPr txBox="1"/>
+          <p:nvPr/>
+        </p:nvSpPr>
+        <p:spPr>
+          <a:xfrm>
+            <a:off x="914400" y="4361687"/>
+            <a:ext cx="10332720" cy="365760"/>
+          </a:xfrm>
+          <a:prstGeom prst="rect">
+            <a:avLst/>
+          </a:prstGeom>
+          <a:noFill/>
+        </p:spPr>
+        <p:txBody>
+          <a:bodyPr wrap="square" anchor="t" lIns="0" rIns="0" tIns="0" bIns="0">
+            <a:spAutoFit/>
+          </a:bodyPr>
+          <a:lstStyle/>
+          <a:p>
+            <a:pPr algn="ctr"/>
+            <a:r>
+              <a:rPr sz="1400" b="0" i="0">
+                <a:solidFill>
+                  <a:srgbClr val="FFFFFF"/>
+                </a:solidFill>
+                <a:latin typeface="Calibri"/>
+              </a:rPr>
+              <a:t>Vipin Sudhakar   —   CB.AI.U4AID25166</a:t>
+            </a:r>
+          </a:p>
+        </p:txBody>
+      </p:sp>
+      <p:sp>
+        <p:nvSpPr>
+          <p:cNvPr id="9" name="TextBox 8"/>
+          <p:cNvSpPr txBox="1"/>
+          <p:nvPr/>
+        </p:nvSpPr>
+        <p:spPr>
+          <a:xfrm>
+            <a:off x="914400" y="4745735"/>
+            <a:ext cx="10332720" cy="365760"/>
+          </a:xfrm>
+          <a:prstGeom prst="rect">
+            <a:avLst/>
+          </a:prstGeom>
+          <a:noFill/>
+        </p:spPr>
+        <p:txBody>
+          <a:bodyPr wrap="square" anchor="t" lIns="0" rIns="0" tIns="0" bIns="0">
+            <a:spAutoFit/>
+          </a:bodyPr>
+          <a:lstStyle/>
+          <a:p>
+            <a:pPr algn="ctr"/>
+            <a:r>
+              <a:rPr sz="1400" b="0" i="0">
+                <a:solidFill>
+                  <a:srgbClr val="FFFFFF"/>
+                </a:solidFill>
+                <a:latin typeface="Calibri"/>
+              </a:rPr>
+              <a:t>Rithvik Arulprakash   —   CB.AI.U4AID25148</a:t>
+            </a:r>
+          </a:p>
+        </p:txBody>
+      </p:sp>
+      <p:sp>
+        <p:nvSpPr>
+          <p:cNvPr id="10" name="TextBox 9"/>
+          <p:cNvSpPr txBox="1"/>
+          <p:nvPr/>
+        </p:nvSpPr>
+        <p:spPr>
+          <a:xfrm>
+            <a:off x="914400" y="5129783"/>
+            <a:ext cx="10332720" cy="365760"/>
+          </a:xfrm>
+          <a:prstGeom prst="rect">
+            <a:avLst/>
+          </a:prstGeom>
+          <a:noFill/>
+        </p:spPr>
+        <p:txBody>
+          <a:bodyPr wrap="square" anchor="t" lIns="0" rIns="0" tIns="0" bIns="0">
+            <a:spAutoFit/>
+          </a:bodyPr>
+          <a:lstStyle/>
+          <a:p>
+            <a:pPr algn="ctr"/>
+            <a:r>
+              <a:rPr sz="1400" b="0" i="0">
+                <a:solidFill>
+                  <a:srgbClr val="FFFFFF"/>
+                </a:solidFill>
+                <a:latin typeface="Calibri"/>
+              </a:rPr>
+              <a:t>Harshith Kv   —   CB.AI.U4AID25119</a:t>
+            </a:r>
+          </a:p>
+        </p:txBody>
+      </p:sp>
+      <p:sp>
+        <p:nvSpPr>
+          <p:cNvPr id="11" name="TextBox 10"/>
+          <p:cNvSpPr txBox="1"/>
+          <p:nvPr/>
+        </p:nvSpPr>
+        <p:spPr>
+          <a:xfrm>
+            <a:off x="914400" y="5623560"/>
+            <a:ext cx="10332720" cy="365760"/>
+          </a:xfrm>
+          <a:prstGeom prst="rect">
+            <a:avLst/>
+          </a:prstGeom>
+          <a:noFill/>
+        </p:spPr>
+        <p:txBody>
+          <a:bodyPr wrap="square" anchor="t" lIns="0" rIns="0" tIns="0" bIns="0">
+            <a:spAutoFit/>
+          </a:bodyPr>
+          <a:lstStyle/>
+          <a:p>
+            <a:pPr algn="ctr"/>
+            <a:r>
               <a:rPr sz="1300" b="0" i="0">
                 <a:solidFill>
                   <a:srgbClr val="93C5FD"/>
@@ -3338,7 +3481,7 @@
       </p:sp>
       <p:sp>
         <p:nvSpPr>
-          <p:cNvPr id="8" name="TextBox 7"/>
+          <p:cNvPr id="12" name="TextBox 11"/>
           <p:cNvSpPr txBox="1"/>
           <p:nvPr/>
         </p:nvSpPr>
@@ -3366,7 +3509,847 @@
                 </a:solidFill>
                 <a:latin typeface="Calibri"/>
               </a:rPr>
-              <a:t>1 / 9</a:t>
+              <a:t>1 / 12</a:t>
+            </a:r>
+          </a:p>
+        </p:txBody>
+      </p:sp>
+    </p:spTree>
+  </p:cSld>
+  <p:clrMapOvr>
+    <a:masterClrMapping/>
+  </p:clrMapOvr>
+</p:sld>
+</file>
+
+<file path=ppt/slides/slide10.xml><?xml version="1.0" encoding="utf-8"?>
+<p:sld xmlns:a="http://schemas.openxmlformats.org/drawingml/2006/main" xmlns:p="http://schemas.openxmlformats.org/presentationml/2006/main" xmlns:r="http://schemas.openxmlformats.org/officeDocument/2006/relationships">
+  <p:cSld>
+    <p:spTree>
+      <p:nvGrpSpPr>
+        <p:cNvPr id="1" name=""/>
+        <p:cNvGrpSpPr/>
+        <p:nvPr/>
+      </p:nvGrpSpPr>
+      <p:grpSpPr/>
+      <p:sp>
+        <p:nvSpPr>
+          <p:cNvPr id="2" name="Rectangle 1"/>
+          <p:cNvSpPr/>
+          <p:nvPr/>
+        </p:nvSpPr>
+        <p:spPr>
+          <a:xfrm>
+            <a:off x="0" y="0"/>
+            <a:ext cx="12191695" cy="82296"/>
+          </a:xfrm>
+          <a:prstGeom prst="rect">
+            <a:avLst/>
+          </a:prstGeom>
+          <a:solidFill>
+            <a:srgbClr val="3B82F6"/>
+          </a:solidFill>
+          <a:ln>
+            <a:noFill/>
+          </a:ln>
+          <a:effectLst/>
+        </p:spPr>
+        <p:style>
+          <a:lnRef idx="1">
+            <a:schemeClr val="accent1"/>
+          </a:lnRef>
+          <a:fillRef idx="3">
+            <a:schemeClr val="accent1"/>
+          </a:fillRef>
+          <a:effectRef idx="2">
+            <a:schemeClr val="accent1"/>
+          </a:effectRef>
+          <a:fontRef idx="minor">
+            <a:schemeClr val="lt1"/>
+          </a:fontRef>
+        </p:style>
+        <p:txBody>
+          <a:bodyPr rtlCol="0" anchor="ctr"/>
+          <a:lstStyle/>
+          <a:p>
+            <a:pPr algn="ctr"/>
+          </a:p>
+        </p:txBody>
+      </p:sp>
+      <p:sp>
+        <p:nvSpPr>
+          <p:cNvPr id="3" name="TextBox 2"/>
+          <p:cNvSpPr txBox="1"/>
+          <p:nvPr/>
+        </p:nvSpPr>
+        <p:spPr>
+          <a:xfrm>
+            <a:off x="548640" y="274320"/>
+            <a:ext cx="10515600" cy="320040"/>
+          </a:xfrm>
+          <a:prstGeom prst="rect">
+            <a:avLst/>
+          </a:prstGeom>
+          <a:noFill/>
+        </p:spPr>
+        <p:txBody>
+          <a:bodyPr wrap="square" anchor="t" lIns="0" rIns="0" tIns="0" bIns="0">
+            <a:spAutoFit/>
+          </a:bodyPr>
+          <a:lstStyle/>
+          <a:p>
+            <a:pPr algn="l"/>
+            <a:r>
+              <a:rPr sz="1300" b="1" i="0">
+                <a:solidFill>
+                  <a:srgbClr val="3B82F6"/>
+                </a:solidFill>
+                <a:latin typeface="Calibri"/>
+              </a:rPr>
+              <a:t>SUMMARY</a:t>
+            </a:r>
+          </a:p>
+        </p:txBody>
+      </p:sp>
+      <p:sp>
+        <p:nvSpPr>
+          <p:cNvPr id="4" name="TextBox 3"/>
+          <p:cNvSpPr txBox="1"/>
+          <p:nvPr/>
+        </p:nvSpPr>
+        <p:spPr>
+          <a:xfrm>
+            <a:off x="548640" y="566928"/>
+            <a:ext cx="10881360" cy="640080"/>
+          </a:xfrm>
+          <a:prstGeom prst="rect">
+            <a:avLst/>
+          </a:prstGeom>
+          <a:noFill/>
+        </p:spPr>
+        <p:txBody>
+          <a:bodyPr wrap="square" anchor="t" lIns="0" rIns="0" tIns="0" bIns="0">
+            <a:spAutoFit/>
+          </a:bodyPr>
+          <a:lstStyle/>
+          <a:p>
+            <a:pPr algn="l"/>
+            <a:r>
+              <a:rPr sz="2800" b="1" i="0">
+                <a:solidFill>
+                  <a:srgbClr val="1B2238"/>
+                </a:solidFill>
+                <a:latin typeface="Calibri"/>
+              </a:rPr>
+              <a:t>Conclusion</a:t>
+            </a:r>
+          </a:p>
+        </p:txBody>
+      </p:sp>
+      <p:sp>
+        <p:nvSpPr>
+          <p:cNvPr id="5" name="Rectangle 4"/>
+          <p:cNvSpPr/>
+          <p:nvPr/>
+        </p:nvSpPr>
+        <p:spPr>
+          <a:xfrm>
+            <a:off x="548640" y="1170432"/>
+            <a:ext cx="1005840" cy="38100"/>
+          </a:xfrm>
+          <a:prstGeom prst="rect">
+            <a:avLst/>
+          </a:prstGeom>
+          <a:solidFill>
+            <a:srgbClr val="3B82F6"/>
+          </a:solidFill>
+          <a:ln>
+            <a:noFill/>
+          </a:ln>
+          <a:effectLst/>
+        </p:spPr>
+        <p:style>
+          <a:lnRef idx="1">
+            <a:schemeClr val="accent1"/>
+          </a:lnRef>
+          <a:fillRef idx="3">
+            <a:schemeClr val="accent1"/>
+          </a:fillRef>
+          <a:effectRef idx="2">
+            <a:schemeClr val="accent1"/>
+          </a:effectRef>
+          <a:fontRef idx="minor">
+            <a:schemeClr val="lt1"/>
+          </a:fontRef>
+        </p:style>
+        <p:txBody>
+          <a:bodyPr rtlCol="0" anchor="ctr"/>
+          <a:lstStyle/>
+          <a:p>
+            <a:pPr algn="ctr"/>
+          </a:p>
+        </p:txBody>
+      </p:sp>
+      <p:sp>
+        <p:nvSpPr>
+          <p:cNvPr id="6" name="TextBox 5"/>
+          <p:cNvSpPr txBox="1"/>
+          <p:nvPr/>
+        </p:nvSpPr>
+        <p:spPr>
+          <a:xfrm>
+            <a:off x="11155680" y="6446520"/>
+            <a:ext cx="822960" cy="320040"/>
+          </a:xfrm>
+          <a:prstGeom prst="rect">
+            <a:avLst/>
+          </a:prstGeom>
+          <a:noFill/>
+        </p:spPr>
+        <p:txBody>
+          <a:bodyPr wrap="square" anchor="t" lIns="0" rIns="0" tIns="0" bIns="0">
+            <a:spAutoFit/>
+          </a:bodyPr>
+          <a:lstStyle/>
+          <a:p>
+            <a:pPr algn="r"/>
+            <a:r>
+              <a:rPr sz="1100" b="0" i="0">
+                <a:solidFill>
+                  <a:srgbClr val="6B7280"/>
+                </a:solidFill>
+                <a:latin typeface="Calibri"/>
+              </a:rPr>
+              <a:t>10 / 12</a:t>
+            </a:r>
+          </a:p>
+        </p:txBody>
+      </p:sp>
+      <p:sp>
+        <p:nvSpPr>
+          <p:cNvPr id="7" name="TextBox 6"/>
+          <p:cNvSpPr txBox="1"/>
+          <p:nvPr/>
+        </p:nvSpPr>
+        <p:spPr>
+          <a:xfrm>
+            <a:off x="640080" y="1600200"/>
+            <a:ext cx="10881360" cy="3657600"/>
+          </a:xfrm>
+          <a:prstGeom prst="rect">
+            <a:avLst/>
+          </a:prstGeom>
+          <a:noFill/>
+        </p:spPr>
+        <p:txBody>
+          <a:bodyPr wrap="square">
+            <a:spAutoFit/>
+          </a:bodyPr>
+          <a:lstStyle/>
+          <a:p>
+            <a:pPr>
+              <a:spcAft>
+                <a:spcPts val="1600"/>
+              </a:spcAft>
+            </a:pPr>
+            <a:r>
+              <a:rPr sz="1700">
+                <a:solidFill>
+                  <a:srgbClr val="1F2937"/>
+                </a:solidFill>
+                <a:latin typeface="Calibri"/>
+              </a:rPr>
+              <a:t>•  This project tests two limitations explicitly flagged by Gopakumar et al. (2026) — marginal coverage and the exchangeability assumption — in a discrete-event / queueing domain that has not been studied before in this context.</a:t>
+            </a:r>
+          </a:p>
+          <a:p>
+            <a:pPr>
+              <a:spcAft>
+                <a:spcPts val="1600"/>
+              </a:spcAft>
+            </a:pPr>
+            <a:r>
+              <a:rPr sz="1700">
+                <a:solidFill>
+                  <a:srgbClr val="1F2937"/>
+                </a:solidFill>
+                <a:latin typeface="Calibri"/>
+              </a:rPr>
+              <a:t>•  The core contribution is applying Mondrian Conformal Prediction to close the marginal-vs-conditional coverage gap, and stress-testing exchangeability with an out-of-distribution scenario, using a real hospital-calibrated ER simulation as the testbed.</a:t>
+            </a:r>
+          </a:p>
+          <a:p>
+            <a:pPr>
+              <a:spcAft>
+                <a:spcPts val="1600"/>
+              </a:spcAft>
+            </a:pPr>
+            <a:r>
+              <a:rPr sz="1700">
+                <a:solidFill>
+                  <a:srgbClr val="1F2937"/>
+                </a:solidFill>
+                <a:latin typeface="Calibri"/>
+              </a:rPr>
+              <a:t>•  Simulation and surrogate model are built and validated; uncertainty quantification methods (GP baseline, standard CP, Mondrian CP) are the focus of the next phase.</a:t>
+            </a:r>
+          </a:p>
+        </p:txBody>
+      </p:sp>
+    </p:spTree>
+  </p:cSld>
+  <p:clrMapOvr>
+    <a:masterClrMapping/>
+  </p:clrMapOvr>
+</p:sld>
+</file>
+
+<file path=ppt/slides/slide11.xml><?xml version="1.0" encoding="utf-8"?>
+<p:sld xmlns:a="http://schemas.openxmlformats.org/drawingml/2006/main" xmlns:p="http://schemas.openxmlformats.org/presentationml/2006/main" xmlns:r="http://schemas.openxmlformats.org/officeDocument/2006/relationships">
+  <p:cSld>
+    <p:spTree>
+      <p:nvGrpSpPr>
+        <p:cNvPr id="1" name=""/>
+        <p:cNvGrpSpPr/>
+        <p:nvPr/>
+      </p:nvGrpSpPr>
+      <p:grpSpPr/>
+      <p:sp>
+        <p:nvSpPr>
+          <p:cNvPr id="2" name="Rectangle 1"/>
+          <p:cNvSpPr/>
+          <p:nvPr/>
+        </p:nvSpPr>
+        <p:spPr>
+          <a:xfrm>
+            <a:off x="0" y="0"/>
+            <a:ext cx="12191695" cy="82296"/>
+          </a:xfrm>
+          <a:prstGeom prst="rect">
+            <a:avLst/>
+          </a:prstGeom>
+          <a:solidFill>
+            <a:srgbClr val="3B82F6"/>
+          </a:solidFill>
+          <a:ln>
+            <a:noFill/>
+          </a:ln>
+          <a:effectLst/>
+        </p:spPr>
+        <p:style>
+          <a:lnRef idx="1">
+            <a:schemeClr val="accent1"/>
+          </a:lnRef>
+          <a:fillRef idx="3">
+            <a:schemeClr val="accent1"/>
+          </a:fillRef>
+          <a:effectRef idx="2">
+            <a:schemeClr val="accent1"/>
+          </a:effectRef>
+          <a:fontRef idx="minor">
+            <a:schemeClr val="lt1"/>
+          </a:fontRef>
+        </p:style>
+        <p:txBody>
+          <a:bodyPr rtlCol="0" anchor="ctr"/>
+          <a:lstStyle/>
+          <a:p>
+            <a:pPr algn="ctr"/>
+          </a:p>
+        </p:txBody>
+      </p:sp>
+      <p:sp>
+        <p:nvSpPr>
+          <p:cNvPr id="3" name="TextBox 2"/>
+          <p:cNvSpPr txBox="1"/>
+          <p:nvPr/>
+        </p:nvSpPr>
+        <p:spPr>
+          <a:xfrm>
+            <a:off x="548640" y="274320"/>
+            <a:ext cx="10515600" cy="320040"/>
+          </a:xfrm>
+          <a:prstGeom prst="rect">
+            <a:avLst/>
+          </a:prstGeom>
+          <a:noFill/>
+        </p:spPr>
+        <p:txBody>
+          <a:bodyPr wrap="square" anchor="t" lIns="0" rIns="0" tIns="0" bIns="0">
+            <a:spAutoFit/>
+          </a:bodyPr>
+          <a:lstStyle/>
+          <a:p>
+            <a:pPr algn="l"/>
+            <a:r>
+              <a:rPr sz="1300" b="1" i="0">
+                <a:solidFill>
+                  <a:srgbClr val="3B82F6"/>
+                </a:solidFill>
+                <a:latin typeface="Calibri"/>
+              </a:rPr>
+              <a:t>SOURCES</a:t>
+            </a:r>
+          </a:p>
+        </p:txBody>
+      </p:sp>
+      <p:sp>
+        <p:nvSpPr>
+          <p:cNvPr id="4" name="TextBox 3"/>
+          <p:cNvSpPr txBox="1"/>
+          <p:nvPr/>
+        </p:nvSpPr>
+        <p:spPr>
+          <a:xfrm>
+            <a:off x="548640" y="566928"/>
+            <a:ext cx="10881360" cy="640080"/>
+          </a:xfrm>
+          <a:prstGeom prst="rect">
+            <a:avLst/>
+          </a:prstGeom>
+          <a:noFill/>
+        </p:spPr>
+        <p:txBody>
+          <a:bodyPr wrap="square" anchor="t" lIns="0" rIns="0" tIns="0" bIns="0">
+            <a:spAutoFit/>
+          </a:bodyPr>
+          <a:lstStyle/>
+          <a:p>
+            <a:pPr algn="l"/>
+            <a:r>
+              <a:rPr sz="2800" b="1" i="0">
+                <a:solidFill>
+                  <a:srgbClr val="1B2238"/>
+                </a:solidFill>
+                <a:latin typeface="Calibri"/>
+              </a:rPr>
+              <a:t>References</a:t>
+            </a:r>
+          </a:p>
+        </p:txBody>
+      </p:sp>
+      <p:sp>
+        <p:nvSpPr>
+          <p:cNvPr id="5" name="Rectangle 4"/>
+          <p:cNvSpPr/>
+          <p:nvPr/>
+        </p:nvSpPr>
+        <p:spPr>
+          <a:xfrm>
+            <a:off x="548640" y="1170432"/>
+            <a:ext cx="1005840" cy="38100"/>
+          </a:xfrm>
+          <a:prstGeom prst="rect">
+            <a:avLst/>
+          </a:prstGeom>
+          <a:solidFill>
+            <a:srgbClr val="3B82F6"/>
+          </a:solidFill>
+          <a:ln>
+            <a:noFill/>
+          </a:ln>
+          <a:effectLst/>
+        </p:spPr>
+        <p:style>
+          <a:lnRef idx="1">
+            <a:schemeClr val="accent1"/>
+          </a:lnRef>
+          <a:fillRef idx="3">
+            <a:schemeClr val="accent1"/>
+          </a:fillRef>
+          <a:effectRef idx="2">
+            <a:schemeClr val="accent1"/>
+          </a:effectRef>
+          <a:fontRef idx="minor">
+            <a:schemeClr val="lt1"/>
+          </a:fontRef>
+        </p:style>
+        <p:txBody>
+          <a:bodyPr rtlCol="0" anchor="ctr"/>
+          <a:lstStyle/>
+          <a:p>
+            <a:pPr algn="ctr"/>
+          </a:p>
+        </p:txBody>
+      </p:sp>
+      <p:sp>
+        <p:nvSpPr>
+          <p:cNvPr id="6" name="TextBox 5"/>
+          <p:cNvSpPr txBox="1"/>
+          <p:nvPr/>
+        </p:nvSpPr>
+        <p:spPr>
+          <a:xfrm>
+            <a:off x="11155680" y="6446520"/>
+            <a:ext cx="822960" cy="320040"/>
+          </a:xfrm>
+          <a:prstGeom prst="rect">
+            <a:avLst/>
+          </a:prstGeom>
+          <a:noFill/>
+        </p:spPr>
+        <p:txBody>
+          <a:bodyPr wrap="square" anchor="t" lIns="0" rIns="0" tIns="0" bIns="0">
+            <a:spAutoFit/>
+          </a:bodyPr>
+          <a:lstStyle/>
+          <a:p>
+            <a:pPr algn="r"/>
+            <a:r>
+              <a:rPr sz="1100" b="0" i="0">
+                <a:solidFill>
+                  <a:srgbClr val="6B7280"/>
+                </a:solidFill>
+                <a:latin typeface="Calibri"/>
+              </a:rPr>
+              <a:t>11 / 12</a:t>
+            </a:r>
+          </a:p>
+        </p:txBody>
+      </p:sp>
+      <p:sp>
+        <p:nvSpPr>
+          <p:cNvPr id="7" name="TextBox 6"/>
+          <p:cNvSpPr txBox="1"/>
+          <p:nvPr/>
+        </p:nvSpPr>
+        <p:spPr>
+          <a:xfrm>
+            <a:off x="640080" y="1645920"/>
+            <a:ext cx="10881360" cy="2743200"/>
+          </a:xfrm>
+          <a:prstGeom prst="rect">
+            <a:avLst/>
+          </a:prstGeom>
+          <a:noFill/>
+        </p:spPr>
+        <p:txBody>
+          <a:bodyPr wrap="square">
+            <a:spAutoFit/>
+          </a:bodyPr>
+          <a:lstStyle/>
+          <a:p>
+            <a:pPr>
+              <a:spcAft>
+                <a:spcPts val="1600"/>
+              </a:spcAft>
+            </a:pPr>
+            <a:r>
+              <a:rPr sz="1600">
+                <a:solidFill>
+                  <a:srgbClr val="1F2937"/>
+                </a:solidFill>
+                <a:latin typeface="Calibri"/>
+              </a:rPr>
+              <a:t>•  Gopakumar, et al. (2026). Conformal Prediction for surrogate-model uncertainty quantification in physics simulation domains (PDEs, MHD, weather, fusion). [Base paper]</a:t>
+            </a:r>
+          </a:p>
+          <a:p>
+            <a:pPr>
+              <a:spcAft>
+                <a:spcPts val="1600"/>
+              </a:spcAft>
+            </a:pPr>
+            <a:r>
+              <a:rPr sz="1600">
+                <a:solidFill>
+                  <a:srgbClr val="1F2937"/>
+                </a:solidFill>
+                <a:latin typeface="Calibri"/>
+              </a:rPr>
+              <a:t>•  Hospital Triage and Patient History Data. Kaggle (maalona) — Yale New Haven Health System, retrospective study, March 2014 – July 2017. [Real-world calibration data]</a:t>
+            </a:r>
+          </a:p>
+        </p:txBody>
+      </p:sp>
+      <p:sp>
+        <p:nvSpPr>
+          <p:cNvPr id="8" name="Rectangle 7"/>
+          <p:cNvSpPr/>
+          <p:nvPr/>
+        </p:nvSpPr>
+        <p:spPr>
+          <a:xfrm>
+            <a:off x="640080" y="3657600"/>
+            <a:ext cx="10881360" cy="731520"/>
+          </a:xfrm>
+          <a:prstGeom prst="rect">
+            <a:avLst/>
+          </a:prstGeom>
+          <a:solidFill>
+            <a:srgbClr val="F8FAFC"/>
+          </a:solidFill>
+          <a:ln w="9525">
+            <a:solidFill>
+              <a:srgbClr val="E2E8F0"/>
+            </a:solidFill>
+          </a:ln>
+          <a:effectLst/>
+        </p:spPr>
+        <p:style>
+          <a:lnRef idx="1">
+            <a:schemeClr val="accent1"/>
+          </a:lnRef>
+          <a:fillRef idx="3">
+            <a:schemeClr val="accent1"/>
+          </a:fillRef>
+          <a:effectRef idx="2">
+            <a:schemeClr val="accent1"/>
+          </a:effectRef>
+          <a:fontRef idx="minor">
+            <a:schemeClr val="lt1"/>
+          </a:fontRef>
+        </p:style>
+        <p:txBody>
+          <a:bodyPr rtlCol="0" anchor="ctr"/>
+          <a:lstStyle/>
+          <a:p>
+            <a:pPr algn="ctr"/>
+          </a:p>
+        </p:txBody>
+      </p:sp>
+      <p:sp>
+        <p:nvSpPr>
+          <p:cNvPr id="9" name="TextBox 8"/>
+          <p:cNvSpPr txBox="1"/>
+          <p:nvPr/>
+        </p:nvSpPr>
+        <p:spPr>
+          <a:xfrm>
+            <a:off x="914400" y="3840480"/>
+            <a:ext cx="10332720" cy="365760"/>
+          </a:xfrm>
+          <a:prstGeom prst="rect">
+            <a:avLst/>
+          </a:prstGeom>
+          <a:noFill/>
+        </p:spPr>
+        <p:txBody>
+          <a:bodyPr wrap="square" anchor="t" lIns="0" rIns="0" tIns="0" bIns="0">
+            <a:spAutoFit/>
+          </a:bodyPr>
+          <a:lstStyle/>
+          <a:p>
+            <a:pPr algn="l"/>
+            <a:r>
+              <a:rPr sz="1300" b="0" i="1">
+                <a:solidFill>
+                  <a:srgbClr val="D97706"/>
+                </a:solidFill>
+                <a:latin typeface="Calibri"/>
+              </a:rPr>
+              <a:t>Full reference list (30 papers target) pending completion of the literature review.</a:t>
+            </a:r>
+          </a:p>
+        </p:txBody>
+      </p:sp>
+    </p:spTree>
+  </p:cSld>
+  <p:clrMapOvr>
+    <a:masterClrMapping/>
+  </p:clrMapOvr>
+</p:sld>
+</file>
+
+<file path=ppt/slides/slide12.xml><?xml version="1.0" encoding="utf-8"?>
+<p:sld xmlns:a="http://schemas.openxmlformats.org/drawingml/2006/main" xmlns:p="http://schemas.openxmlformats.org/presentationml/2006/main" xmlns:r="http://schemas.openxmlformats.org/officeDocument/2006/relationships">
+  <p:cSld>
+    <p:spTree>
+      <p:nvGrpSpPr>
+        <p:cNvPr id="1" name=""/>
+        <p:cNvGrpSpPr/>
+        <p:nvPr/>
+      </p:nvGrpSpPr>
+      <p:grpSpPr/>
+      <p:sp>
+        <p:nvSpPr>
+          <p:cNvPr id="2" name="Rectangle 1"/>
+          <p:cNvSpPr/>
+          <p:nvPr/>
+        </p:nvSpPr>
+        <p:spPr>
+          <a:xfrm>
+            <a:off x="0" y="0"/>
+            <a:ext cx="12191695" cy="6858000"/>
+          </a:xfrm>
+          <a:prstGeom prst="rect">
+            <a:avLst/>
+          </a:prstGeom>
+          <a:solidFill>
+            <a:srgbClr val="1B2238"/>
+          </a:solidFill>
+          <a:ln>
+            <a:noFill/>
+          </a:ln>
+          <a:effectLst/>
+        </p:spPr>
+        <p:style>
+          <a:lnRef idx="1">
+            <a:schemeClr val="accent1"/>
+          </a:lnRef>
+          <a:fillRef idx="3">
+            <a:schemeClr val="accent1"/>
+          </a:fillRef>
+          <a:effectRef idx="2">
+            <a:schemeClr val="accent1"/>
+          </a:effectRef>
+          <a:fontRef idx="minor">
+            <a:schemeClr val="lt1"/>
+          </a:fontRef>
+        </p:style>
+        <p:txBody>
+          <a:bodyPr rtlCol="0" anchor="ctr"/>
+          <a:lstStyle/>
+          <a:p>
+            <a:pPr algn="ctr"/>
+          </a:p>
+        </p:txBody>
+      </p:sp>
+      <p:sp>
+        <p:nvSpPr>
+          <p:cNvPr id="3" name="Rectangle 2"/>
+          <p:cNvSpPr/>
+          <p:nvPr/>
+        </p:nvSpPr>
+        <p:spPr>
+          <a:xfrm>
+            <a:off x="0" y="5989320"/>
+            <a:ext cx="12191695" cy="109728"/>
+          </a:xfrm>
+          <a:prstGeom prst="rect">
+            <a:avLst/>
+          </a:prstGeom>
+          <a:solidFill>
+            <a:srgbClr val="3B82F6"/>
+          </a:solidFill>
+          <a:ln>
+            <a:noFill/>
+          </a:ln>
+          <a:effectLst/>
+        </p:spPr>
+        <p:style>
+          <a:lnRef idx="1">
+            <a:schemeClr val="accent1"/>
+          </a:lnRef>
+          <a:fillRef idx="3">
+            <a:schemeClr val="accent1"/>
+          </a:fillRef>
+          <a:effectRef idx="2">
+            <a:schemeClr val="accent1"/>
+          </a:effectRef>
+          <a:fontRef idx="minor">
+            <a:schemeClr val="lt1"/>
+          </a:fontRef>
+        </p:style>
+        <p:txBody>
+          <a:bodyPr rtlCol="0" anchor="ctr"/>
+          <a:lstStyle/>
+          <a:p>
+            <a:pPr algn="ctr"/>
+          </a:p>
+        </p:txBody>
+      </p:sp>
+      <p:sp>
+        <p:nvSpPr>
+          <p:cNvPr id="4" name="TextBox 3"/>
+          <p:cNvSpPr txBox="1"/>
+          <p:nvPr/>
+        </p:nvSpPr>
+        <p:spPr>
+          <a:xfrm>
+            <a:off x="914400" y="2743200"/>
+            <a:ext cx="10332720" cy="914400"/>
+          </a:xfrm>
+          <a:prstGeom prst="rect">
+            <a:avLst/>
+          </a:prstGeom>
+          <a:noFill/>
+        </p:spPr>
+        <p:txBody>
+          <a:bodyPr wrap="square" anchor="t" lIns="0" rIns="0" tIns="0" bIns="0">
+            <a:spAutoFit/>
+          </a:bodyPr>
+          <a:lstStyle/>
+          <a:p>
+            <a:pPr algn="ctr"/>
+            <a:r>
+              <a:rPr sz="4400" b="1" i="0">
+                <a:solidFill>
+                  <a:srgbClr val="FFFFFF"/>
+                </a:solidFill>
+                <a:latin typeface="Calibri"/>
+              </a:rPr>
+              <a:t>Thank You</a:t>
+            </a:r>
+          </a:p>
+        </p:txBody>
+      </p:sp>
+      <p:sp>
+        <p:nvSpPr>
+          <p:cNvPr id="5" name="TextBox 4"/>
+          <p:cNvSpPr txBox="1"/>
+          <p:nvPr/>
+        </p:nvSpPr>
+        <p:spPr>
+          <a:xfrm>
+            <a:off x="914400" y="3657600"/>
+            <a:ext cx="10332720" cy="457200"/>
+          </a:xfrm>
+          <a:prstGeom prst="rect">
+            <a:avLst/>
+          </a:prstGeom>
+          <a:noFill/>
+        </p:spPr>
+        <p:txBody>
+          <a:bodyPr wrap="square" anchor="t" lIns="0" rIns="0" tIns="0" bIns="0">
+            <a:spAutoFit/>
+          </a:bodyPr>
+          <a:lstStyle/>
+          <a:p>
+            <a:pPr algn="ctr"/>
+            <a:r>
+              <a:rPr sz="1800" b="0" i="1">
+                <a:solidFill>
+                  <a:srgbClr val="93C5FD"/>
+                </a:solidFill>
+                <a:latin typeface="Calibri"/>
+              </a:rPr>
+              <a:t>Questions?</a:t>
+            </a:r>
+          </a:p>
+        </p:txBody>
+      </p:sp>
+      <p:sp>
+        <p:nvSpPr>
+          <p:cNvPr id="6" name="TextBox 5"/>
+          <p:cNvSpPr txBox="1"/>
+          <p:nvPr/>
+        </p:nvSpPr>
+        <p:spPr>
+          <a:xfrm>
+            <a:off x="11155680" y="6446520"/>
+            <a:ext cx="822960" cy="320040"/>
+          </a:xfrm>
+          <a:prstGeom prst="rect">
+            <a:avLst/>
+          </a:prstGeom>
+          <a:noFill/>
+        </p:spPr>
+        <p:txBody>
+          <a:bodyPr wrap="square" anchor="t" lIns="0" rIns="0" tIns="0" bIns="0">
+            <a:spAutoFit/>
+          </a:bodyPr>
+          <a:lstStyle/>
+          <a:p>
+            <a:pPr algn="r"/>
+            <a:r>
+              <a:rPr sz="1100" b="0" i="0">
+                <a:solidFill>
+                  <a:srgbClr val="93C5FD"/>
+                </a:solidFill>
+                <a:latin typeface="Calibri"/>
+              </a:rPr>
+              <a:t>12 / 12</a:t>
             </a:r>
           </a:p>
         </p:txBody>
@@ -3463,7 +4446,7 @@
                 </a:solidFill>
                 <a:latin typeface="Calibri"/>
               </a:rPr>
-              <a:t>OVERVIEW</a:t>
+              <a:t>OUTLINE</a:t>
             </a:r>
           </a:p>
         </p:txBody>
@@ -3498,7 +4481,7 @@
                 </a:solidFill>
                 <a:latin typeface="Calibri"/>
               </a:rPr>
-              <a:t>Abstract</a:t>
+              <a:t>Table of Contents</a:t>
             </a:r>
           </a:p>
         </p:txBody>
@@ -3577,32 +4560,100 @@
                 </a:solidFill>
                 <a:latin typeface="Calibri"/>
               </a:rPr>
-              <a:t>2 / 9</a:t>
-            </a:r>
-          </a:p>
-        </p:txBody>
-      </p:sp>
-      <p:sp>
-        <p:nvSpPr>
-          <p:cNvPr id="7" name="Rectangle 6"/>
+              <a:t>2 / 12</a:t>
+            </a:r>
+          </a:p>
+        </p:txBody>
+      </p:sp>
+      <p:sp>
+        <p:nvSpPr>
+          <p:cNvPr id="7" name="TextBox 6"/>
+          <p:cNvSpPr txBox="1"/>
+          <p:nvPr/>
+        </p:nvSpPr>
+        <p:spPr>
+          <a:xfrm>
+            <a:off x="822960" y="1600200"/>
+            <a:ext cx="822960" cy="566928"/>
+          </a:xfrm>
+          <a:prstGeom prst="rect">
+            <a:avLst/>
+          </a:prstGeom>
+          <a:noFill/>
+        </p:spPr>
+        <p:txBody>
+          <a:bodyPr wrap="square" anchor="t" lIns="0" rIns="0" tIns="0" bIns="0">
+            <a:spAutoFit/>
+          </a:bodyPr>
+          <a:lstStyle/>
+          <a:p>
+            <a:pPr algn="l"/>
+            <a:r>
+              <a:rPr sz="1800" b="1" i="0">
+                <a:solidFill>
+                  <a:srgbClr val="1E40AF"/>
+                </a:solidFill>
+                <a:latin typeface="Calibri"/>
+              </a:rPr>
+              <a:t>01</a:t>
+            </a:r>
+          </a:p>
+        </p:txBody>
+      </p:sp>
+      <p:sp>
+        <p:nvSpPr>
+          <p:cNvPr id="8" name="TextBox 7"/>
+          <p:cNvSpPr txBox="1"/>
+          <p:nvPr/>
+        </p:nvSpPr>
+        <p:spPr>
+          <a:xfrm>
+            <a:off x="1828800" y="1600200"/>
+            <a:ext cx="8686800" cy="566928"/>
+          </a:xfrm>
+          <a:prstGeom prst="rect">
+            <a:avLst/>
+          </a:prstGeom>
+          <a:noFill/>
+        </p:spPr>
+        <p:txBody>
+          <a:bodyPr wrap="square" anchor="ctr" lIns="0" rIns="0" tIns="0" bIns="0">
+            <a:spAutoFit/>
+          </a:bodyPr>
+          <a:lstStyle/>
+          <a:p>
+            <a:pPr algn="l"/>
+            <a:r>
+              <a:rPr sz="1700" b="0" i="0">
+                <a:solidFill>
+                  <a:srgbClr val="1F2937"/>
+                </a:solidFill>
+                <a:latin typeface="Calibri"/>
+              </a:rPr>
+              <a:t>Abstract</a:t>
+            </a:r>
+          </a:p>
+        </p:txBody>
+      </p:sp>
+      <p:sp>
+        <p:nvSpPr>
+          <p:cNvPr id="9" name="Rectangle 8"/>
           <p:cNvSpPr/>
           <p:nvPr/>
         </p:nvSpPr>
         <p:spPr>
           <a:xfrm>
-            <a:off x="640080" y="1554480"/>
-            <a:ext cx="10881360" cy="4389120"/>
+            <a:off x="822960" y="2141728"/>
+            <a:ext cx="10424160" cy="12700"/>
           </a:xfrm>
           <a:prstGeom prst="rect">
             <a:avLst/>
           </a:prstGeom>
           <a:solidFill>
-            <a:srgbClr val="F8FAFC"/>
+            <a:srgbClr val="E2E8F0"/>
           </a:solidFill>
-          <a:ln w="9525">
-            <a:solidFill>
-              <a:srgbClr val="E2E8F0"/>
-            </a:solidFill>
+          <a:ln>
+            <a:noFill/>
           </a:ln>
           <a:effectLst/>
         </p:spPr>
@@ -3630,14 +4681,14 @@
       </p:sp>
       <p:sp>
         <p:nvSpPr>
-          <p:cNvPr id="8" name="TextBox 7"/>
+          <p:cNvPr id="10" name="TextBox 9"/>
           <p:cNvSpPr txBox="1"/>
           <p:nvPr/>
         </p:nvSpPr>
         <p:spPr>
           <a:xfrm>
-            <a:off x="914400" y="1828800"/>
-            <a:ext cx="10332720" cy="3840480"/>
+            <a:off x="822960" y="2167128"/>
+            <a:ext cx="822960" cy="566928"/>
           </a:xfrm>
           <a:prstGeom prst="rect">
             <a:avLst/>
@@ -3652,38 +4703,777 @@
           <a:p>
             <a:pPr algn="l"/>
             <a:r>
-              <a:rPr sz="1600" b="0" i="0">
-                <a:solidFill>
-                  <a:srgbClr val="1F2937"/>
+              <a:rPr sz="1800" b="1" i="0">
+                <a:solidFill>
+                  <a:srgbClr val="1E40AF"/>
                 </a:solidFill>
                 <a:latin typeface="Calibri"/>
               </a:rPr>
-              <a:t>Surrogate models are increasingly used to approximate expensive simulations and guide decisions in stochastic service systems such as emergency room staffing. However, reliable uncertainty quantification (UQ) for these surrogates remains an open problem: Gaussian Processes are costly and rely on distributional assumptions, while Conformal Prediction (CP) offers a distribution-free, finite-sample coverage guarantee but has only been validated for surrogate models in physics domains (PDEs, magnetohydrodynamics, weather, fusion).</a:t>
-            </a:r>
-          </a:p>
+              <a:t>02</a:t>
+            </a:r>
+          </a:p>
+        </p:txBody>
+      </p:sp>
+      <p:sp>
+        <p:nvSpPr>
+          <p:cNvPr id="11" name="TextBox 10"/>
+          <p:cNvSpPr txBox="1"/>
+          <p:nvPr/>
+        </p:nvSpPr>
+        <p:spPr>
+          <a:xfrm>
+            <a:off x="1828800" y="2167128"/>
+            <a:ext cx="8686800" cy="566928"/>
+          </a:xfrm>
+          <a:prstGeom prst="rect">
+            <a:avLst/>
+          </a:prstGeom>
+          <a:noFill/>
+        </p:spPr>
+        <p:txBody>
+          <a:bodyPr wrap="square" anchor="ctr" lIns="0" rIns="0" tIns="0" bIns="0">
+            <a:spAutoFit/>
+          </a:bodyPr>
+          <a:lstStyle/>
           <a:p>
             <a:pPr algn="l"/>
             <a:r>
-              <a:rPr sz="1600" b="0" i="0">
+              <a:rPr sz="1700" b="0" i="0">
                 <a:solidFill>
                   <a:srgbClr val="1F2937"/>
                 </a:solidFill>
                 <a:latin typeface="Calibri"/>
               </a:rPr>
-              <a:t/>
-            </a:r>
-          </a:p>
+              <a:t>Literature Review</a:t>
+            </a:r>
+          </a:p>
+        </p:txBody>
+      </p:sp>
+      <p:sp>
+        <p:nvSpPr>
+          <p:cNvPr id="12" name="Rectangle 11"/>
+          <p:cNvSpPr/>
+          <p:nvPr/>
+        </p:nvSpPr>
+        <p:spPr>
+          <a:xfrm>
+            <a:off x="822960" y="2708656"/>
+            <a:ext cx="10424160" cy="12700"/>
+          </a:xfrm>
+          <a:prstGeom prst="rect">
+            <a:avLst/>
+          </a:prstGeom>
+          <a:solidFill>
+            <a:srgbClr val="E2E8F0"/>
+          </a:solidFill>
+          <a:ln>
+            <a:noFill/>
+          </a:ln>
+          <a:effectLst/>
+        </p:spPr>
+        <p:style>
+          <a:lnRef idx="1">
+            <a:schemeClr val="accent1"/>
+          </a:lnRef>
+          <a:fillRef idx="3">
+            <a:schemeClr val="accent1"/>
+          </a:fillRef>
+          <a:effectRef idx="2">
+            <a:schemeClr val="accent1"/>
+          </a:effectRef>
+          <a:fontRef idx="minor">
+            <a:schemeClr val="lt1"/>
+          </a:fontRef>
+        </p:style>
+        <p:txBody>
+          <a:bodyPr rtlCol="0" anchor="ctr"/>
+          <a:lstStyle/>
+          <a:p>
+            <a:pPr algn="ctr"/>
+          </a:p>
+        </p:txBody>
+      </p:sp>
+      <p:sp>
+        <p:nvSpPr>
+          <p:cNvPr id="13" name="TextBox 12"/>
+          <p:cNvSpPr txBox="1"/>
+          <p:nvPr/>
+        </p:nvSpPr>
+        <p:spPr>
+          <a:xfrm>
+            <a:off x="822960" y="2734056"/>
+            <a:ext cx="822960" cy="566928"/>
+          </a:xfrm>
+          <a:prstGeom prst="rect">
+            <a:avLst/>
+          </a:prstGeom>
+          <a:noFill/>
+        </p:spPr>
+        <p:txBody>
+          <a:bodyPr wrap="square" anchor="t" lIns="0" rIns="0" tIns="0" bIns="0">
+            <a:spAutoFit/>
+          </a:bodyPr>
+          <a:lstStyle/>
           <a:p>
             <a:pPr algn="l"/>
             <a:r>
-              <a:rPr sz="1600" b="0" i="0">
-                <a:solidFill>
-                  <a:srgbClr val="1F2937"/>
+              <a:rPr sz="1800" b="1" i="0">
+                <a:solidFill>
+                  <a:srgbClr val="1E40AF"/>
                 </a:solidFill>
                 <a:latin typeface="Calibri"/>
               </a:rPr>
-              <a:t>This project builds a discrete-event simulation (DES) of an emergency room, calibrated on real hospital data, trains a surrogate model on it, and applies standard and Mondrian Conformal Prediction to quantify uncertainty in the surrogate's predictions. The goal is to test whether two limitations explicitly noted in prior work — marginal-only coverage and an untested exchangeability assumption — hold up in a discrete-event / queueing domain that has not been studied before in this context.</a:t>
-            </a:r>
+              <a:t>03</a:t>
+            </a:r>
+          </a:p>
+        </p:txBody>
+      </p:sp>
+      <p:sp>
+        <p:nvSpPr>
+          <p:cNvPr id="14" name="TextBox 13"/>
+          <p:cNvSpPr txBox="1"/>
+          <p:nvPr/>
+        </p:nvSpPr>
+        <p:spPr>
+          <a:xfrm>
+            <a:off x="1828800" y="2734056"/>
+            <a:ext cx="8686800" cy="566928"/>
+          </a:xfrm>
+          <a:prstGeom prst="rect">
+            <a:avLst/>
+          </a:prstGeom>
+          <a:noFill/>
+        </p:spPr>
+        <p:txBody>
+          <a:bodyPr wrap="square" anchor="ctr" lIns="0" rIns="0" tIns="0" bIns="0">
+            <a:spAutoFit/>
+          </a:bodyPr>
+          <a:lstStyle/>
+          <a:p>
+            <a:pPr algn="l"/>
+            <a:r>
+              <a:rPr sz="1700" b="0" i="0">
+                <a:solidFill>
+                  <a:srgbClr val="1F2937"/>
+                </a:solidFill>
+                <a:latin typeface="Calibri"/>
+              </a:rPr>
+              <a:t>Research Gap</a:t>
+            </a:r>
+          </a:p>
+        </p:txBody>
+      </p:sp>
+      <p:sp>
+        <p:nvSpPr>
+          <p:cNvPr id="15" name="Rectangle 14"/>
+          <p:cNvSpPr/>
+          <p:nvPr/>
+        </p:nvSpPr>
+        <p:spPr>
+          <a:xfrm>
+            <a:off x="822960" y="3275584"/>
+            <a:ext cx="10424160" cy="12700"/>
+          </a:xfrm>
+          <a:prstGeom prst="rect">
+            <a:avLst/>
+          </a:prstGeom>
+          <a:solidFill>
+            <a:srgbClr val="E2E8F0"/>
+          </a:solidFill>
+          <a:ln>
+            <a:noFill/>
+          </a:ln>
+          <a:effectLst/>
+        </p:spPr>
+        <p:style>
+          <a:lnRef idx="1">
+            <a:schemeClr val="accent1"/>
+          </a:lnRef>
+          <a:fillRef idx="3">
+            <a:schemeClr val="accent1"/>
+          </a:fillRef>
+          <a:effectRef idx="2">
+            <a:schemeClr val="accent1"/>
+          </a:effectRef>
+          <a:fontRef idx="minor">
+            <a:schemeClr val="lt1"/>
+          </a:fontRef>
+        </p:style>
+        <p:txBody>
+          <a:bodyPr rtlCol="0" anchor="ctr"/>
+          <a:lstStyle/>
+          <a:p>
+            <a:pPr algn="ctr"/>
+          </a:p>
+        </p:txBody>
+      </p:sp>
+      <p:sp>
+        <p:nvSpPr>
+          <p:cNvPr id="16" name="TextBox 15"/>
+          <p:cNvSpPr txBox="1"/>
+          <p:nvPr/>
+        </p:nvSpPr>
+        <p:spPr>
+          <a:xfrm>
+            <a:off x="822960" y="3300984"/>
+            <a:ext cx="822960" cy="566928"/>
+          </a:xfrm>
+          <a:prstGeom prst="rect">
+            <a:avLst/>
+          </a:prstGeom>
+          <a:noFill/>
+        </p:spPr>
+        <p:txBody>
+          <a:bodyPr wrap="square" anchor="t" lIns="0" rIns="0" tIns="0" bIns="0">
+            <a:spAutoFit/>
+          </a:bodyPr>
+          <a:lstStyle/>
+          <a:p>
+            <a:pPr algn="l"/>
+            <a:r>
+              <a:rPr sz="1800" b="1" i="0">
+                <a:solidFill>
+                  <a:srgbClr val="1E40AF"/>
+                </a:solidFill>
+                <a:latin typeface="Calibri"/>
+              </a:rPr>
+              <a:t>04</a:t>
+            </a:r>
+          </a:p>
+        </p:txBody>
+      </p:sp>
+      <p:sp>
+        <p:nvSpPr>
+          <p:cNvPr id="17" name="TextBox 16"/>
+          <p:cNvSpPr txBox="1"/>
+          <p:nvPr/>
+        </p:nvSpPr>
+        <p:spPr>
+          <a:xfrm>
+            <a:off x="1828800" y="3300984"/>
+            <a:ext cx="8686800" cy="566928"/>
+          </a:xfrm>
+          <a:prstGeom prst="rect">
+            <a:avLst/>
+          </a:prstGeom>
+          <a:noFill/>
+        </p:spPr>
+        <p:txBody>
+          <a:bodyPr wrap="square" anchor="ctr" lIns="0" rIns="0" tIns="0" bIns="0">
+            <a:spAutoFit/>
+          </a:bodyPr>
+          <a:lstStyle/>
+          <a:p>
+            <a:pPr algn="l"/>
+            <a:r>
+              <a:rPr sz="1700" b="0" i="0">
+                <a:solidFill>
+                  <a:srgbClr val="1F2937"/>
+                </a:solidFill>
+                <a:latin typeface="Calibri"/>
+              </a:rPr>
+              <a:t>Problem Statement</a:t>
+            </a:r>
+          </a:p>
+        </p:txBody>
+      </p:sp>
+      <p:sp>
+        <p:nvSpPr>
+          <p:cNvPr id="18" name="Rectangle 17"/>
+          <p:cNvSpPr/>
+          <p:nvPr/>
+        </p:nvSpPr>
+        <p:spPr>
+          <a:xfrm>
+            <a:off x="822960" y="3842512"/>
+            <a:ext cx="10424160" cy="12700"/>
+          </a:xfrm>
+          <a:prstGeom prst="rect">
+            <a:avLst/>
+          </a:prstGeom>
+          <a:solidFill>
+            <a:srgbClr val="E2E8F0"/>
+          </a:solidFill>
+          <a:ln>
+            <a:noFill/>
+          </a:ln>
+          <a:effectLst/>
+        </p:spPr>
+        <p:style>
+          <a:lnRef idx="1">
+            <a:schemeClr val="accent1"/>
+          </a:lnRef>
+          <a:fillRef idx="3">
+            <a:schemeClr val="accent1"/>
+          </a:fillRef>
+          <a:effectRef idx="2">
+            <a:schemeClr val="accent1"/>
+          </a:effectRef>
+          <a:fontRef idx="minor">
+            <a:schemeClr val="lt1"/>
+          </a:fontRef>
+        </p:style>
+        <p:txBody>
+          <a:bodyPr rtlCol="0" anchor="ctr"/>
+          <a:lstStyle/>
+          <a:p>
+            <a:pPr algn="ctr"/>
+          </a:p>
+        </p:txBody>
+      </p:sp>
+      <p:sp>
+        <p:nvSpPr>
+          <p:cNvPr id="19" name="TextBox 18"/>
+          <p:cNvSpPr txBox="1"/>
+          <p:nvPr/>
+        </p:nvSpPr>
+        <p:spPr>
+          <a:xfrm>
+            <a:off x="822960" y="3867912"/>
+            <a:ext cx="822960" cy="566928"/>
+          </a:xfrm>
+          <a:prstGeom prst="rect">
+            <a:avLst/>
+          </a:prstGeom>
+          <a:noFill/>
+        </p:spPr>
+        <p:txBody>
+          <a:bodyPr wrap="square" anchor="t" lIns="0" rIns="0" tIns="0" bIns="0">
+            <a:spAutoFit/>
+          </a:bodyPr>
+          <a:lstStyle/>
+          <a:p>
+            <a:pPr algn="l"/>
+            <a:r>
+              <a:rPr sz="1800" b="1" i="0">
+                <a:solidFill>
+                  <a:srgbClr val="1E40AF"/>
+                </a:solidFill>
+                <a:latin typeface="Calibri"/>
+              </a:rPr>
+              <a:t>05</a:t>
+            </a:r>
+          </a:p>
+        </p:txBody>
+      </p:sp>
+      <p:sp>
+        <p:nvSpPr>
+          <p:cNvPr id="20" name="TextBox 19"/>
+          <p:cNvSpPr txBox="1"/>
+          <p:nvPr/>
+        </p:nvSpPr>
+        <p:spPr>
+          <a:xfrm>
+            <a:off x="1828800" y="3867912"/>
+            <a:ext cx="8686800" cy="566928"/>
+          </a:xfrm>
+          <a:prstGeom prst="rect">
+            <a:avLst/>
+          </a:prstGeom>
+          <a:noFill/>
+        </p:spPr>
+        <p:txBody>
+          <a:bodyPr wrap="square" anchor="ctr" lIns="0" rIns="0" tIns="0" bIns="0">
+            <a:spAutoFit/>
+          </a:bodyPr>
+          <a:lstStyle/>
+          <a:p>
+            <a:pPr algn="l"/>
+            <a:r>
+              <a:rPr sz="1700" b="0" i="0">
+                <a:solidFill>
+                  <a:srgbClr val="1F2937"/>
+                </a:solidFill>
+                <a:latin typeface="Calibri"/>
+              </a:rPr>
+              <a:t>Methodology</a:t>
+            </a:r>
+          </a:p>
+        </p:txBody>
+      </p:sp>
+      <p:sp>
+        <p:nvSpPr>
+          <p:cNvPr id="21" name="Rectangle 20"/>
+          <p:cNvSpPr/>
+          <p:nvPr/>
+        </p:nvSpPr>
+        <p:spPr>
+          <a:xfrm>
+            <a:off x="822960" y="4409440"/>
+            <a:ext cx="10424160" cy="12700"/>
+          </a:xfrm>
+          <a:prstGeom prst="rect">
+            <a:avLst/>
+          </a:prstGeom>
+          <a:solidFill>
+            <a:srgbClr val="E2E8F0"/>
+          </a:solidFill>
+          <a:ln>
+            <a:noFill/>
+          </a:ln>
+          <a:effectLst/>
+        </p:spPr>
+        <p:style>
+          <a:lnRef idx="1">
+            <a:schemeClr val="accent1"/>
+          </a:lnRef>
+          <a:fillRef idx="3">
+            <a:schemeClr val="accent1"/>
+          </a:fillRef>
+          <a:effectRef idx="2">
+            <a:schemeClr val="accent1"/>
+          </a:effectRef>
+          <a:fontRef idx="minor">
+            <a:schemeClr val="lt1"/>
+          </a:fontRef>
+        </p:style>
+        <p:txBody>
+          <a:bodyPr rtlCol="0" anchor="ctr"/>
+          <a:lstStyle/>
+          <a:p>
+            <a:pPr algn="ctr"/>
+          </a:p>
+        </p:txBody>
+      </p:sp>
+      <p:sp>
+        <p:nvSpPr>
+          <p:cNvPr id="22" name="TextBox 21"/>
+          <p:cNvSpPr txBox="1"/>
+          <p:nvPr/>
+        </p:nvSpPr>
+        <p:spPr>
+          <a:xfrm>
+            <a:off x="822960" y="4434840"/>
+            <a:ext cx="822960" cy="566928"/>
+          </a:xfrm>
+          <a:prstGeom prst="rect">
+            <a:avLst/>
+          </a:prstGeom>
+          <a:noFill/>
+        </p:spPr>
+        <p:txBody>
+          <a:bodyPr wrap="square" anchor="t" lIns="0" rIns="0" tIns="0" bIns="0">
+            <a:spAutoFit/>
+          </a:bodyPr>
+          <a:lstStyle/>
+          <a:p>
+            <a:pPr algn="l"/>
+            <a:r>
+              <a:rPr sz="1800" b="1" i="0">
+                <a:solidFill>
+                  <a:srgbClr val="1E40AF"/>
+                </a:solidFill>
+                <a:latin typeface="Calibri"/>
+              </a:rPr>
+              <a:t>06</a:t>
+            </a:r>
+          </a:p>
+        </p:txBody>
+      </p:sp>
+      <p:sp>
+        <p:nvSpPr>
+          <p:cNvPr id="23" name="TextBox 22"/>
+          <p:cNvSpPr txBox="1"/>
+          <p:nvPr/>
+        </p:nvSpPr>
+        <p:spPr>
+          <a:xfrm>
+            <a:off x="1828800" y="4434840"/>
+            <a:ext cx="8686800" cy="566928"/>
+          </a:xfrm>
+          <a:prstGeom prst="rect">
+            <a:avLst/>
+          </a:prstGeom>
+          <a:noFill/>
+        </p:spPr>
+        <p:txBody>
+          <a:bodyPr wrap="square" anchor="ctr" lIns="0" rIns="0" tIns="0" bIns="0">
+            <a:spAutoFit/>
+          </a:bodyPr>
+          <a:lstStyle/>
+          <a:p>
+            <a:pPr algn="l"/>
+            <a:r>
+              <a:rPr sz="1700" b="0" i="0">
+                <a:solidFill>
+                  <a:srgbClr val="1F2937"/>
+                </a:solidFill>
+                <a:latin typeface="Calibri"/>
+              </a:rPr>
+              <a:t>Results</a:t>
+            </a:r>
+          </a:p>
+        </p:txBody>
+      </p:sp>
+      <p:sp>
+        <p:nvSpPr>
+          <p:cNvPr id="24" name="Rectangle 23"/>
+          <p:cNvSpPr/>
+          <p:nvPr/>
+        </p:nvSpPr>
+        <p:spPr>
+          <a:xfrm>
+            <a:off x="822960" y="4976368"/>
+            <a:ext cx="10424160" cy="12700"/>
+          </a:xfrm>
+          <a:prstGeom prst="rect">
+            <a:avLst/>
+          </a:prstGeom>
+          <a:solidFill>
+            <a:srgbClr val="E2E8F0"/>
+          </a:solidFill>
+          <a:ln>
+            <a:noFill/>
+          </a:ln>
+          <a:effectLst/>
+        </p:spPr>
+        <p:style>
+          <a:lnRef idx="1">
+            <a:schemeClr val="accent1"/>
+          </a:lnRef>
+          <a:fillRef idx="3">
+            <a:schemeClr val="accent1"/>
+          </a:fillRef>
+          <a:effectRef idx="2">
+            <a:schemeClr val="accent1"/>
+          </a:effectRef>
+          <a:fontRef idx="minor">
+            <a:schemeClr val="lt1"/>
+          </a:fontRef>
+        </p:style>
+        <p:txBody>
+          <a:bodyPr rtlCol="0" anchor="ctr"/>
+          <a:lstStyle/>
+          <a:p>
+            <a:pPr algn="ctr"/>
+          </a:p>
+        </p:txBody>
+      </p:sp>
+      <p:sp>
+        <p:nvSpPr>
+          <p:cNvPr id="25" name="TextBox 24"/>
+          <p:cNvSpPr txBox="1"/>
+          <p:nvPr/>
+        </p:nvSpPr>
+        <p:spPr>
+          <a:xfrm>
+            <a:off x="822960" y="5001768"/>
+            <a:ext cx="822960" cy="566928"/>
+          </a:xfrm>
+          <a:prstGeom prst="rect">
+            <a:avLst/>
+          </a:prstGeom>
+          <a:noFill/>
+        </p:spPr>
+        <p:txBody>
+          <a:bodyPr wrap="square" anchor="t" lIns="0" rIns="0" tIns="0" bIns="0">
+            <a:spAutoFit/>
+          </a:bodyPr>
+          <a:lstStyle/>
+          <a:p>
+            <a:pPr algn="l"/>
+            <a:r>
+              <a:rPr sz="1800" b="1" i="0">
+                <a:solidFill>
+                  <a:srgbClr val="1E40AF"/>
+                </a:solidFill>
+                <a:latin typeface="Calibri"/>
+              </a:rPr>
+              <a:t>07</a:t>
+            </a:r>
+          </a:p>
+        </p:txBody>
+      </p:sp>
+      <p:sp>
+        <p:nvSpPr>
+          <p:cNvPr id="26" name="TextBox 25"/>
+          <p:cNvSpPr txBox="1"/>
+          <p:nvPr/>
+        </p:nvSpPr>
+        <p:spPr>
+          <a:xfrm>
+            <a:off x="1828800" y="5001768"/>
+            <a:ext cx="8686800" cy="566928"/>
+          </a:xfrm>
+          <a:prstGeom prst="rect">
+            <a:avLst/>
+          </a:prstGeom>
+          <a:noFill/>
+        </p:spPr>
+        <p:txBody>
+          <a:bodyPr wrap="square" anchor="ctr" lIns="0" rIns="0" tIns="0" bIns="0">
+            <a:spAutoFit/>
+          </a:bodyPr>
+          <a:lstStyle/>
+          <a:p>
+            <a:pPr algn="l"/>
+            <a:r>
+              <a:rPr sz="1700" b="0" i="0">
+                <a:solidFill>
+                  <a:srgbClr val="1F2937"/>
+                </a:solidFill>
+                <a:latin typeface="Calibri"/>
+              </a:rPr>
+              <a:t>Conclusion</a:t>
+            </a:r>
+          </a:p>
+        </p:txBody>
+      </p:sp>
+      <p:sp>
+        <p:nvSpPr>
+          <p:cNvPr id="27" name="Rectangle 26"/>
+          <p:cNvSpPr/>
+          <p:nvPr/>
+        </p:nvSpPr>
+        <p:spPr>
+          <a:xfrm>
+            <a:off x="822960" y="5543296"/>
+            <a:ext cx="10424160" cy="12700"/>
+          </a:xfrm>
+          <a:prstGeom prst="rect">
+            <a:avLst/>
+          </a:prstGeom>
+          <a:solidFill>
+            <a:srgbClr val="E2E8F0"/>
+          </a:solidFill>
+          <a:ln>
+            <a:noFill/>
+          </a:ln>
+          <a:effectLst/>
+        </p:spPr>
+        <p:style>
+          <a:lnRef idx="1">
+            <a:schemeClr val="accent1"/>
+          </a:lnRef>
+          <a:fillRef idx="3">
+            <a:schemeClr val="accent1"/>
+          </a:fillRef>
+          <a:effectRef idx="2">
+            <a:schemeClr val="accent1"/>
+          </a:effectRef>
+          <a:fontRef idx="minor">
+            <a:schemeClr val="lt1"/>
+          </a:fontRef>
+        </p:style>
+        <p:txBody>
+          <a:bodyPr rtlCol="0" anchor="ctr"/>
+          <a:lstStyle/>
+          <a:p>
+            <a:pPr algn="ctr"/>
+          </a:p>
+        </p:txBody>
+      </p:sp>
+      <p:sp>
+        <p:nvSpPr>
+          <p:cNvPr id="28" name="TextBox 27"/>
+          <p:cNvSpPr txBox="1"/>
+          <p:nvPr/>
+        </p:nvSpPr>
+        <p:spPr>
+          <a:xfrm>
+            <a:off x="822960" y="5568696"/>
+            <a:ext cx="822960" cy="566928"/>
+          </a:xfrm>
+          <a:prstGeom prst="rect">
+            <a:avLst/>
+          </a:prstGeom>
+          <a:noFill/>
+        </p:spPr>
+        <p:txBody>
+          <a:bodyPr wrap="square" anchor="t" lIns="0" rIns="0" tIns="0" bIns="0">
+            <a:spAutoFit/>
+          </a:bodyPr>
+          <a:lstStyle/>
+          <a:p>
+            <a:pPr algn="l"/>
+            <a:r>
+              <a:rPr sz="1800" b="1" i="0">
+                <a:solidFill>
+                  <a:srgbClr val="1E40AF"/>
+                </a:solidFill>
+                <a:latin typeface="Calibri"/>
+              </a:rPr>
+              <a:t>08</a:t>
+            </a:r>
+          </a:p>
+        </p:txBody>
+      </p:sp>
+      <p:sp>
+        <p:nvSpPr>
+          <p:cNvPr id="29" name="TextBox 28"/>
+          <p:cNvSpPr txBox="1"/>
+          <p:nvPr/>
+        </p:nvSpPr>
+        <p:spPr>
+          <a:xfrm>
+            <a:off x="1828800" y="5568696"/>
+            <a:ext cx="8686800" cy="566928"/>
+          </a:xfrm>
+          <a:prstGeom prst="rect">
+            <a:avLst/>
+          </a:prstGeom>
+          <a:noFill/>
+        </p:spPr>
+        <p:txBody>
+          <a:bodyPr wrap="square" anchor="ctr" lIns="0" rIns="0" tIns="0" bIns="0">
+            <a:spAutoFit/>
+          </a:bodyPr>
+          <a:lstStyle/>
+          <a:p>
+            <a:pPr algn="l"/>
+            <a:r>
+              <a:rPr sz="1700" b="0" i="0">
+                <a:solidFill>
+                  <a:srgbClr val="1F2937"/>
+                </a:solidFill>
+                <a:latin typeface="Calibri"/>
+              </a:rPr>
+              <a:t>References</a:t>
+            </a:r>
+          </a:p>
+        </p:txBody>
+      </p:sp>
+      <p:sp>
+        <p:nvSpPr>
+          <p:cNvPr id="30" name="Rectangle 29"/>
+          <p:cNvSpPr/>
+          <p:nvPr/>
+        </p:nvSpPr>
+        <p:spPr>
+          <a:xfrm>
+            <a:off x="822960" y="6110224"/>
+            <a:ext cx="10424160" cy="12700"/>
+          </a:xfrm>
+          <a:prstGeom prst="rect">
+            <a:avLst/>
+          </a:prstGeom>
+          <a:solidFill>
+            <a:srgbClr val="E2E8F0"/>
+          </a:solidFill>
+          <a:ln>
+            <a:noFill/>
+          </a:ln>
+          <a:effectLst/>
+        </p:spPr>
+        <p:style>
+          <a:lnRef idx="1">
+            <a:schemeClr val="accent1"/>
+          </a:lnRef>
+          <a:fillRef idx="3">
+            <a:schemeClr val="accent1"/>
+          </a:fillRef>
+          <a:effectRef idx="2">
+            <a:schemeClr val="accent1"/>
+          </a:effectRef>
+          <a:fontRef idx="minor">
+            <a:schemeClr val="lt1"/>
+          </a:fontRef>
+        </p:style>
+        <p:txBody>
+          <a:bodyPr rtlCol="0" anchor="ctr"/>
+          <a:lstStyle/>
+          <a:p>
+            <a:pPr algn="ctr"/>
           </a:p>
         </p:txBody>
       </p:sp>
@@ -3779,7 +5569,7 @@
                 </a:solidFill>
                 <a:latin typeface="Calibri"/>
               </a:rPr>
-              <a:t>MOTIVATION</a:t>
+              <a:t>SUMMARY</a:t>
             </a:r>
           </a:p>
         </p:txBody>
@@ -3814,7 +5604,7 @@
                 </a:solidFill>
                 <a:latin typeface="Calibri"/>
               </a:rPr>
-              <a:t>Problem Statement</a:t>
+              <a:t>Abstract</a:t>
             </a:r>
           </a:p>
         </p:txBody>
@@ -3893,21 +5683,67 @@
                 </a:solidFill>
                 <a:latin typeface="Calibri"/>
               </a:rPr>
-              <a:t>3 / 9</a:t>
-            </a:r>
-          </a:p>
-        </p:txBody>
-      </p:sp>
-      <p:sp>
-        <p:nvSpPr>
-          <p:cNvPr id="7" name="TextBox 6"/>
+              <a:t>3 / 12</a:t>
+            </a:r>
+          </a:p>
+        </p:txBody>
+      </p:sp>
+      <p:sp>
+        <p:nvSpPr>
+          <p:cNvPr id="7" name="Rectangle 6"/>
+          <p:cNvSpPr/>
+          <p:nvPr/>
+        </p:nvSpPr>
+        <p:spPr>
+          <a:xfrm>
+            <a:off x="640080" y="1554480"/>
+            <a:ext cx="10881360" cy="4389120"/>
+          </a:xfrm>
+          <a:prstGeom prst="rect">
+            <a:avLst/>
+          </a:prstGeom>
+          <a:solidFill>
+            <a:srgbClr val="F8FAFC"/>
+          </a:solidFill>
+          <a:ln w="9525">
+            <a:solidFill>
+              <a:srgbClr val="E2E8F0"/>
+            </a:solidFill>
+          </a:ln>
+          <a:effectLst/>
+        </p:spPr>
+        <p:style>
+          <a:lnRef idx="1">
+            <a:schemeClr val="accent1"/>
+          </a:lnRef>
+          <a:fillRef idx="3">
+            <a:schemeClr val="accent1"/>
+          </a:fillRef>
+          <a:effectRef idx="2">
+            <a:schemeClr val="accent1"/>
+          </a:effectRef>
+          <a:fontRef idx="minor">
+            <a:schemeClr val="lt1"/>
+          </a:fontRef>
+        </p:style>
+        <p:txBody>
+          <a:bodyPr rtlCol="0" anchor="ctr"/>
+          <a:lstStyle/>
+          <a:p>
+            <a:pPr algn="ctr"/>
+          </a:p>
+        </p:txBody>
+      </p:sp>
+      <p:sp>
+        <p:nvSpPr>
+          <p:cNvPr id="8" name="TextBox 7"/>
           <p:cNvSpPr txBox="1"/>
           <p:nvPr/>
         </p:nvSpPr>
         <p:spPr>
           <a:xfrm>
-            <a:off x="640080" y="1600200"/>
-            <a:ext cx="10881360" cy="4572000"/>
+            <a:off x="914400" y="1828800"/>
+            <a:ext cx="10332720" cy="3840480"/>
           </a:xfrm>
           <a:prstGeom prst="rect">
             <a:avLst/>
@@ -3915,72 +5751,44 @@
           <a:noFill/>
         </p:spPr>
         <p:txBody>
-          <a:bodyPr wrap="square">
+          <a:bodyPr wrap="square" anchor="t" lIns="0" rIns="0" tIns="0" bIns="0">
             <a:spAutoFit/>
           </a:bodyPr>
           <a:lstStyle/>
           <a:p>
-            <a:pPr>
-              <a:spcAft>
-                <a:spcPts val="1600"/>
-              </a:spcAft>
-            </a:pPr>
-            <a:r>
-              <a:rPr sz="1800">
+            <a:pPr algn="l"/>
+            <a:r>
+              <a:rPr sz="1600" b="0" i="0">
                 <a:solidFill>
                   <a:srgbClr val="1F2937"/>
                 </a:solidFill>
                 <a:latin typeface="Calibri"/>
               </a:rPr>
-              <a:t>•  Surrogate models are fast, learned approximations of expensive simulations, increasingly used to guide decisions in stochastic service systems - ER staffing, queueing networks, etc.</a:t>
-            </a:r>
-          </a:p>
-          <a:p>
-            <a:pPr>
-              <a:spcAft>
-                <a:spcPts val="1600"/>
-              </a:spcAft>
-            </a:pPr>
-            <a:r>
-              <a:rPr sz="1800">
+              <a:t>Surrogate models are increasingly used to approximate expensive simulations and guide decisions in stochastic service systems such as emergency room staffing. However, reliable uncertainty quantification (UQ) for these surrogates remains an open problem: Gaussian Processes are costly and rely on distributional assumptions, while Conformal Prediction (CP) offers a distribution-free, finite-sample coverage guarantee but has only been validated for surrogate models in physics domains (PDEs, magnetohydrodynamics, weather, fusion).</a:t>
+            </a:r>
+          </a:p>
+          <a:p>
+            <a:pPr algn="l"/>
+            <a:r>
+              <a:rPr sz="1600" b="0" i="0">
                 <a:solidFill>
                   <a:srgbClr val="1F2937"/>
                 </a:solidFill>
                 <a:latin typeface="Calibri"/>
               </a:rPr>
-              <a:t>•  A point prediction alone isn't enough for a decision like "will adding 2 more doctors bring wait time down enough?" - that needs a calibrated interval, not just a number.</a:t>
-            </a:r>
-          </a:p>
-          <a:p>
-            <a:pPr>
-              <a:spcAft>
-                <a:spcPts val="1600"/>
-              </a:spcAft>
-            </a:pPr>
-            <a:r>
-              <a:rPr sz="1800">
+              <a:t/>
+            </a:r>
+          </a:p>
+          <a:p>
+            <a:pPr algn="l"/>
+            <a:r>
+              <a:rPr sz="1600" b="0" i="0">
                 <a:solidFill>
                   <a:srgbClr val="1F2937"/>
                 </a:solidFill>
                 <a:latin typeface="Calibri"/>
               </a:rPr>
-              <a:t>•  Gaussian Processes are the established way to get one, but are expensive to train and rely on distributional assumptions rather than a finite-sample guarantee.</a:t>
-            </a:r>
-          </a:p>
-          <a:p>
-            <a:pPr>
-              <a:spcAft>
-                <a:spcPts val="1600"/>
-              </a:spcAft>
-            </a:pPr>
-            <a:r>
-              <a:rPr sz="1800">
-                <a:solidFill>
-                  <a:srgbClr val="1F2937"/>
-                </a:solidFill>
-                <a:latin typeface="Calibri"/>
-              </a:rPr>
-              <a:t>•  Conformal Prediction (CP) is distribution-free with a finite-sample coverage guarantee and is cheap to calibrate - but it's only been validated for surrogate models in a narrow set of domains so far.</a:t>
+              <a:t>This project builds a discrete-event simulation (DES) of an emergency room, calibrated on real hospital data, trains a surrogate model on it, and applies standard and Mondrian Conformal Prediction to quantify uncertainty in the surrogate's predictions. The goal is to test whether two limitations explicitly noted in prior work — marginal-only coverage and an untested exchangeability assumption — hold up in a discrete-event / queueing domain that has not been studied before in this context.</a:t>
             </a:r>
           </a:p>
         </p:txBody>
@@ -4191,21 +5999,609 @@
                 </a:solidFill>
                 <a:latin typeface="Calibri"/>
               </a:rPr>
-              <a:t>4 / 9</a:t>
-            </a:r>
-          </a:p>
-        </p:txBody>
-      </p:sp>
-      <p:sp>
-        <p:nvSpPr>
-          <p:cNvPr id="7" name="TextBox 6"/>
+              <a:t>4 / 12</a:t>
+            </a:r>
+          </a:p>
+        </p:txBody>
+      </p:sp>
+      <p:graphicFrame>
+        <p:nvGraphicFramePr>
+          <p:cNvPr id="7" name="Table 6"/>
+          <p:cNvGraphicFramePr>
+            <a:graphicFrameLocks noGrp="1"/>
+          </p:cNvGraphicFramePr>
+          <p:nvPr/>
+        </p:nvGraphicFramePr>
+        <p:xfrm>
+          <a:off x="548640" y="1508760"/>
+          <a:ext cx="11064238" cy="3291840"/>
+        </p:xfrm>
+        <a:graphic>
+          <a:graphicData uri="http://schemas.openxmlformats.org/drawingml/2006/table">
+            <a:tbl>
+              <a:tblPr firstRow="1" bandRow="1">
+                <a:tableStyleId>{5C22544A-7EE6-4342-B048-85BDC9FD1C3A}</a:tableStyleId>
+              </a:tblPr>
+              <a:tblGrid>
+                <a:gridCol w="822960"/>
+                <a:gridCol w="2743200"/>
+                <a:gridCol w="3749039"/>
+                <a:gridCol w="3749039"/>
+              </a:tblGrid>
+              <a:tr h="658368">
+                <a:tc>
+                  <a:txBody>
+                    <a:bodyPr/>
+                    <a:lstStyle/>
+                    <a:p>
+                      <a:pPr algn="l"/>
+                      <a:r>
+                        <a:rPr sz="1200" b="1">
+                          <a:solidFill>
+                            <a:srgbClr val="FFFFFF"/>
+                          </a:solidFill>
+                        </a:rPr>
+                        <a:t>S.No</a:t>
+                      </a:r>
+                    </a:p>
+                  </a:txBody>
+                  <a:tcPr anchor="ctr" marT="50800" marB="50800">
+                    <a:solidFill>
+                      <a:srgbClr val="1E40AF"/>
+                    </a:solidFill>
+                  </a:tcPr>
+                </a:tc>
+                <a:tc>
+                  <a:txBody>
+                    <a:bodyPr/>
+                    <a:lstStyle/>
+                    <a:p>
+                      <a:pPr algn="ctr"/>
+                      <a:r>
+                        <a:rPr sz="1200" b="1">
+                          <a:solidFill>
+                            <a:srgbClr val="FFFFFF"/>
+                          </a:solidFill>
+                        </a:rPr>
+                        <a:t>Focus Area</a:t>
+                      </a:r>
+                    </a:p>
+                  </a:txBody>
+                  <a:tcPr anchor="ctr" marT="50800" marB="50800">
+                    <a:solidFill>
+                      <a:srgbClr val="1E40AF"/>
+                    </a:solidFill>
+                  </a:tcPr>
+                </a:tc>
+                <a:tc>
+                  <a:txBody>
+                    <a:bodyPr/>
+                    <a:lstStyle/>
+                    <a:p>
+                      <a:pPr algn="ctr"/>
+                      <a:r>
+                        <a:rPr sz="1200" b="1">
+                          <a:solidFill>
+                            <a:srgbClr val="FFFFFF"/>
+                          </a:solidFill>
+                        </a:rPr>
+                        <a:t>Key Reference / Topic</a:t>
+                      </a:r>
+                    </a:p>
+                  </a:txBody>
+                  <a:tcPr anchor="ctr" marT="50800" marB="50800">
+                    <a:solidFill>
+                      <a:srgbClr val="1E40AF"/>
+                    </a:solidFill>
+                  </a:tcPr>
+                </a:tc>
+                <a:tc>
+                  <a:txBody>
+                    <a:bodyPr/>
+                    <a:lstStyle/>
+                    <a:p>
+                      <a:pPr algn="ctr"/>
+                      <a:r>
+                        <a:rPr sz="1200" b="1">
+                          <a:solidFill>
+                            <a:srgbClr val="FFFFFF"/>
+                          </a:solidFill>
+                        </a:rPr>
+                        <a:t>Relevance to Our Work</a:t>
+                      </a:r>
+                    </a:p>
+                  </a:txBody>
+                  <a:tcPr anchor="ctr" marT="50800" marB="50800">
+                    <a:solidFill>
+                      <a:srgbClr val="1E40AF"/>
+                    </a:solidFill>
+                  </a:tcPr>
+                </a:tc>
+              </a:tr>
+              <a:tr h="658368">
+                <a:tc>
+                  <a:txBody>
+                    <a:bodyPr/>
+                    <a:lstStyle/>
+                    <a:p>
+                      <a:pPr algn="l"/>
+                      <a:r>
+                        <a:rPr sz="1200">
+                          <a:solidFill>
+                            <a:srgbClr val="1F2937"/>
+                          </a:solidFill>
+                        </a:rPr>
+                        <a:t>1</a:t>
+                      </a:r>
+                    </a:p>
+                  </a:txBody>
+                  <a:tcPr anchor="ctr" marT="50800" marB="50800">
+                    <a:solidFill>
+                      <a:srgbClr val="F8FAFC"/>
+                    </a:solidFill>
+                  </a:tcPr>
+                </a:tc>
+                <a:tc>
+                  <a:txBody>
+                    <a:bodyPr/>
+                    <a:lstStyle/>
+                    <a:p>
+                      <a:pPr algn="ctr"/>
+                      <a:r>
+                        <a:rPr sz="1200">
+                          <a:solidFill>
+                            <a:srgbClr val="1F2937"/>
+                          </a:solidFill>
+                        </a:rPr>
+                        <a:t>Base Paper</a:t>
+                      </a:r>
+                    </a:p>
+                  </a:txBody>
+                  <a:tcPr anchor="ctr" marT="50800" marB="50800">
+                    <a:solidFill>
+                      <a:srgbClr val="F8FAFC"/>
+                    </a:solidFill>
+                  </a:tcPr>
+                </a:tc>
+                <a:tc>
+                  <a:txBody>
+                    <a:bodyPr/>
+                    <a:lstStyle/>
+                    <a:p>
+                      <a:pPr algn="ctr"/>
+                      <a:r>
+                        <a:rPr sz="1200">
+                          <a:solidFill>
+                            <a:srgbClr val="1F2937"/>
+                          </a:solidFill>
+                        </a:rPr>
+                        <a:t>Gopakumar et al. (2026) — CP for</a:t>
+                      </a:r>
+                    </a:p>
+                    <a:p>
+                      <a:pPr algn="ctr"/>
+                      <a:r>
+                        <a:rPr sz="1200">
+                          <a:solidFill>
+                            <a:srgbClr val="1F2937"/>
+                          </a:solidFill>
+                        </a:rPr>
+                        <a:t>surrogate UQ in physics domains</a:t>
+                      </a:r>
+                    </a:p>
+                  </a:txBody>
+                  <a:tcPr anchor="ctr" marT="50800" marB="50800">
+                    <a:solidFill>
+                      <a:srgbClr val="F8FAFC"/>
+                    </a:solidFill>
+                  </a:tcPr>
+                </a:tc>
+                <a:tc>
+                  <a:txBody>
+                    <a:bodyPr/>
+                    <a:lstStyle/>
+                    <a:p>
+                      <a:pPr algn="ctr"/>
+                      <a:r>
+                        <a:rPr sz="1200">
+                          <a:solidFill>
+                            <a:srgbClr val="1F2937"/>
+                          </a:solidFill>
+                        </a:rPr>
+                        <a:t>States the two limitations (marginal</a:t>
+                      </a:r>
+                    </a:p>
+                    <a:p>
+                      <a:pPr algn="ctr"/>
+                      <a:r>
+                        <a:rPr sz="1200">
+                          <a:solidFill>
+                            <a:srgbClr val="1F2937"/>
+                          </a:solidFill>
+                        </a:rPr>
+                        <a:t>coverage, exchangeability) this project tests</a:t>
+                      </a:r>
+                    </a:p>
+                  </a:txBody>
+                  <a:tcPr anchor="ctr" marT="50800" marB="50800">
+                    <a:solidFill>
+                      <a:srgbClr val="F8FAFC"/>
+                    </a:solidFill>
+                  </a:tcPr>
+                </a:tc>
+              </a:tr>
+              <a:tr h="658368">
+                <a:tc>
+                  <a:txBody>
+                    <a:bodyPr/>
+                    <a:lstStyle/>
+                    <a:p>
+                      <a:pPr algn="l"/>
+                      <a:r>
+                        <a:rPr sz="1200">
+                          <a:solidFill>
+                            <a:srgbClr val="1F2937"/>
+                          </a:solidFill>
+                        </a:rPr>
+                        <a:t>2</a:t>
+                      </a:r>
+                    </a:p>
+                  </a:txBody>
+                  <a:tcPr anchor="ctr" marT="50800" marB="50800">
+                    <a:solidFill>
+                      <a:srgbClr val="FFFFFF"/>
+                    </a:solidFill>
+                  </a:tcPr>
+                </a:tc>
+                <a:tc>
+                  <a:txBody>
+                    <a:bodyPr/>
+                    <a:lstStyle/>
+                    <a:p>
+                      <a:pPr algn="ctr"/>
+                      <a:r>
+                        <a:rPr sz="1200">
+                          <a:solidFill>
+                            <a:srgbClr val="1F2937"/>
+                          </a:solidFill>
+                        </a:rPr>
+                        <a:t>Conformal Prediction</a:t>
+                      </a:r>
+                    </a:p>
+                    <a:p>
+                      <a:pPr algn="ctr"/>
+                      <a:r>
+                        <a:rPr sz="1200">
+                          <a:solidFill>
+                            <a:srgbClr val="1F2937"/>
+                          </a:solidFill>
+                        </a:rPr>
+                        <a:t>Foundations</a:t>
+                      </a:r>
+                    </a:p>
+                  </a:txBody>
+                  <a:tcPr anchor="ctr" marT="50800" marB="50800">
+                    <a:solidFill>
+                      <a:srgbClr val="FFFFFF"/>
+                    </a:solidFill>
+                  </a:tcPr>
+                </a:tc>
+                <a:tc>
+                  <a:txBody>
+                    <a:bodyPr/>
+                    <a:lstStyle/>
+                    <a:p>
+                      <a:pPr algn="ctr"/>
+                      <a:r>
+                        <a:rPr sz="1200">
+                          <a:solidFill>
+                            <a:srgbClr val="1F2937"/>
+                          </a:solidFill>
+                        </a:rPr>
+                        <a:t>Split conformal prediction;</a:t>
+                      </a:r>
+                    </a:p>
+                    <a:p>
+                      <a:pPr algn="ctr"/>
+                      <a:r>
+                        <a:rPr sz="1200">
+                          <a:solidFill>
+                            <a:srgbClr val="1F2937"/>
+                          </a:solidFill>
+                        </a:rPr>
+                        <a:t>Mondrian (category-conditional) CP</a:t>
+                      </a:r>
+                    </a:p>
+                  </a:txBody>
+                  <a:tcPr anchor="ctr" marT="50800" marB="50800">
+                    <a:solidFill>
+                      <a:srgbClr val="FFFFFF"/>
+                    </a:solidFill>
+                  </a:tcPr>
+                </a:tc>
+                <a:tc>
+                  <a:txBody>
+                    <a:bodyPr/>
+                    <a:lstStyle/>
+                    <a:p>
+                      <a:pPr algn="ctr"/>
+                      <a:r>
+                        <a:rPr sz="1200">
+                          <a:solidFill>
+                            <a:srgbClr val="1F2937"/>
+                          </a:solidFill>
+                        </a:rPr>
+                        <a:t>Core UQ methodology used</a:t>
+                      </a:r>
+                    </a:p>
+                    <a:p>
+                      <a:pPr algn="ctr"/>
+                      <a:r>
+                        <a:rPr sz="1200">
+                          <a:solidFill>
+                            <a:srgbClr val="1F2937"/>
+                          </a:solidFill>
+                        </a:rPr>
+                        <a:t>in this project</a:t>
+                      </a:r>
+                    </a:p>
+                  </a:txBody>
+                  <a:tcPr anchor="ctr" marT="50800" marB="50800">
+                    <a:solidFill>
+                      <a:srgbClr val="FFFFFF"/>
+                    </a:solidFill>
+                  </a:tcPr>
+                </a:tc>
+              </a:tr>
+              <a:tr h="658368">
+                <a:tc>
+                  <a:txBody>
+                    <a:bodyPr/>
+                    <a:lstStyle/>
+                    <a:p>
+                      <a:pPr algn="l"/>
+                      <a:r>
+                        <a:rPr sz="1200">
+                          <a:solidFill>
+                            <a:srgbClr val="1F2937"/>
+                          </a:solidFill>
+                        </a:rPr>
+                        <a:t>3</a:t>
+                      </a:r>
+                    </a:p>
+                  </a:txBody>
+                  <a:tcPr anchor="ctr" marT="50800" marB="50800">
+                    <a:solidFill>
+                      <a:srgbClr val="F8FAFC"/>
+                    </a:solidFill>
+                  </a:tcPr>
+                </a:tc>
+                <a:tc>
+                  <a:txBody>
+                    <a:bodyPr/>
+                    <a:lstStyle/>
+                    <a:p>
+                      <a:pPr algn="ctr"/>
+                      <a:r>
+                        <a:rPr sz="1200">
+                          <a:solidFill>
+                            <a:srgbClr val="1F2937"/>
+                          </a:solidFill>
+                        </a:rPr>
+                        <a:t>Surrogate Modeling</a:t>
+                      </a:r>
+                    </a:p>
+                  </a:txBody>
+                  <a:tcPr anchor="ctr" marT="50800" marB="50800">
+                    <a:solidFill>
+                      <a:srgbClr val="F8FAFC"/>
+                    </a:solidFill>
+                  </a:tcPr>
+                </a:tc>
+                <a:tc>
+                  <a:txBody>
+                    <a:bodyPr/>
+                    <a:lstStyle/>
+                    <a:p>
+                      <a:pPr algn="ctr"/>
+                      <a:r>
+                        <a:rPr sz="1200">
+                          <a:solidFill>
+                            <a:srgbClr val="1F2937"/>
+                          </a:solidFill>
+                        </a:rPr>
+                        <a:t>Gradient boosting / GP / neural-</a:t>
+                      </a:r>
+                    </a:p>
+                    <a:p>
+                      <a:pPr algn="ctr"/>
+                      <a:r>
+                        <a:rPr sz="1200">
+                          <a:solidFill>
+                            <a:srgbClr val="1F2937"/>
+                          </a:solidFill>
+                        </a:rPr>
+                        <a:t>network surrogates for simulations</a:t>
+                      </a:r>
+                    </a:p>
+                  </a:txBody>
+                  <a:tcPr anchor="ctr" marT="50800" marB="50800">
+                    <a:solidFill>
+                      <a:srgbClr val="F8FAFC"/>
+                    </a:solidFill>
+                  </a:tcPr>
+                </a:tc>
+                <a:tc>
+                  <a:txBody>
+                    <a:bodyPr/>
+                    <a:lstStyle/>
+                    <a:p>
+                      <a:pPr algn="ctr"/>
+                      <a:r>
+                        <a:rPr sz="1200">
+                          <a:solidFill>
+                            <a:srgbClr val="1F2937"/>
+                          </a:solidFill>
+                        </a:rPr>
+                        <a:t>Basis for our DES</a:t>
+                      </a:r>
+                    </a:p>
+                    <a:p>
+                      <a:pPr algn="ctr"/>
+                      <a:r>
+                        <a:rPr sz="1200">
+                          <a:solidFill>
+                            <a:srgbClr val="1F2937"/>
+                          </a:solidFill>
+                        </a:rPr>
+                        <a:t>surrogate model</a:t>
+                      </a:r>
+                    </a:p>
+                  </a:txBody>
+                  <a:tcPr anchor="ctr" marT="50800" marB="50800">
+                    <a:solidFill>
+                      <a:srgbClr val="F8FAFC"/>
+                    </a:solidFill>
+                  </a:tcPr>
+                </a:tc>
+              </a:tr>
+              <a:tr h="658368">
+                <a:tc>
+                  <a:txBody>
+                    <a:bodyPr/>
+                    <a:lstStyle/>
+                    <a:p>
+                      <a:pPr algn="l"/>
+                      <a:r>
+                        <a:rPr sz="1200">
+                          <a:solidFill>
+                            <a:srgbClr val="1F2937"/>
+                          </a:solidFill>
+                        </a:rPr>
+                        <a:t>4</a:t>
+                      </a:r>
+                    </a:p>
+                  </a:txBody>
+                  <a:tcPr anchor="ctr" marT="50800" marB="50800">
+                    <a:solidFill>
+                      <a:srgbClr val="FFFFFF"/>
+                    </a:solidFill>
+                  </a:tcPr>
+                </a:tc>
+                <a:tc>
+                  <a:txBody>
+                    <a:bodyPr/>
+                    <a:lstStyle/>
+                    <a:p>
+                      <a:pPr algn="ctr"/>
+                      <a:r>
+                        <a:rPr sz="1200">
+                          <a:solidFill>
+                            <a:srgbClr val="1F2937"/>
+                          </a:solidFill>
+                        </a:rPr>
+                        <a:t>Queueing Theory /</a:t>
+                      </a:r>
+                    </a:p>
+                    <a:p>
+                      <a:pPr algn="ctr"/>
+                      <a:r>
+                        <a:rPr sz="1200">
+                          <a:solidFill>
+                            <a:srgbClr val="1F2937"/>
+                          </a:solidFill>
+                        </a:rPr>
+                        <a:t>Discrete-Event Simulation</a:t>
+                      </a:r>
+                    </a:p>
+                  </a:txBody>
+                  <a:tcPr anchor="ctr" marT="50800" marB="50800">
+                    <a:solidFill>
+                      <a:srgbClr val="FFFFFF"/>
+                    </a:solidFill>
+                  </a:tcPr>
+                </a:tc>
+                <a:tc>
+                  <a:txBody>
+                    <a:bodyPr/>
+                    <a:lstStyle/>
+                    <a:p>
+                      <a:pPr algn="ctr"/>
+                      <a:r>
+                        <a:rPr sz="1200">
+                          <a:solidFill>
+                            <a:srgbClr val="1F2937"/>
+                          </a:solidFill>
+                        </a:rPr>
+                        <a:t>Discrete-event simulation of</a:t>
+                      </a:r>
+                    </a:p>
+                    <a:p>
+                      <a:pPr algn="ctr"/>
+                      <a:r>
+                        <a:rPr sz="1200">
+                          <a:solidFill>
+                            <a:srgbClr val="1F2937"/>
+                          </a:solidFill>
+                        </a:rPr>
+                        <a:t>ED / service systems</a:t>
+                      </a:r>
+                    </a:p>
+                  </a:txBody>
+                  <a:tcPr anchor="ctr" marT="50800" marB="50800">
+                    <a:solidFill>
+                      <a:srgbClr val="FFFFFF"/>
+                    </a:solidFill>
+                  </a:tcPr>
+                </a:tc>
+                <a:tc>
+                  <a:txBody>
+                    <a:bodyPr/>
+                    <a:lstStyle/>
+                    <a:p>
+                      <a:pPr algn="ctr"/>
+                      <a:r>
+                        <a:rPr sz="1200">
+                          <a:solidFill>
+                            <a:srgbClr val="1F2937"/>
+                          </a:solidFill>
+                        </a:rPr>
+                        <a:t>Basis for our ER</a:t>
+                      </a:r>
+                    </a:p>
+                    <a:p>
+                      <a:pPr algn="ctr"/>
+                      <a:r>
+                        <a:rPr sz="1200">
+                          <a:solidFill>
+                            <a:srgbClr val="1F2937"/>
+                          </a:solidFill>
+                        </a:rPr>
+                        <a:t>simulation design</a:t>
+                      </a:r>
+                    </a:p>
+                  </a:txBody>
+                  <a:tcPr anchor="ctr" marT="50800" marB="50800">
+                    <a:solidFill>
+                      <a:srgbClr val="FFFFFF"/>
+                    </a:solidFill>
+                  </a:tcPr>
+                </a:tc>
+              </a:tr>
+            </a:tbl>
+          </a:graphicData>
+        </a:graphic>
+      </p:graphicFrame>
+      <p:sp>
+        <p:nvSpPr>
+          <p:cNvPr id="8" name="TextBox 7"/>
           <p:cNvSpPr txBox="1"/>
           <p:nvPr/>
         </p:nvSpPr>
         <p:spPr>
           <a:xfrm>
-            <a:off x="640080" y="1508760"/>
-            <a:ext cx="10881360" cy="548640"/>
+            <a:off x="548640" y="5074920"/>
+            <a:ext cx="11064240" cy="457200"/>
           </a:xfrm>
           <a:prstGeom prst="rect">
             <a:avLst/>
@@ -4220,633 +6616,13 @@
           <a:p>
             <a:pPr algn="l"/>
             <a:r>
-              <a:rPr sz="1600" b="0" i="0">
-                <a:solidFill>
-                  <a:srgbClr val="1F2937"/>
+              <a:rPr sz="1300" b="0" i="1">
+                <a:solidFill>
+                  <a:srgbClr val="6B7280"/>
                 </a:solidFill>
                 <a:latin typeface="Calibri"/>
               </a:rPr>
-              <a:t>Review is organized around the base paper and three supporting research areas:</a:t>
-            </a:r>
-          </a:p>
-        </p:txBody>
-      </p:sp>
-      <p:sp>
-        <p:nvSpPr>
-          <p:cNvPr id="8" name="Rectangle 7"/>
-          <p:cNvSpPr/>
-          <p:nvPr/>
-        </p:nvSpPr>
-        <p:spPr>
-          <a:xfrm>
-            <a:off x="640080" y="2103120"/>
-            <a:ext cx="10881360" cy="914400"/>
-          </a:xfrm>
-          <a:prstGeom prst="rect">
-            <a:avLst/>
-          </a:prstGeom>
-          <a:solidFill>
-            <a:srgbClr val="F8FAFC"/>
-          </a:solidFill>
-          <a:ln w="9525">
-            <a:solidFill>
-              <a:srgbClr val="E2E8F0"/>
-            </a:solidFill>
-          </a:ln>
-          <a:effectLst/>
-        </p:spPr>
-        <p:style>
-          <a:lnRef idx="1">
-            <a:schemeClr val="accent1"/>
-          </a:lnRef>
-          <a:fillRef idx="3">
-            <a:schemeClr val="accent1"/>
-          </a:fillRef>
-          <a:effectRef idx="2">
-            <a:schemeClr val="accent1"/>
-          </a:effectRef>
-          <a:fontRef idx="minor">
-            <a:schemeClr val="lt1"/>
-          </a:fontRef>
-        </p:style>
-        <p:txBody>
-          <a:bodyPr rtlCol="0" anchor="ctr"/>
-          <a:lstStyle/>
-          <a:p>
-            <a:pPr algn="ctr"/>
-          </a:p>
-        </p:txBody>
-      </p:sp>
-      <p:sp>
-        <p:nvSpPr>
-          <p:cNvPr id="9" name="TextBox 8"/>
-          <p:cNvSpPr txBox="1"/>
-          <p:nvPr/>
-        </p:nvSpPr>
-        <p:spPr>
-          <a:xfrm>
-            <a:off x="914400" y="2240280"/>
-            <a:ext cx="10332720" cy="685800"/>
-          </a:xfrm>
-          <a:prstGeom prst="rect">
-            <a:avLst/>
-          </a:prstGeom>
-          <a:noFill/>
-        </p:spPr>
-        <p:txBody>
-          <a:bodyPr wrap="square" anchor="t" lIns="0" rIns="0" tIns="0" bIns="0">
-            <a:spAutoFit/>
-          </a:bodyPr>
-          <a:lstStyle/>
-          <a:p>
-            <a:pPr algn="l"/>
-            <a:r>
-              <a:rPr sz="1400" b="0" i="0">
-                <a:solidFill>
-                  <a:srgbClr val="1F2937"/>
-                </a:solidFill>
-                <a:latin typeface="Calibri"/>
-              </a:rPr>
-              <a:t>Base paper: Gopakumar et al. (2026) validate Conformal Prediction for surrogate-model UQ in physics domains (PDEs, MHD, weather, fusion), and explicitly flag two untested limitations - marginal coverage and the exchangeability assumption.</a:t>
-            </a:r>
-          </a:p>
-        </p:txBody>
-      </p:sp>
-      <p:sp>
-        <p:nvSpPr>
-          <p:cNvPr id="10" name="Rectangle 9"/>
-          <p:cNvSpPr/>
-          <p:nvPr/>
-        </p:nvSpPr>
-        <p:spPr>
-          <a:xfrm>
-            <a:off x="640080" y="3246120"/>
-            <a:ext cx="3429000" cy="2651760"/>
-          </a:xfrm>
-          <a:prstGeom prst="rect">
-            <a:avLst/>
-          </a:prstGeom>
-          <a:solidFill>
-            <a:srgbClr val="FFFFFF"/>
-          </a:solidFill>
-          <a:ln w="9525">
-            <a:solidFill>
-              <a:srgbClr val="E2E8F0"/>
-            </a:solidFill>
-          </a:ln>
-          <a:effectLst/>
-        </p:spPr>
-        <p:style>
-          <a:lnRef idx="1">
-            <a:schemeClr val="accent1"/>
-          </a:lnRef>
-          <a:fillRef idx="3">
-            <a:schemeClr val="accent1"/>
-          </a:fillRef>
-          <a:effectRef idx="2">
-            <a:schemeClr val="accent1"/>
-          </a:effectRef>
-          <a:fontRef idx="minor">
-            <a:schemeClr val="lt1"/>
-          </a:fontRef>
-        </p:style>
-        <p:txBody>
-          <a:bodyPr rtlCol="0" anchor="ctr"/>
-          <a:lstStyle/>
-          <a:p>
-            <a:pPr algn="ctr"/>
-          </a:p>
-        </p:txBody>
-      </p:sp>
-      <p:sp>
-        <p:nvSpPr>
-          <p:cNvPr id="11" name="Rectangle 10"/>
-          <p:cNvSpPr/>
-          <p:nvPr/>
-        </p:nvSpPr>
-        <p:spPr>
-          <a:xfrm>
-            <a:off x="640080" y="3246120"/>
-            <a:ext cx="3429000" cy="685800"/>
-          </a:xfrm>
-          <a:prstGeom prst="rect">
-            <a:avLst/>
-          </a:prstGeom>
-          <a:solidFill>
-            <a:srgbClr val="1E40AF"/>
-          </a:solidFill>
-          <a:ln>
-            <a:noFill/>
-          </a:ln>
-          <a:effectLst/>
-        </p:spPr>
-        <p:style>
-          <a:lnRef idx="1">
-            <a:schemeClr val="accent1"/>
-          </a:lnRef>
-          <a:fillRef idx="3">
-            <a:schemeClr val="accent1"/>
-          </a:fillRef>
-          <a:effectRef idx="2">
-            <a:schemeClr val="accent1"/>
-          </a:effectRef>
-          <a:fontRef idx="minor">
-            <a:schemeClr val="lt1"/>
-          </a:fontRef>
-        </p:style>
-        <p:txBody>
-          <a:bodyPr rtlCol="0" anchor="ctr"/>
-          <a:lstStyle/>
-          <a:p>
-            <a:pPr algn="ctr"/>
-          </a:p>
-        </p:txBody>
-      </p:sp>
-      <p:sp>
-        <p:nvSpPr>
-          <p:cNvPr id="12" name="TextBox 11"/>
-          <p:cNvSpPr txBox="1"/>
-          <p:nvPr/>
-        </p:nvSpPr>
-        <p:spPr>
-          <a:xfrm>
-            <a:off x="777240" y="3337560"/>
-            <a:ext cx="3154680" cy="548640"/>
-          </a:xfrm>
-          <a:prstGeom prst="rect">
-            <a:avLst/>
-          </a:prstGeom>
-          <a:noFill/>
-        </p:spPr>
-        <p:txBody>
-          <a:bodyPr wrap="square" anchor="t" lIns="0" rIns="0" tIns="0" bIns="0">
-            <a:spAutoFit/>
-          </a:bodyPr>
-          <a:lstStyle/>
-          <a:p>
-            <a:pPr algn="ctr"/>
-            <a:r>
-              <a:rPr sz="1400" b="1" i="0">
-                <a:solidFill>
-                  <a:srgbClr val="FFFFFF"/>
-                </a:solidFill>
-                <a:latin typeface="Calibri"/>
-              </a:rPr>
-              <a:t>Conformal Prediction</a:t>
-            </a:r>
-          </a:p>
-          <a:p>
-            <a:pPr algn="ctr"/>
-            <a:r>
-              <a:rPr sz="1400" b="1" i="0">
-                <a:solidFill>
-                  <a:srgbClr val="FFFFFF"/>
-                </a:solidFill>
-                <a:latin typeface="Calibri"/>
-              </a:rPr>
-              <a:t>Foundations</a:t>
-            </a:r>
-          </a:p>
-        </p:txBody>
-      </p:sp>
-      <p:sp>
-        <p:nvSpPr>
-          <p:cNvPr id="13" name="TextBox 12"/>
-          <p:cNvSpPr txBox="1"/>
-          <p:nvPr/>
-        </p:nvSpPr>
-        <p:spPr>
-          <a:xfrm>
-            <a:off x="822960" y="4114800"/>
-            <a:ext cx="3063240" cy="1645920"/>
-          </a:xfrm>
-          <a:prstGeom prst="rect">
-            <a:avLst/>
-          </a:prstGeom>
-          <a:noFill/>
-        </p:spPr>
-        <p:txBody>
-          <a:bodyPr wrap="square" anchor="t" lIns="0" rIns="0" tIns="0" bIns="0">
-            <a:spAutoFit/>
-          </a:bodyPr>
-          <a:lstStyle/>
-          <a:p>
-            <a:pPr algn="l"/>
-            <a:r>
-              <a:rPr sz="1250" b="0" i="0">
-                <a:solidFill>
-                  <a:srgbClr val="1F2937"/>
-                </a:solidFill>
-                <a:latin typeface="Calibri"/>
-              </a:rPr>
-              <a:t>Split conformal prediction, coverage guarantees, and category-conditional (Mondrian) variants of CP.</a:t>
-            </a:r>
-          </a:p>
-        </p:txBody>
-      </p:sp>
-      <p:sp>
-        <p:nvSpPr>
-          <p:cNvPr id="14" name="Rectangle 13"/>
-          <p:cNvSpPr/>
-          <p:nvPr/>
-        </p:nvSpPr>
-        <p:spPr>
-          <a:xfrm>
-            <a:off x="4206240" y="3246120"/>
-            <a:ext cx="3429000" cy="2651760"/>
-          </a:xfrm>
-          <a:prstGeom prst="rect">
-            <a:avLst/>
-          </a:prstGeom>
-          <a:solidFill>
-            <a:srgbClr val="FFFFFF"/>
-          </a:solidFill>
-          <a:ln w="9525">
-            <a:solidFill>
-              <a:srgbClr val="E2E8F0"/>
-            </a:solidFill>
-          </a:ln>
-          <a:effectLst/>
-        </p:spPr>
-        <p:style>
-          <a:lnRef idx="1">
-            <a:schemeClr val="accent1"/>
-          </a:lnRef>
-          <a:fillRef idx="3">
-            <a:schemeClr val="accent1"/>
-          </a:fillRef>
-          <a:effectRef idx="2">
-            <a:schemeClr val="accent1"/>
-          </a:effectRef>
-          <a:fontRef idx="minor">
-            <a:schemeClr val="lt1"/>
-          </a:fontRef>
-        </p:style>
-        <p:txBody>
-          <a:bodyPr rtlCol="0" anchor="ctr"/>
-          <a:lstStyle/>
-          <a:p>
-            <a:pPr algn="ctr"/>
-          </a:p>
-        </p:txBody>
-      </p:sp>
-      <p:sp>
-        <p:nvSpPr>
-          <p:cNvPr id="15" name="Rectangle 14"/>
-          <p:cNvSpPr/>
-          <p:nvPr/>
-        </p:nvSpPr>
-        <p:spPr>
-          <a:xfrm>
-            <a:off x="4206240" y="3246120"/>
-            <a:ext cx="3429000" cy="685800"/>
-          </a:xfrm>
-          <a:prstGeom prst="rect">
-            <a:avLst/>
-          </a:prstGeom>
-          <a:solidFill>
-            <a:srgbClr val="1E40AF"/>
-          </a:solidFill>
-          <a:ln>
-            <a:noFill/>
-          </a:ln>
-          <a:effectLst/>
-        </p:spPr>
-        <p:style>
-          <a:lnRef idx="1">
-            <a:schemeClr val="accent1"/>
-          </a:lnRef>
-          <a:fillRef idx="3">
-            <a:schemeClr val="accent1"/>
-          </a:fillRef>
-          <a:effectRef idx="2">
-            <a:schemeClr val="accent1"/>
-          </a:effectRef>
-          <a:fontRef idx="minor">
-            <a:schemeClr val="lt1"/>
-          </a:fontRef>
-        </p:style>
-        <p:txBody>
-          <a:bodyPr rtlCol="0" anchor="ctr"/>
-          <a:lstStyle/>
-          <a:p>
-            <a:pPr algn="ctr"/>
-          </a:p>
-        </p:txBody>
-      </p:sp>
-      <p:sp>
-        <p:nvSpPr>
-          <p:cNvPr id="16" name="TextBox 15"/>
-          <p:cNvSpPr txBox="1"/>
-          <p:nvPr/>
-        </p:nvSpPr>
-        <p:spPr>
-          <a:xfrm>
-            <a:off x="4343400" y="3337560"/>
-            <a:ext cx="3154680" cy="548640"/>
-          </a:xfrm>
-          <a:prstGeom prst="rect">
-            <a:avLst/>
-          </a:prstGeom>
-          <a:noFill/>
-        </p:spPr>
-        <p:txBody>
-          <a:bodyPr wrap="square" anchor="t" lIns="0" rIns="0" tIns="0" bIns="0">
-            <a:spAutoFit/>
-          </a:bodyPr>
-          <a:lstStyle/>
-          <a:p>
-            <a:pPr algn="ctr"/>
-            <a:r>
-              <a:rPr sz="1400" b="1" i="0">
-                <a:solidFill>
-                  <a:srgbClr val="FFFFFF"/>
-                </a:solidFill>
-                <a:latin typeface="Calibri"/>
-              </a:rPr>
-              <a:t>Surrogate Modeling</a:t>
-            </a:r>
-          </a:p>
-        </p:txBody>
-      </p:sp>
-      <p:sp>
-        <p:nvSpPr>
-          <p:cNvPr id="17" name="TextBox 16"/>
-          <p:cNvSpPr txBox="1"/>
-          <p:nvPr/>
-        </p:nvSpPr>
-        <p:spPr>
-          <a:xfrm>
-            <a:off x="4389120" y="4114800"/>
-            <a:ext cx="3063240" cy="1645920"/>
-          </a:xfrm>
-          <a:prstGeom prst="rect">
-            <a:avLst/>
-          </a:prstGeom>
-          <a:noFill/>
-        </p:spPr>
-        <p:txBody>
-          <a:bodyPr wrap="square" anchor="t" lIns="0" rIns="0" tIns="0" bIns="0">
-            <a:spAutoFit/>
-          </a:bodyPr>
-          <a:lstStyle/>
-          <a:p>
-            <a:pPr algn="l"/>
-            <a:r>
-              <a:rPr sz="1250" b="0" i="0">
-                <a:solidFill>
-                  <a:srgbClr val="1F2937"/>
-                </a:solidFill>
-                <a:latin typeface="Calibri"/>
-              </a:rPr>
-              <a:t>Learned approximations (gradient boosting, GP, neural nets) for expensive simulations, and their use in decision-making.</a:t>
-            </a:r>
-          </a:p>
-        </p:txBody>
-      </p:sp>
-      <p:sp>
-        <p:nvSpPr>
-          <p:cNvPr id="18" name="Rectangle 17"/>
-          <p:cNvSpPr/>
-          <p:nvPr/>
-        </p:nvSpPr>
-        <p:spPr>
-          <a:xfrm>
-            <a:off x="7772400" y="3246120"/>
-            <a:ext cx="3429000" cy="2651760"/>
-          </a:xfrm>
-          <a:prstGeom prst="rect">
-            <a:avLst/>
-          </a:prstGeom>
-          <a:solidFill>
-            <a:srgbClr val="FFFFFF"/>
-          </a:solidFill>
-          <a:ln w="9525">
-            <a:solidFill>
-              <a:srgbClr val="E2E8F0"/>
-            </a:solidFill>
-          </a:ln>
-          <a:effectLst/>
-        </p:spPr>
-        <p:style>
-          <a:lnRef idx="1">
-            <a:schemeClr val="accent1"/>
-          </a:lnRef>
-          <a:fillRef idx="3">
-            <a:schemeClr val="accent1"/>
-          </a:fillRef>
-          <a:effectRef idx="2">
-            <a:schemeClr val="accent1"/>
-          </a:effectRef>
-          <a:fontRef idx="minor">
-            <a:schemeClr val="lt1"/>
-          </a:fontRef>
-        </p:style>
-        <p:txBody>
-          <a:bodyPr rtlCol="0" anchor="ctr"/>
-          <a:lstStyle/>
-          <a:p>
-            <a:pPr algn="ctr"/>
-          </a:p>
-        </p:txBody>
-      </p:sp>
-      <p:sp>
-        <p:nvSpPr>
-          <p:cNvPr id="19" name="Rectangle 18"/>
-          <p:cNvSpPr/>
-          <p:nvPr/>
-        </p:nvSpPr>
-        <p:spPr>
-          <a:xfrm>
-            <a:off x="7772400" y="3246120"/>
-            <a:ext cx="3429000" cy="685800"/>
-          </a:xfrm>
-          <a:prstGeom prst="rect">
-            <a:avLst/>
-          </a:prstGeom>
-          <a:solidFill>
-            <a:srgbClr val="1E40AF"/>
-          </a:solidFill>
-          <a:ln>
-            <a:noFill/>
-          </a:ln>
-          <a:effectLst/>
-        </p:spPr>
-        <p:style>
-          <a:lnRef idx="1">
-            <a:schemeClr val="accent1"/>
-          </a:lnRef>
-          <a:fillRef idx="3">
-            <a:schemeClr val="accent1"/>
-          </a:fillRef>
-          <a:effectRef idx="2">
-            <a:schemeClr val="accent1"/>
-          </a:effectRef>
-          <a:fontRef idx="minor">
-            <a:schemeClr val="lt1"/>
-          </a:fontRef>
-        </p:style>
-        <p:txBody>
-          <a:bodyPr rtlCol="0" anchor="ctr"/>
-          <a:lstStyle/>
-          <a:p>
-            <a:pPr algn="ctr"/>
-          </a:p>
-        </p:txBody>
-      </p:sp>
-      <p:sp>
-        <p:nvSpPr>
-          <p:cNvPr id="20" name="TextBox 19"/>
-          <p:cNvSpPr txBox="1"/>
-          <p:nvPr/>
-        </p:nvSpPr>
-        <p:spPr>
-          <a:xfrm>
-            <a:off x="7909560" y="3337560"/>
-            <a:ext cx="3154680" cy="548640"/>
-          </a:xfrm>
-          <a:prstGeom prst="rect">
-            <a:avLst/>
-          </a:prstGeom>
-          <a:noFill/>
-        </p:spPr>
-        <p:txBody>
-          <a:bodyPr wrap="square" anchor="t" lIns="0" rIns="0" tIns="0" bIns="0">
-            <a:spAutoFit/>
-          </a:bodyPr>
-          <a:lstStyle/>
-          <a:p>
-            <a:pPr algn="ctr"/>
-            <a:r>
-              <a:rPr sz="1400" b="1" i="0">
-                <a:solidFill>
-                  <a:srgbClr val="FFFFFF"/>
-                </a:solidFill>
-                <a:latin typeface="Calibri"/>
-              </a:rPr>
-              <a:t>Queueing Theory /</a:t>
-            </a:r>
-          </a:p>
-          <a:p>
-            <a:pPr algn="ctr"/>
-            <a:r>
-              <a:rPr sz="1400" b="1" i="0">
-                <a:solidFill>
-                  <a:srgbClr val="FFFFFF"/>
-                </a:solidFill>
-                <a:latin typeface="Calibri"/>
-              </a:rPr>
-              <a:t>Discrete-Event Simulation</a:t>
-            </a:r>
-          </a:p>
-        </p:txBody>
-      </p:sp>
-      <p:sp>
-        <p:nvSpPr>
-          <p:cNvPr id="21" name="TextBox 20"/>
-          <p:cNvSpPr txBox="1"/>
-          <p:nvPr/>
-        </p:nvSpPr>
-        <p:spPr>
-          <a:xfrm>
-            <a:off x="7955280" y="4114800"/>
-            <a:ext cx="3063240" cy="1645920"/>
-          </a:xfrm>
-          <a:prstGeom prst="rect">
-            <a:avLst/>
-          </a:prstGeom>
-          <a:noFill/>
-        </p:spPr>
-        <p:txBody>
-          <a:bodyPr wrap="square" anchor="t" lIns="0" rIns="0" tIns="0" bIns="0">
-            <a:spAutoFit/>
-          </a:bodyPr>
-          <a:lstStyle/>
-          <a:p>
-            <a:pPr algn="l"/>
-            <a:r>
-              <a:rPr sz="1250" b="0" i="0">
-                <a:solidFill>
-                  <a:srgbClr val="1F2937"/>
-                </a:solidFill>
-                <a:latin typeface="Calibri"/>
-              </a:rPr>
-              <a:t>Discrete-event simulation of service systems, particularly emergency department queueing and staffing models.</a:t>
-            </a:r>
-          </a:p>
-        </p:txBody>
-      </p:sp>
-      <p:sp>
-        <p:nvSpPr>
-          <p:cNvPr id="22" name="TextBox 21"/>
-          <p:cNvSpPr txBox="1"/>
-          <p:nvPr/>
-        </p:nvSpPr>
-        <p:spPr>
-          <a:xfrm>
-            <a:off x="640080" y="6080760"/>
-            <a:ext cx="10881360" cy="457200"/>
-          </a:xfrm>
-          <a:prstGeom prst="rect">
-            <a:avLst/>
-          </a:prstGeom>
-          <a:noFill/>
-        </p:spPr>
-        <p:txBody>
-          <a:bodyPr wrap="square" anchor="t" lIns="0" rIns="0" tIns="0" bIns="0">
-            <a:spAutoFit/>
-          </a:bodyPr>
-          <a:lstStyle/>
-          <a:p>
-            <a:pPr algn="l"/>
-            <a:r>
-              <a:rPr sz="1300" b="0" i="1">
-                <a:solidFill>
-                  <a:srgbClr val="6B7280"/>
-                </a:solidFill>
-                <a:latin typeface="Calibri"/>
-              </a:rPr>
-              <a:t>Target: 30 papers total, 3 core papers reviewed in depth. In progress.</a:t>
+              <a:t>Full review in progress — target 30 papers total, 3 core papers reviewed in depth.</a:t>
             </a:r>
           </a:p>
         </p:txBody>
@@ -4943,7 +6719,7 @@
                 </a:solidFill>
                 <a:latin typeface="Calibri"/>
               </a:rPr>
-              <a:t>LITERATURE</a:t>
+              <a:t>GAPS IDENTIFIED</a:t>
             </a:r>
           </a:p>
         </p:txBody>
@@ -5057,7 +6833,7 @@
                 </a:solidFill>
                 <a:latin typeface="Calibri"/>
               </a:rPr>
-              <a:t>5 / 9</a:t>
+              <a:t>5 / 12</a:t>
             </a:r>
           </a:p>
         </p:txBody>
@@ -5086,7 +6862,7 @@
           <a:p>
             <a:pPr algn="l"/>
             <a:r>
-              <a:rPr sz="1800" b="1" i="0">
+              <a:rPr sz="1700" b="1" i="0">
                 <a:solidFill>
                   <a:srgbClr val="1F2937"/>
                 </a:solidFill>
@@ -5105,7 +6881,7 @@
         </p:nvSpPr>
         <p:spPr>
           <a:xfrm>
-            <a:off x="640080" y="1920240"/>
+            <a:off x="640080" y="1901952"/>
             <a:ext cx="10881360" cy="457200"/>
           </a:xfrm>
           <a:prstGeom prst="rect">
@@ -5121,7 +6897,7 @@
           <a:p>
             <a:pPr algn="l"/>
             <a:r>
-              <a:rPr sz="1800" b="1" i="0">
+              <a:rPr sz="1700" b="1" i="0">
                 <a:solidFill>
                   <a:srgbClr val="1E40AF"/>
                 </a:solidFill>
@@ -5140,8 +6916,8 @@
         </p:nvSpPr>
         <p:spPr>
           <a:xfrm>
-            <a:off x="640080" y="2697480"/>
-            <a:ext cx="10881360" cy="1828800"/>
+            <a:off x="640080" y="2514600"/>
+            <a:ext cx="10881360" cy="1143000"/>
           </a:xfrm>
           <a:prstGeom prst="rect">
             <a:avLst/>
@@ -5186,7 +6962,7 @@
         </p:nvSpPr>
         <p:spPr>
           <a:xfrm>
-            <a:off x="914400" y="2880360"/>
+            <a:off x="914400" y="2624328"/>
             <a:ext cx="10332720" cy="365760"/>
           </a:xfrm>
           <a:prstGeom prst="rect">
@@ -5204,11 +6980,11 @@
             <a:r>
               <a:rPr sz="1500" b="1" i="0">
                 <a:solidFill>
-                  <a:srgbClr val="1F2937"/>
+                  <a:srgbClr val="1E40AF"/>
                 </a:solidFill>
                 <a:latin typeface="Calibri"/>
               </a:rPr>
-              <a:t>The paper states two explicit limitations:</a:t>
+              <a:t>Gap 1 — Marginal coverage only</a:t>
             </a:r>
           </a:p>
         </p:txBody>
@@ -5221,63 +6997,8 @@
         </p:nvSpPr>
         <p:spPr>
           <a:xfrm>
-            <a:off x="914400" y="3337560"/>
-            <a:ext cx="10241280" cy="1097280"/>
-          </a:xfrm>
-          <a:prstGeom prst="rect">
-            <a:avLst/>
-          </a:prstGeom>
-          <a:noFill/>
-        </p:spPr>
-        <p:txBody>
-          <a:bodyPr wrap="square">
-            <a:spAutoFit/>
-          </a:bodyPr>
-          <a:lstStyle/>
-          <a:p>
-            <a:pPr>
-              <a:spcAft>
-                <a:spcPts val="1000"/>
-              </a:spcAft>
-            </a:pPr>
-            <a:r>
-              <a:rPr sz="1500">
-                <a:solidFill>
-                  <a:srgbClr val="1F2937"/>
-                </a:solidFill>
-                <a:latin typeface="Calibri"/>
-              </a:rPr>
-              <a:t>•  Marginal coverage only — no guarantee of coverage within specific subgroups/conditions.</a:t>
-            </a:r>
-          </a:p>
-          <a:p>
-            <a:pPr>
-              <a:spcAft>
-                <a:spcPts val="1000"/>
-              </a:spcAft>
-            </a:pPr>
-            <a:r>
-              <a:rPr sz="1500">
-                <a:solidFill>
-                  <a:srgbClr val="1F2937"/>
-                </a:solidFill>
-                <a:latin typeface="Calibri"/>
-              </a:rPr>
-              <a:t>•  Relies on an exchangeability assumption between calibration and test data — untested under distribution shift.</a:t>
-            </a:r>
-          </a:p>
-        </p:txBody>
-      </p:sp>
-      <p:sp>
-        <p:nvSpPr>
-          <p:cNvPr id="12" name="TextBox 11"/>
-          <p:cNvSpPr txBox="1"/>
-          <p:nvPr/>
-        </p:nvSpPr>
-        <p:spPr>
-          <a:xfrm>
-            <a:off x="640080" y="4800600"/>
-            <a:ext cx="10881360" cy="1280160"/>
+            <a:off x="914400" y="3017520"/>
+            <a:ext cx="10332720" cy="548640"/>
           </a:xfrm>
           <a:prstGeom prst="rect">
             <a:avLst/>
@@ -5292,13 +7013,245 @@
           <a:p>
             <a:pPr algn="l"/>
             <a:r>
-              <a:rPr sz="1600" b="0" i="0">
+              <a:rPr sz="1350" b="0" i="0">
                 <a:solidFill>
                   <a:srgbClr val="1F2937"/>
                 </a:solidFill>
                 <a:latin typeface="Calibri"/>
               </a:rPr>
-              <a:t>Neither limitation has been tested outside physics simulation. Discrete-event / queueing systems are a fundamentally different domain — stochastic discrete arrivals and departures, resource contention, priority scheduling — not continuous PDE fields. This is the gap this project addresses.</a:t>
+              <a:t>No guarantee of coverage within specific subgroups or conditions, only on average across everything.</a:t>
+            </a:r>
+          </a:p>
+        </p:txBody>
+      </p:sp>
+      <p:sp>
+        <p:nvSpPr>
+          <p:cNvPr id="12" name="Rectangle 11"/>
+          <p:cNvSpPr/>
+          <p:nvPr/>
+        </p:nvSpPr>
+        <p:spPr>
+          <a:xfrm>
+            <a:off x="640080" y="3794760"/>
+            <a:ext cx="10881360" cy="1143000"/>
+          </a:xfrm>
+          <a:prstGeom prst="rect">
+            <a:avLst/>
+          </a:prstGeom>
+          <a:solidFill>
+            <a:srgbClr val="F8FAFC"/>
+          </a:solidFill>
+          <a:ln w="9525">
+            <a:solidFill>
+              <a:srgbClr val="E2E8F0"/>
+            </a:solidFill>
+          </a:ln>
+          <a:effectLst/>
+        </p:spPr>
+        <p:style>
+          <a:lnRef idx="1">
+            <a:schemeClr val="accent1"/>
+          </a:lnRef>
+          <a:fillRef idx="3">
+            <a:schemeClr val="accent1"/>
+          </a:fillRef>
+          <a:effectRef idx="2">
+            <a:schemeClr val="accent1"/>
+          </a:effectRef>
+          <a:fontRef idx="minor">
+            <a:schemeClr val="lt1"/>
+          </a:fontRef>
+        </p:style>
+        <p:txBody>
+          <a:bodyPr rtlCol="0" anchor="ctr"/>
+          <a:lstStyle/>
+          <a:p>
+            <a:pPr algn="ctr"/>
+          </a:p>
+        </p:txBody>
+      </p:sp>
+      <p:sp>
+        <p:nvSpPr>
+          <p:cNvPr id="13" name="TextBox 12"/>
+          <p:cNvSpPr txBox="1"/>
+          <p:nvPr/>
+        </p:nvSpPr>
+        <p:spPr>
+          <a:xfrm>
+            <a:off x="914400" y="3904488"/>
+            <a:ext cx="10332720" cy="365760"/>
+          </a:xfrm>
+          <a:prstGeom prst="rect">
+            <a:avLst/>
+          </a:prstGeom>
+          <a:noFill/>
+        </p:spPr>
+        <p:txBody>
+          <a:bodyPr wrap="square" anchor="t" lIns="0" rIns="0" tIns="0" bIns="0">
+            <a:spAutoFit/>
+          </a:bodyPr>
+          <a:lstStyle/>
+          <a:p>
+            <a:pPr algn="l"/>
+            <a:r>
+              <a:rPr sz="1500" b="1" i="0">
+                <a:solidFill>
+                  <a:srgbClr val="1E40AF"/>
+                </a:solidFill>
+                <a:latin typeface="Calibri"/>
+              </a:rPr>
+              <a:t>Gap 2 — Untested exchangeability assumption</a:t>
+            </a:r>
+          </a:p>
+        </p:txBody>
+      </p:sp>
+      <p:sp>
+        <p:nvSpPr>
+          <p:cNvPr id="14" name="TextBox 13"/>
+          <p:cNvSpPr txBox="1"/>
+          <p:nvPr/>
+        </p:nvSpPr>
+        <p:spPr>
+          <a:xfrm>
+            <a:off x="914400" y="4297680"/>
+            <a:ext cx="10332720" cy="548640"/>
+          </a:xfrm>
+          <a:prstGeom prst="rect">
+            <a:avLst/>
+          </a:prstGeom>
+          <a:noFill/>
+        </p:spPr>
+        <p:txBody>
+          <a:bodyPr wrap="square" anchor="t" lIns="0" rIns="0" tIns="0" bIns="0">
+            <a:spAutoFit/>
+          </a:bodyPr>
+          <a:lstStyle/>
+          <a:p>
+            <a:pPr algn="l"/>
+            <a:r>
+              <a:rPr sz="1350" b="0" i="0">
+                <a:solidFill>
+                  <a:srgbClr val="1F2937"/>
+                </a:solidFill>
+                <a:latin typeface="Calibri"/>
+              </a:rPr>
+              <a:t>Coverage relies on calibration and test data being exchangeable; this hasn't been tested under distribution shift.</a:t>
+            </a:r>
+          </a:p>
+        </p:txBody>
+      </p:sp>
+      <p:sp>
+        <p:nvSpPr>
+          <p:cNvPr id="15" name="Rectangle 14"/>
+          <p:cNvSpPr/>
+          <p:nvPr/>
+        </p:nvSpPr>
+        <p:spPr>
+          <a:xfrm>
+            <a:off x="640080" y="5074920"/>
+            <a:ext cx="10881360" cy="1143000"/>
+          </a:xfrm>
+          <a:prstGeom prst="rect">
+            <a:avLst/>
+          </a:prstGeom>
+          <a:solidFill>
+            <a:srgbClr val="F8FAFC"/>
+          </a:solidFill>
+          <a:ln w="9525">
+            <a:solidFill>
+              <a:srgbClr val="E2E8F0"/>
+            </a:solidFill>
+          </a:ln>
+          <a:effectLst/>
+        </p:spPr>
+        <p:style>
+          <a:lnRef idx="1">
+            <a:schemeClr val="accent1"/>
+          </a:lnRef>
+          <a:fillRef idx="3">
+            <a:schemeClr val="accent1"/>
+          </a:fillRef>
+          <a:effectRef idx="2">
+            <a:schemeClr val="accent1"/>
+          </a:effectRef>
+          <a:fontRef idx="minor">
+            <a:schemeClr val="lt1"/>
+          </a:fontRef>
+        </p:style>
+        <p:txBody>
+          <a:bodyPr rtlCol="0" anchor="ctr"/>
+          <a:lstStyle/>
+          <a:p>
+            <a:pPr algn="ctr"/>
+          </a:p>
+        </p:txBody>
+      </p:sp>
+      <p:sp>
+        <p:nvSpPr>
+          <p:cNvPr id="16" name="TextBox 15"/>
+          <p:cNvSpPr txBox="1"/>
+          <p:nvPr/>
+        </p:nvSpPr>
+        <p:spPr>
+          <a:xfrm>
+            <a:off x="914400" y="5184648"/>
+            <a:ext cx="10332720" cy="365760"/>
+          </a:xfrm>
+          <a:prstGeom prst="rect">
+            <a:avLst/>
+          </a:prstGeom>
+          <a:noFill/>
+        </p:spPr>
+        <p:txBody>
+          <a:bodyPr wrap="square" anchor="t" lIns="0" rIns="0" tIns="0" bIns="0">
+            <a:spAutoFit/>
+          </a:bodyPr>
+          <a:lstStyle/>
+          <a:p>
+            <a:pPr algn="l"/>
+            <a:r>
+              <a:rPr sz="1500" b="1" i="0">
+                <a:solidFill>
+                  <a:srgbClr val="1E40AF"/>
+                </a:solidFill>
+                <a:latin typeface="Calibri"/>
+              </a:rPr>
+              <a:t>Gap 3 — No discrete-event / queueing validation</a:t>
+            </a:r>
+          </a:p>
+        </p:txBody>
+      </p:sp>
+      <p:sp>
+        <p:nvSpPr>
+          <p:cNvPr id="17" name="TextBox 16"/>
+          <p:cNvSpPr txBox="1"/>
+          <p:nvPr/>
+        </p:nvSpPr>
+        <p:spPr>
+          <a:xfrm>
+            <a:off x="914400" y="5577840"/>
+            <a:ext cx="10332720" cy="548640"/>
+          </a:xfrm>
+          <a:prstGeom prst="rect">
+            <a:avLst/>
+          </a:prstGeom>
+          <a:noFill/>
+        </p:spPr>
+        <p:txBody>
+          <a:bodyPr wrap="square" anchor="t" lIns="0" rIns="0" tIns="0" bIns="0">
+            <a:spAutoFit/>
+          </a:bodyPr>
+          <a:lstStyle/>
+          <a:p>
+            <a:pPr algn="l"/>
+            <a:r>
+              <a:rPr sz="1350" b="0" i="0">
+                <a:solidFill>
+                  <a:srgbClr val="1F2937"/>
+                </a:solidFill>
+                <a:latin typeface="Calibri"/>
+              </a:rPr>
+              <a:t>Neither limitation has been tested outside physics simulation — discrete-event / queueing systems are a fundamentally different domain.</a:t>
             </a:r>
           </a:p>
         </p:txBody>
@@ -5395,7 +7348,7 @@
                 </a:solidFill>
                 <a:latin typeface="Calibri"/>
               </a:rPr>
-              <a:t>CONTRIBUTION</a:t>
+              <a:t>MOTIVATION</a:t>
             </a:r>
           </a:p>
         </p:txBody>
@@ -5424,13 +7377,13 @@
           <a:p>
             <a:pPr algn="l"/>
             <a:r>
-              <a:rPr sz="2600" b="1" i="0">
+              <a:rPr sz="2800" b="1" i="0">
                 <a:solidFill>
                   <a:srgbClr val="1B2238"/>
                 </a:solidFill>
                 <a:latin typeface="Calibri"/>
               </a:rPr>
-              <a:t>Bridging the Gap: Our Novelty</a:t>
+              <a:t>Problem Statement</a:t>
             </a:r>
           </a:p>
         </p:txBody>
@@ -5509,7 +7462,7 @@
                 </a:solidFill>
                 <a:latin typeface="Calibri"/>
               </a:rPr>
-              <a:t>6 / 9</a:t>
+              <a:t>6 / 12</a:t>
             </a:r>
           </a:p>
         </p:txBody>
@@ -5523,7 +7476,7 @@
         <p:spPr>
           <a:xfrm>
             <a:off x="640080" y="1600200"/>
-            <a:ext cx="10881360" cy="4389120"/>
+            <a:ext cx="10881360" cy="4572000"/>
           </a:xfrm>
           <a:prstGeom prst="rect">
             <a:avLst/>
@@ -5538,65 +7491,65 @@
           <a:p>
             <a:pPr>
               <a:spcAft>
-                <a:spcPts val="1400"/>
+                <a:spcPts val="1600"/>
               </a:spcAft>
             </a:pPr>
             <a:r>
-              <a:rPr sz="1700">
+              <a:rPr sz="1800">
                 <a:solidFill>
                   <a:srgbClr val="1F2937"/>
                 </a:solidFill>
                 <a:latin typeface="Calibri"/>
               </a:rPr>
-              <a:t>•  Apply Conformal Prediction — standard and Mondrian CP — to a surrogate model of a discrete-event ER queueing simulation, a domain never tested against these limitations before.</a:t>
-            </a:r>
-          </a:p>
-          <a:p>
-            <a:pPr lvl="1">
+              <a:t>•  Surrogate models are fast, learned approximations of expensive simulations, increasingly used to guide decisions in stochastic service systems - ER staffing, queueing networks, etc.</a:t>
+            </a:r>
+          </a:p>
+          <a:p>
+            <a:pPr>
               <a:spcAft>
-                <a:spcPts val="1400"/>
+                <a:spcPts val="1600"/>
               </a:spcAft>
             </a:pPr>
             <a:r>
-              <a:rPr sz="1500">
+              <a:rPr sz="1800">
                 <a:solidFill>
                   <a:srgbClr val="1F2937"/>
                 </a:solidFill>
                 <a:latin typeface="Calibri"/>
               </a:rPr>
-              <a:t>‒  Marginal coverage limitation: addressed with Mondrian CP, which calibrates separately per category (staffing level x arrival-rate regime) instead of one pooled quantile — targets conditional coverage, not just an average.</a:t>
-            </a:r>
-          </a:p>
-          <a:p>
-            <a:pPr lvl="1">
+              <a:t>•  A point prediction alone isn't enough for a decision like "will adding 2 more doctors bring wait time down enough?" - that needs a calibrated interval, not just a number.</a:t>
+            </a:r>
+          </a:p>
+          <a:p>
+            <a:pPr>
               <a:spcAft>
-                <a:spcPts val="1400"/>
+                <a:spcPts val="1600"/>
               </a:spcAft>
             </a:pPr>
             <a:r>
-              <a:rPr sz="1500">
+              <a:rPr sz="1800">
                 <a:solidFill>
                   <a:srgbClr val="1F2937"/>
                 </a:solidFill>
                 <a:latin typeface="Calibri"/>
               </a:rPr>
-              <a:t>‒  Exchangeability limitation: addressed with a stress test that pushes the evaluation data outside the training distribution (an out-of-distribution "surge day" scenario) to see where the coverage guarantee actually breaks down.</a:t>
+              <a:t>•  Gaussian Processes are the established way to get one, but are expensive to train and rely on distributional assumptions rather than a finite-sample guarantee.</a:t>
             </a:r>
           </a:p>
           <a:p>
             <a:pPr>
               <a:spcAft>
-                <a:spcPts val="1400"/>
+                <a:spcPts val="1600"/>
               </a:spcAft>
             </a:pPr>
             <a:r>
-              <a:rPr sz="1700">
+              <a:rPr sz="1800">
                 <a:solidFill>
                   <a:srgbClr val="1F2937"/>
                 </a:solidFill>
                 <a:latin typeface="Calibri"/>
               </a:rPr>
-              <a:t>•  Novelty: this is the first empirical test of Conformal Prediction's stated physics-domain limitations in a discrete-event / queueing simulation setting — a direct bridge between the base paper's open questions and a new application domain.</a:t>
+              <a:t>•  Conformal Prediction (CP) is distribution-free with a finite-sample coverage guarantee and is cheap to calibrate - but it's only been validated for surrogate models in a narrow set of domains so far.</a:t>
             </a:r>
           </a:p>
         </p:txBody>
@@ -5693,7 +7646,7 @@
                 </a:solidFill>
                 <a:latin typeface="Calibri"/>
               </a:rPr>
-              <a:t>GOAL</a:t>
+              <a:t>APPROACH (1/2)</a:t>
             </a:r>
           </a:p>
         </p:txBody>
@@ -5722,13 +7675,13 @@
           <a:p>
             <a:pPr algn="l"/>
             <a:r>
-              <a:rPr sz="2800" b="1" i="0">
+              <a:rPr sz="2500" b="1" i="0">
                 <a:solidFill>
                   <a:srgbClr val="1B2238"/>
                 </a:solidFill>
                 <a:latin typeface="Calibri"/>
               </a:rPr>
-              <a:t>Aim &amp; Objectives</a:t>
+              <a:t>Methodology — Pipeline Overview</a:t>
             </a:r>
           </a:p>
         </p:txBody>
@@ -5807,32 +7760,32 @@
                 </a:solidFill>
                 <a:latin typeface="Calibri"/>
               </a:rPr>
-              <a:t>7 / 9</a:t>
-            </a:r>
-          </a:p>
-        </p:txBody>
-      </p:sp>
-      <p:sp>
-        <p:nvSpPr>
-          <p:cNvPr id="7" name="Rectangle 6"/>
+              <a:t>7 / 12</a:t>
+            </a:r>
+          </a:p>
+        </p:txBody>
+      </p:sp>
+      <p:sp>
+        <p:nvSpPr>
+          <p:cNvPr id="7" name="Rounded Rectangle 6"/>
           <p:cNvSpPr/>
           <p:nvPr/>
         </p:nvSpPr>
         <p:spPr>
           <a:xfrm>
-            <a:off x="640080" y="1508760"/>
-            <a:ext cx="10881360" cy="1005840"/>
-          </a:xfrm>
-          <a:prstGeom prst="rect">
-            <a:avLst/>
+            <a:off x="502920" y="1920240"/>
+            <a:ext cx="3291840" cy="1188720"/>
+          </a:xfrm>
+          <a:prstGeom prst="roundRect">
+            <a:avLst>
+              <a:gd name="adj" fmla="val 8000"/>
+            </a:avLst>
           </a:prstGeom>
           <a:solidFill>
-            <a:srgbClr val="F8FAFC"/>
+            <a:srgbClr val="1E40AF"/>
           </a:solidFill>
-          <a:ln w="9525">
-            <a:solidFill>
-              <a:srgbClr val="E2E8F0"/>
-            </a:solidFill>
+          <a:ln>
+            <a:noFill/>
           </a:ln>
           <a:effectLst/>
         </p:spPr>
@@ -5851,6 +7804,204 @@
           </a:fontRef>
         </p:style>
         <p:txBody>
+          <a:bodyPr rtlCol="0" anchor="ctr" wrap="square"/>
+          <a:lstStyle/>
+          <a:p>
+            <a:pPr algn="ctr"/>
+            <a:r>
+              <a:rPr sz="1600" b="1">
+                <a:solidFill>
+                  <a:srgbClr val="FFFFFF"/>
+                </a:solidFill>
+              </a:rPr>
+              <a:t>Discrete-Event
+Simulation</a:t>
+            </a:r>
+          </a:p>
+          <a:p>
+            <a:pPr algn="ctr"/>
+            <a:r>
+              <a:rPr sz="1150">
+                <a:solidFill>
+                  <a:srgbClr val="FFFFFF"/>
+                </a:solidFill>
+              </a:rPr>
+              <a:t>SimPy, calibrated on
+real ED data</a:t>
+            </a:r>
+          </a:p>
+        </p:txBody>
+      </p:sp>
+      <p:sp>
+        <p:nvSpPr>
+          <p:cNvPr id="8" name="Rounded Rectangle 7"/>
+          <p:cNvSpPr/>
+          <p:nvPr/>
+        </p:nvSpPr>
+        <p:spPr>
+          <a:xfrm>
+            <a:off x="4206240" y="1920240"/>
+            <a:ext cx="3291840" cy="1188720"/>
+          </a:xfrm>
+          <a:prstGeom prst="roundRect">
+            <a:avLst>
+              <a:gd name="adj" fmla="val 8000"/>
+            </a:avLst>
+          </a:prstGeom>
+          <a:solidFill>
+            <a:srgbClr val="1E40AF"/>
+          </a:solidFill>
+          <a:ln>
+            <a:noFill/>
+          </a:ln>
+          <a:effectLst/>
+        </p:spPr>
+        <p:style>
+          <a:lnRef idx="1">
+            <a:schemeClr val="accent1"/>
+          </a:lnRef>
+          <a:fillRef idx="3">
+            <a:schemeClr val="accent1"/>
+          </a:fillRef>
+          <a:effectRef idx="2">
+            <a:schemeClr val="accent1"/>
+          </a:effectRef>
+          <a:fontRef idx="minor">
+            <a:schemeClr val="lt1"/>
+          </a:fontRef>
+        </p:style>
+        <p:txBody>
+          <a:bodyPr rtlCol="0" anchor="ctr" wrap="square"/>
+          <a:lstStyle/>
+          <a:p>
+            <a:pPr algn="ctr"/>
+            <a:r>
+              <a:rPr sz="1600" b="1">
+                <a:solidFill>
+                  <a:srgbClr val="FFFFFF"/>
+                </a:solidFill>
+              </a:rPr>
+              <a:t>Surrogate Model</a:t>
+            </a:r>
+          </a:p>
+          <a:p>
+            <a:pPr algn="ctr"/>
+            <a:r>
+              <a:rPr sz="1150">
+                <a:solidFill>
+                  <a:srgbClr val="FFFFFF"/>
+                </a:solidFill>
+              </a:rPr>
+              <a:t>Learned approximation of
+the simulation</a:t>
+            </a:r>
+          </a:p>
+        </p:txBody>
+      </p:sp>
+      <p:sp>
+        <p:nvSpPr>
+          <p:cNvPr id="9" name="Rounded Rectangle 8"/>
+          <p:cNvSpPr/>
+          <p:nvPr/>
+        </p:nvSpPr>
+        <p:spPr>
+          <a:xfrm>
+            <a:off x="7909560" y="1920240"/>
+            <a:ext cx="3291840" cy="1188720"/>
+          </a:xfrm>
+          <a:prstGeom prst="roundRect">
+            <a:avLst>
+              <a:gd name="adj" fmla="val 8000"/>
+            </a:avLst>
+          </a:prstGeom>
+          <a:solidFill>
+            <a:srgbClr val="1E40AF"/>
+          </a:solidFill>
+          <a:ln>
+            <a:noFill/>
+          </a:ln>
+          <a:effectLst/>
+        </p:spPr>
+        <p:style>
+          <a:lnRef idx="1">
+            <a:schemeClr val="accent1"/>
+          </a:lnRef>
+          <a:fillRef idx="3">
+            <a:schemeClr val="accent1"/>
+          </a:fillRef>
+          <a:effectRef idx="2">
+            <a:schemeClr val="accent1"/>
+          </a:effectRef>
+          <a:fontRef idx="minor">
+            <a:schemeClr val="lt1"/>
+          </a:fontRef>
+        </p:style>
+        <p:txBody>
+          <a:bodyPr rtlCol="0" anchor="ctr" wrap="square"/>
+          <a:lstStyle/>
+          <a:p>
+            <a:pPr algn="ctr"/>
+            <a:r>
+              <a:rPr sz="1600" b="1">
+                <a:solidFill>
+                  <a:srgbClr val="FFFFFF"/>
+                </a:solidFill>
+              </a:rPr>
+              <a:t>Uncertainty
+Quantification</a:t>
+            </a:r>
+          </a:p>
+          <a:p>
+            <a:pPr algn="ctr"/>
+            <a:r>
+              <a:rPr sz="1150">
+                <a:solidFill>
+                  <a:srgbClr val="FFFFFF"/>
+                </a:solidFill>
+              </a:rPr>
+              <a:t>GP baseline vs. standard CP
+vs. Mondrian CP</a:t>
+            </a:r>
+          </a:p>
+        </p:txBody>
+      </p:sp>
+      <p:sp>
+        <p:nvSpPr>
+          <p:cNvPr id="10" name="Right Arrow 9"/>
+          <p:cNvSpPr/>
+          <p:nvPr/>
+        </p:nvSpPr>
+        <p:spPr>
+          <a:xfrm>
+            <a:off x="3794760" y="2331720"/>
+            <a:ext cx="411480" cy="365760"/>
+          </a:xfrm>
+          <a:prstGeom prst="rightArrow">
+            <a:avLst/>
+          </a:prstGeom>
+          <a:solidFill>
+            <a:srgbClr val="6B7280"/>
+          </a:solidFill>
+          <a:ln>
+            <a:noFill/>
+          </a:ln>
+          <a:effectLst/>
+        </p:spPr>
+        <p:style>
+          <a:lnRef idx="1">
+            <a:schemeClr val="accent1"/>
+          </a:lnRef>
+          <a:fillRef idx="3">
+            <a:schemeClr val="accent1"/>
+          </a:fillRef>
+          <a:effectRef idx="2">
+            <a:schemeClr val="accent1"/>
+          </a:effectRef>
+          <a:fontRef idx="minor">
+            <a:schemeClr val="lt1"/>
+          </a:fontRef>
+        </p:style>
+        <p:txBody>
           <a:bodyPr rtlCol="0" anchor="ctr"/>
           <a:lstStyle/>
           <a:p>
@@ -5860,14 +8011,58 @@
       </p:sp>
       <p:sp>
         <p:nvSpPr>
-          <p:cNvPr id="8" name="TextBox 7"/>
+          <p:cNvPr id="11" name="Right Arrow 10"/>
+          <p:cNvSpPr/>
+          <p:nvPr/>
+        </p:nvSpPr>
+        <p:spPr>
+          <a:xfrm>
+            <a:off x="7498080" y="2331720"/>
+            <a:ext cx="411480" cy="365760"/>
+          </a:xfrm>
+          <a:prstGeom prst="rightArrow">
+            <a:avLst/>
+          </a:prstGeom>
+          <a:solidFill>
+            <a:srgbClr val="6B7280"/>
+          </a:solidFill>
+          <a:ln>
+            <a:noFill/>
+          </a:ln>
+          <a:effectLst/>
+        </p:spPr>
+        <p:style>
+          <a:lnRef idx="1">
+            <a:schemeClr val="accent1"/>
+          </a:lnRef>
+          <a:fillRef idx="3">
+            <a:schemeClr val="accent1"/>
+          </a:fillRef>
+          <a:effectRef idx="2">
+            <a:schemeClr val="accent1"/>
+          </a:effectRef>
+          <a:fontRef idx="minor">
+            <a:schemeClr val="lt1"/>
+          </a:fontRef>
+        </p:style>
+        <p:txBody>
+          <a:bodyPr rtlCol="0" anchor="ctr"/>
+          <a:lstStyle/>
+          <a:p>
+            <a:pPr algn="ctr"/>
+          </a:p>
+        </p:txBody>
+      </p:sp>
+      <p:sp>
+        <p:nvSpPr>
+          <p:cNvPr id="12" name="TextBox 11"/>
           <p:cNvSpPr txBox="1"/>
           <p:nvPr/>
         </p:nvSpPr>
         <p:spPr>
           <a:xfrm>
-            <a:off x="914400" y="1645920"/>
-            <a:ext cx="10332720" cy="777240"/>
+            <a:off x="502920" y="3657600"/>
+            <a:ext cx="11155680" cy="365760"/>
           </a:xfrm>
           <a:prstGeom prst="rect">
             <a:avLst/>
@@ -5882,27 +8077,27 @@
           <a:p>
             <a:pPr algn="l"/>
             <a:r>
-              <a:rPr sz="1500" b="1" i="0">
-                <a:solidFill>
-                  <a:srgbClr val="1F2937"/>
+              <a:rPr sz="1400" b="0" i="1">
+                <a:solidFill>
+                  <a:srgbClr val="6B7280"/>
                 </a:solidFill>
                 <a:latin typeface="Calibri"/>
               </a:rPr>
-              <a:t>Aim: to evaluate whether Conformal Prediction — specifically Mondrian CP — provides reliable, well-calibrated uncertainty quantification for surrogate models of discrete-event simulations, and whether Gopakumar et al.'s stated physics-domain limitations hold in this new domain.</a:t>
-            </a:r>
-          </a:p>
-        </p:txBody>
-      </p:sp>
-      <p:sp>
-        <p:nvSpPr>
-          <p:cNvPr id="9" name="TextBox 8"/>
+              <a:t>Each stage validated against the previous before moving on:</a:t>
+            </a:r>
+          </a:p>
+        </p:txBody>
+      </p:sp>
+      <p:sp>
+        <p:nvSpPr>
+          <p:cNvPr id="13" name="TextBox 12"/>
           <p:cNvSpPr txBox="1"/>
           <p:nvPr/>
         </p:nvSpPr>
         <p:spPr>
           <a:xfrm>
-            <a:off x="640080" y="2788920"/>
-            <a:ext cx="10881360" cy="3657600"/>
+            <a:off x="640080" y="4069080"/>
+            <a:ext cx="10698480" cy="2194560"/>
           </a:xfrm>
           <a:prstGeom prst="rect">
             <a:avLst/>
@@ -5921,13 +8116,13 @@
               </a:spcAft>
             </a:pPr>
             <a:r>
-              <a:rPr sz="1600">
+              <a:rPr sz="1500">
                 <a:solidFill>
                   <a:srgbClr val="1F2937"/>
                 </a:solidFill>
                 <a:latin typeface="Calibri"/>
               </a:rPr>
-              <a:t>•  Build and validate a discrete-event ER simulation calibrated on real hospital arrival data.</a:t>
+              <a:t>•  DES output validated against real aggregated ED statistics before being trusted as a data source.</a:t>
             </a:r>
           </a:p>
           <a:p>
@@ -5937,13 +8132,13 @@
               </a:spcAft>
             </a:pPr>
             <a:r>
-              <a:rPr sz="1600">
+              <a:rPr sz="1500">
                 <a:solidFill>
                   <a:srgbClr val="1F2937"/>
                 </a:solidFill>
                 <a:latin typeface="Calibri"/>
               </a:rPr>
-              <a:t>•  Train a surrogate model to approximate the simulation's outputs.</a:t>
+              <a:t>•  Surrogate accuracy validated against DES outputs held out from training.</a:t>
             </a:r>
           </a:p>
           <a:p>
@@ -5953,61 +8148,13 @@
               </a:spcAft>
             </a:pPr>
             <a:r>
-              <a:rPr sz="1600">
+              <a:rPr sz="1500">
                 <a:solidFill>
                   <a:srgbClr val="1F2937"/>
                 </a:solidFill>
                 <a:latin typeface="Calibri"/>
               </a:rPr>
-              <a:t>•  Implement a Gaussian Process baseline and standard / Mondrian Conformal Prediction for UQ.</a:t>
-            </a:r>
-          </a:p>
-          <a:p>
-            <a:pPr>
-              <a:spcAft>
-                <a:spcPts val="1000"/>
-              </a:spcAft>
-            </a:pPr>
-            <a:r>
-              <a:rPr sz="1600">
-                <a:solidFill>
-                  <a:srgbClr val="1F2937"/>
-                </a:solidFill>
-                <a:latin typeface="Calibri"/>
-              </a:rPr>
-              <a:t>•  Test marginal vs. conditional coverage — does Mondrian CP close the gap standard CP leaves open?</a:t>
-            </a:r>
-          </a:p>
-          <a:p>
-            <a:pPr>
-              <a:spcAft>
-                <a:spcPts val="1000"/>
-              </a:spcAft>
-            </a:pPr>
-            <a:r>
-              <a:rPr sz="1600">
-                <a:solidFill>
-                  <a:srgbClr val="1F2937"/>
-                </a:solidFill>
-                <a:latin typeface="Calibri"/>
-              </a:rPr>
-              <a:t>•  Stress-test the exchangeability assumption under distribution shift.</a:t>
-            </a:r>
-          </a:p>
-          <a:p>
-            <a:pPr>
-              <a:spcAft>
-                <a:spcPts val="1000"/>
-              </a:spcAft>
-            </a:pPr>
-            <a:r>
-              <a:rPr sz="1600">
-                <a:solidFill>
-                  <a:srgbClr val="1F2937"/>
-                </a:solidFill>
-                <a:latin typeface="Calibri"/>
-              </a:rPr>
-              <a:t>•  Compare all methods on coverage, interval width, and computational cost.</a:t>
+              <a:t>•  Every UQ method evaluated on the same test data and the same target coverage level, so results are directly comparable across methods.</a:t>
             </a:r>
           </a:p>
         </p:txBody>
@@ -6104,7 +8251,7 @@
                 </a:solidFill>
                 <a:latin typeface="Calibri"/>
               </a:rPr>
-              <a:t>APPROACH</a:t>
+              <a:t>APPROACH (2/2)</a:t>
             </a:r>
           </a:p>
         </p:txBody>
@@ -6133,13 +8280,13 @@
           <a:p>
             <a:pPr algn="l"/>
             <a:r>
-              <a:rPr sz="2800" b="1" i="0">
+              <a:rPr sz="2400" b="1" i="0">
                 <a:solidFill>
                   <a:srgbClr val="1B2238"/>
                 </a:solidFill>
                 <a:latin typeface="Calibri"/>
               </a:rPr>
-              <a:t>Methodology / Workflow</a:t>
+              <a:t>Methodology — UQ Methods Compared</a:t>
             </a:r>
           </a:p>
         </p:txBody>
@@ -6218,26 +8365,70 @@
                 </a:solidFill>
                 <a:latin typeface="Calibri"/>
               </a:rPr>
-              <a:t>8 / 9</a:t>
-            </a:r>
-          </a:p>
-        </p:txBody>
-      </p:sp>
-      <p:sp>
-        <p:nvSpPr>
-          <p:cNvPr id="7" name="Rounded Rectangle 6"/>
+              <a:t>8 / 12</a:t>
+            </a:r>
+          </a:p>
+        </p:txBody>
+      </p:sp>
+      <p:sp>
+        <p:nvSpPr>
+          <p:cNvPr id="7" name="Rectangle 6"/>
           <p:cNvSpPr/>
           <p:nvPr/>
         </p:nvSpPr>
         <p:spPr>
           <a:xfrm>
-            <a:off x="502920" y="1920240"/>
-            <a:ext cx="3291840" cy="1188720"/>
-          </a:xfrm>
-          <a:prstGeom prst="roundRect">
-            <a:avLst>
-              <a:gd name="adj" fmla="val 8000"/>
-            </a:avLst>
+            <a:off x="548640" y="1600200"/>
+            <a:ext cx="3520440" cy="4206240"/>
+          </a:xfrm>
+          <a:prstGeom prst="rect">
+            <a:avLst/>
+          </a:prstGeom>
+          <a:solidFill>
+            <a:srgbClr val="FFFFFF"/>
+          </a:solidFill>
+          <a:ln w="9525">
+            <a:solidFill>
+              <a:srgbClr val="E2E8F0"/>
+            </a:solidFill>
+          </a:ln>
+          <a:effectLst/>
+        </p:spPr>
+        <p:style>
+          <a:lnRef idx="1">
+            <a:schemeClr val="accent1"/>
+          </a:lnRef>
+          <a:fillRef idx="3">
+            <a:schemeClr val="accent1"/>
+          </a:fillRef>
+          <a:effectRef idx="2">
+            <a:schemeClr val="accent1"/>
+          </a:effectRef>
+          <a:fontRef idx="minor">
+            <a:schemeClr val="lt1"/>
+          </a:fontRef>
+        </p:style>
+        <p:txBody>
+          <a:bodyPr rtlCol="0" anchor="ctr"/>
+          <a:lstStyle/>
+          <a:p>
+            <a:pPr algn="ctr"/>
+          </a:p>
+        </p:txBody>
+      </p:sp>
+      <p:sp>
+        <p:nvSpPr>
+          <p:cNvPr id="8" name="Rectangle 7"/>
+          <p:cNvSpPr/>
+          <p:nvPr/>
+        </p:nvSpPr>
+        <p:spPr>
+          <a:xfrm>
+            <a:off x="548640" y="1600200"/>
+            <a:ext cx="3520440" cy="640080"/>
+          </a:xfrm>
+          <a:prstGeom prst="rect">
+            <a:avLst/>
           </a:prstGeom>
           <a:solidFill>
             <a:srgbClr val="1E40AF"/>
@@ -6262,49 +8453,142 @@
           </a:fontRef>
         </p:style>
         <p:txBody>
-          <a:bodyPr rtlCol="0" anchor="ctr" wrap="square"/>
+          <a:bodyPr rtlCol="0" anchor="ctr"/>
           <a:lstStyle/>
           <a:p>
             <a:pPr algn="ctr"/>
-            <a:r>
-              <a:rPr sz="1600" b="1">
+          </a:p>
+        </p:txBody>
+      </p:sp>
+      <p:sp>
+        <p:nvSpPr>
+          <p:cNvPr id="9" name="TextBox 8"/>
+          <p:cNvSpPr txBox="1"/>
+          <p:nvPr/>
+        </p:nvSpPr>
+        <p:spPr>
+          <a:xfrm>
+            <a:off x="685800" y="1691640"/>
+            <a:ext cx="3246120" cy="457200"/>
+          </a:xfrm>
+          <a:prstGeom prst="rect">
+            <a:avLst/>
+          </a:prstGeom>
+          <a:noFill/>
+        </p:spPr>
+        <p:txBody>
+          <a:bodyPr wrap="square" anchor="t" lIns="0" rIns="0" tIns="0" bIns="0">
+            <a:spAutoFit/>
+          </a:bodyPr>
+          <a:lstStyle/>
+          <a:p>
+            <a:pPr algn="ctr"/>
+            <a:r>
+              <a:rPr sz="1600" b="1" i="0">
                 <a:solidFill>
                   <a:srgbClr val="FFFFFF"/>
                 </a:solidFill>
+                <a:latin typeface="Calibri"/>
               </a:rPr>
-              <a:t>Discrete-Event
-Simulation</a:t>
-            </a:r>
-          </a:p>
+              <a:t>GP Baseline</a:t>
+            </a:r>
+          </a:p>
+        </p:txBody>
+      </p:sp>
+      <p:sp>
+        <p:nvSpPr>
+          <p:cNvPr id="10" name="TextBox 9"/>
+          <p:cNvSpPr txBox="1"/>
+          <p:nvPr/>
+        </p:nvSpPr>
+        <p:spPr>
+          <a:xfrm>
+            <a:off x="777240" y="2423160"/>
+            <a:ext cx="3063240" cy="3200400"/>
+          </a:xfrm>
+          <a:prstGeom prst="rect">
+            <a:avLst/>
+          </a:prstGeom>
+          <a:noFill/>
+        </p:spPr>
+        <p:txBody>
+          <a:bodyPr wrap="square" anchor="t" lIns="0" rIns="0" tIns="0" bIns="0">
+            <a:spAutoFit/>
+          </a:bodyPr>
+          <a:lstStyle/>
+          <a:p>
+            <a:pPr algn="l"/>
+            <a:r>
+              <a:rPr sz="1350" b="0" i="0">
+                <a:solidFill>
+                  <a:srgbClr val="1F2937"/>
+                </a:solidFill>
+                <a:latin typeface="Calibri"/>
+              </a:rPr>
+              <a:t>Gaussian Process regression gives a predictive mean and standard deviation; interval = mean ± z·std. Established, but costly to train and relies on distributional assumptions.</a:t>
+            </a:r>
+          </a:p>
+        </p:txBody>
+      </p:sp>
+      <p:sp>
+        <p:nvSpPr>
+          <p:cNvPr id="11" name="Rectangle 10"/>
+          <p:cNvSpPr/>
+          <p:nvPr/>
+        </p:nvSpPr>
+        <p:spPr>
+          <a:xfrm>
+            <a:off x="4206240" y="1600200"/>
+            <a:ext cx="3520440" cy="4206240"/>
+          </a:xfrm>
+          <a:prstGeom prst="rect">
+            <a:avLst/>
+          </a:prstGeom>
+          <a:solidFill>
+            <a:srgbClr val="FFFFFF"/>
+          </a:solidFill>
+          <a:ln w="9525">
+            <a:solidFill>
+              <a:srgbClr val="E2E8F0"/>
+            </a:solidFill>
+          </a:ln>
+          <a:effectLst/>
+        </p:spPr>
+        <p:style>
+          <a:lnRef idx="1">
+            <a:schemeClr val="accent1"/>
+          </a:lnRef>
+          <a:fillRef idx="3">
+            <a:schemeClr val="accent1"/>
+          </a:fillRef>
+          <a:effectRef idx="2">
+            <a:schemeClr val="accent1"/>
+          </a:effectRef>
+          <a:fontRef idx="minor">
+            <a:schemeClr val="lt1"/>
+          </a:fontRef>
+        </p:style>
+        <p:txBody>
+          <a:bodyPr rtlCol="0" anchor="ctr"/>
+          <a:lstStyle/>
           <a:p>
             <a:pPr algn="ctr"/>
-            <a:r>
-              <a:rPr sz="1150">
-                <a:solidFill>
-                  <a:srgbClr val="FFFFFF"/>
-                </a:solidFill>
-              </a:rPr>
-              <a:t>SimPy, calibrated on
-real ED data</a:t>
-            </a:r>
-          </a:p>
-        </p:txBody>
-      </p:sp>
-      <p:sp>
-        <p:nvSpPr>
-          <p:cNvPr id="8" name="Rounded Rectangle 7"/>
+          </a:p>
+        </p:txBody>
+      </p:sp>
+      <p:sp>
+        <p:nvSpPr>
+          <p:cNvPr id="12" name="Rectangle 11"/>
           <p:cNvSpPr/>
           <p:nvPr/>
         </p:nvSpPr>
         <p:spPr>
           <a:xfrm>
-            <a:off x="4206240" y="1920240"/>
-            <a:ext cx="3291840" cy="1188720"/>
-          </a:xfrm>
-          <a:prstGeom prst="roundRect">
-            <a:avLst>
-              <a:gd name="adj" fmla="val 8000"/>
-            </a:avLst>
+            <a:off x="4206240" y="1600200"/>
+            <a:ext cx="3520440" cy="640080"/>
+          </a:xfrm>
+          <a:prstGeom prst="rect">
+            <a:avLst/>
           </a:prstGeom>
           <a:solidFill>
             <a:srgbClr val="1E40AF"/>
@@ -6329,51 +8613,145 @@
           </a:fontRef>
         </p:style>
         <p:txBody>
-          <a:bodyPr rtlCol="0" anchor="ctr" wrap="square"/>
+          <a:bodyPr rtlCol="0" anchor="ctr"/>
           <a:lstStyle/>
           <a:p>
             <a:pPr algn="ctr"/>
-            <a:r>
-              <a:rPr sz="1600" b="1">
+          </a:p>
+        </p:txBody>
+      </p:sp>
+      <p:sp>
+        <p:nvSpPr>
+          <p:cNvPr id="13" name="TextBox 12"/>
+          <p:cNvSpPr txBox="1"/>
+          <p:nvPr/>
+        </p:nvSpPr>
+        <p:spPr>
+          <a:xfrm>
+            <a:off x="4343400" y="1691640"/>
+            <a:ext cx="3246120" cy="457200"/>
+          </a:xfrm>
+          <a:prstGeom prst="rect">
+            <a:avLst/>
+          </a:prstGeom>
+          <a:noFill/>
+        </p:spPr>
+        <p:txBody>
+          <a:bodyPr wrap="square" anchor="t" lIns="0" rIns="0" tIns="0" bIns="0">
+            <a:spAutoFit/>
+          </a:bodyPr>
+          <a:lstStyle/>
+          <a:p>
+            <a:pPr algn="ctr"/>
+            <a:r>
+              <a:rPr sz="1600" b="1" i="0">
                 <a:solidFill>
                   <a:srgbClr val="FFFFFF"/>
                 </a:solidFill>
+                <a:latin typeface="Calibri"/>
               </a:rPr>
-              <a:t>Surrogate Model</a:t>
-            </a:r>
-          </a:p>
+              <a:t>Standard CP</a:t>
+            </a:r>
+          </a:p>
+        </p:txBody>
+      </p:sp>
+      <p:sp>
+        <p:nvSpPr>
+          <p:cNvPr id="14" name="TextBox 13"/>
+          <p:cNvSpPr txBox="1"/>
+          <p:nvPr/>
+        </p:nvSpPr>
+        <p:spPr>
+          <a:xfrm>
+            <a:off x="4434840" y="2423160"/>
+            <a:ext cx="3063240" cy="3200400"/>
+          </a:xfrm>
+          <a:prstGeom prst="rect">
+            <a:avLst/>
+          </a:prstGeom>
+          <a:noFill/>
+        </p:spPr>
+        <p:txBody>
+          <a:bodyPr wrap="square" anchor="t" lIns="0" rIns="0" tIns="0" bIns="0">
+            <a:spAutoFit/>
+          </a:bodyPr>
+          <a:lstStyle/>
+          <a:p>
+            <a:pPr algn="l"/>
+            <a:r>
+              <a:rPr sz="1350" b="0" i="0">
+                <a:solidFill>
+                  <a:srgbClr val="1F2937"/>
+                </a:solidFill>
+                <a:latin typeface="Calibri"/>
+              </a:rPr>
+              <a:t>Calibrates a single interval width from the surrogate's residuals on held-out calibration data. Distribution-free, finite-sample coverage guarantee — but only on average across all conditions.</a:t>
+            </a:r>
+          </a:p>
+        </p:txBody>
+      </p:sp>
+      <p:sp>
+        <p:nvSpPr>
+          <p:cNvPr id="15" name="Rectangle 14"/>
+          <p:cNvSpPr/>
+          <p:nvPr/>
+        </p:nvSpPr>
+        <p:spPr>
+          <a:xfrm>
+            <a:off x="7863840" y="1600200"/>
+            <a:ext cx="3520440" cy="4206240"/>
+          </a:xfrm>
+          <a:prstGeom prst="rect">
+            <a:avLst/>
+          </a:prstGeom>
+          <a:solidFill>
+            <a:srgbClr val="FFFFFF"/>
+          </a:solidFill>
+          <a:ln w="9525">
+            <a:solidFill>
+              <a:srgbClr val="E2E8F0"/>
+            </a:solidFill>
+          </a:ln>
+          <a:effectLst/>
+        </p:spPr>
+        <p:style>
+          <a:lnRef idx="1">
+            <a:schemeClr val="accent1"/>
+          </a:lnRef>
+          <a:fillRef idx="3">
+            <a:schemeClr val="accent1"/>
+          </a:fillRef>
+          <a:effectRef idx="2">
+            <a:schemeClr val="accent1"/>
+          </a:effectRef>
+          <a:fontRef idx="minor">
+            <a:schemeClr val="lt1"/>
+          </a:fontRef>
+        </p:style>
+        <p:txBody>
+          <a:bodyPr rtlCol="0" anchor="ctr"/>
+          <a:lstStyle/>
           <a:p>
             <a:pPr algn="ctr"/>
-            <a:r>
-              <a:rPr sz="1150">
-                <a:solidFill>
-                  <a:srgbClr val="FFFFFF"/>
-                </a:solidFill>
-              </a:rPr>
-              <a:t>Learned approximation of
-the simulation</a:t>
-            </a:r>
-          </a:p>
-        </p:txBody>
-      </p:sp>
-      <p:sp>
-        <p:nvSpPr>
-          <p:cNvPr id="9" name="Rounded Rectangle 8"/>
+          </a:p>
+        </p:txBody>
+      </p:sp>
+      <p:sp>
+        <p:nvSpPr>
+          <p:cNvPr id="16" name="Rectangle 15"/>
           <p:cNvSpPr/>
           <p:nvPr/>
         </p:nvSpPr>
         <p:spPr>
           <a:xfrm>
-            <a:off x="7909560" y="1920240"/>
-            <a:ext cx="3291840" cy="1188720"/>
-          </a:xfrm>
-          <a:prstGeom prst="roundRect">
-            <a:avLst>
-              <a:gd name="adj" fmla="val 8000"/>
-            </a:avLst>
+            <a:off x="7863840" y="1600200"/>
+            <a:ext cx="3520440" cy="640080"/>
+          </a:xfrm>
+          <a:prstGeom prst="rect">
+            <a:avLst/>
           </a:prstGeom>
           <a:solidFill>
-            <a:srgbClr val="1E40AF"/>
+            <a:srgbClr val="0F766E"/>
           </a:solidFill>
           <a:ln>
             <a:noFill/>
@@ -6395,132 +8773,23 @@
           </a:fontRef>
         </p:style>
         <p:txBody>
-          <a:bodyPr rtlCol="0" anchor="ctr" wrap="square"/>
+          <a:bodyPr rtlCol="0" anchor="ctr"/>
           <a:lstStyle/>
           <a:p>
             <a:pPr algn="ctr"/>
-            <a:r>
-              <a:rPr sz="1600" b="1">
-                <a:solidFill>
-                  <a:srgbClr val="FFFFFF"/>
-                </a:solidFill>
-              </a:rPr>
-              <a:t>Uncertainty
-Quantification</a:t>
-            </a:r>
-          </a:p>
-          <a:p>
-            <a:pPr algn="ctr"/>
-            <a:r>
-              <a:rPr sz="1150">
-                <a:solidFill>
-                  <a:srgbClr val="FFFFFF"/>
-                </a:solidFill>
-              </a:rPr>
-              <a:t>GP baseline vs. standard CP
-vs. Mondrian CP</a:t>
-            </a:r>
-          </a:p>
-        </p:txBody>
-      </p:sp>
-      <p:sp>
-        <p:nvSpPr>
-          <p:cNvPr id="10" name="Right Arrow 9"/>
-          <p:cNvSpPr/>
-          <p:nvPr/>
-        </p:nvSpPr>
-        <p:spPr>
-          <a:xfrm>
-            <a:off x="3794760" y="2331720"/>
-            <a:ext cx="411480" cy="365760"/>
-          </a:xfrm>
-          <a:prstGeom prst="rightArrow">
-            <a:avLst/>
-          </a:prstGeom>
-          <a:solidFill>
-            <a:srgbClr val="6B7280"/>
-          </a:solidFill>
-          <a:ln>
-            <a:noFill/>
-          </a:ln>
-          <a:effectLst/>
-        </p:spPr>
-        <p:style>
-          <a:lnRef idx="1">
-            <a:schemeClr val="accent1"/>
-          </a:lnRef>
-          <a:fillRef idx="3">
-            <a:schemeClr val="accent1"/>
-          </a:fillRef>
-          <a:effectRef idx="2">
-            <a:schemeClr val="accent1"/>
-          </a:effectRef>
-          <a:fontRef idx="minor">
-            <a:schemeClr val="lt1"/>
-          </a:fontRef>
-        </p:style>
-        <p:txBody>
-          <a:bodyPr rtlCol="0" anchor="ctr"/>
-          <a:lstStyle/>
-          <a:p>
-            <a:pPr algn="ctr"/>
-          </a:p>
-        </p:txBody>
-      </p:sp>
-      <p:sp>
-        <p:nvSpPr>
-          <p:cNvPr id="11" name="Right Arrow 10"/>
-          <p:cNvSpPr/>
-          <p:nvPr/>
-        </p:nvSpPr>
-        <p:spPr>
-          <a:xfrm>
-            <a:off x="7498080" y="2331720"/>
-            <a:ext cx="411480" cy="365760"/>
-          </a:xfrm>
-          <a:prstGeom prst="rightArrow">
-            <a:avLst/>
-          </a:prstGeom>
-          <a:solidFill>
-            <a:srgbClr val="6B7280"/>
-          </a:solidFill>
-          <a:ln>
-            <a:noFill/>
-          </a:ln>
-          <a:effectLst/>
-        </p:spPr>
-        <p:style>
-          <a:lnRef idx="1">
-            <a:schemeClr val="accent1"/>
-          </a:lnRef>
-          <a:fillRef idx="3">
-            <a:schemeClr val="accent1"/>
-          </a:fillRef>
-          <a:effectRef idx="2">
-            <a:schemeClr val="accent1"/>
-          </a:effectRef>
-          <a:fontRef idx="minor">
-            <a:schemeClr val="lt1"/>
-          </a:fontRef>
-        </p:style>
-        <p:txBody>
-          <a:bodyPr rtlCol="0" anchor="ctr"/>
-          <a:lstStyle/>
-          <a:p>
-            <a:pPr algn="ctr"/>
-          </a:p>
-        </p:txBody>
-      </p:sp>
-      <p:sp>
-        <p:nvSpPr>
-          <p:cNvPr id="12" name="TextBox 11"/>
+          </a:p>
+        </p:txBody>
+      </p:sp>
+      <p:sp>
+        <p:nvSpPr>
+          <p:cNvPr id="17" name="TextBox 16"/>
           <p:cNvSpPr txBox="1"/>
           <p:nvPr/>
         </p:nvSpPr>
         <p:spPr>
           <a:xfrm>
-            <a:off x="502920" y="3657600"/>
-            <a:ext cx="11155680" cy="365760"/>
+            <a:off x="8001000" y="1691640"/>
+            <a:ext cx="3246120" cy="457200"/>
           </a:xfrm>
           <a:prstGeom prst="rect">
             <a:avLst/>
@@ -6533,29 +8802,29 @@
           </a:bodyPr>
           <a:lstStyle/>
           <a:p>
-            <a:pPr algn="l"/>
-            <a:r>
-              <a:rPr sz="1400" b="0" i="1">
-                <a:solidFill>
-                  <a:srgbClr val="6B7280"/>
+            <a:pPr algn="ctr"/>
+            <a:r>
+              <a:rPr sz="1600" b="1" i="0">
+                <a:solidFill>
+                  <a:srgbClr val="FFFFFF"/>
                 </a:solidFill>
                 <a:latin typeface="Calibri"/>
               </a:rPr>
-              <a:t>Each stage validated against the previous before moving on:</a:t>
-            </a:r>
-          </a:p>
-        </p:txBody>
-      </p:sp>
-      <p:sp>
-        <p:nvSpPr>
-          <p:cNvPr id="13" name="TextBox 12"/>
+              <a:t>Mondrian CP</a:t>
+            </a:r>
+          </a:p>
+        </p:txBody>
+      </p:sp>
+      <p:sp>
+        <p:nvSpPr>
+          <p:cNvPr id="18" name="TextBox 17"/>
           <p:cNvSpPr txBox="1"/>
           <p:nvPr/>
         </p:nvSpPr>
         <p:spPr>
           <a:xfrm>
-            <a:off x="640080" y="4069080"/>
-            <a:ext cx="10698480" cy="2194560"/>
+            <a:off x="8092440" y="2423160"/>
+            <a:ext cx="3063240" cy="3200400"/>
           </a:xfrm>
           <a:prstGeom prst="rect">
             <a:avLst/>
@@ -6563,56 +8832,20 @@
           <a:noFill/>
         </p:spPr>
         <p:txBody>
-          <a:bodyPr wrap="square">
+          <a:bodyPr wrap="square" anchor="t" lIns="0" rIns="0" tIns="0" bIns="0">
             <a:spAutoFit/>
           </a:bodyPr>
           <a:lstStyle/>
           <a:p>
-            <a:pPr>
-              <a:spcAft>
-                <a:spcPts val="1000"/>
-              </a:spcAft>
-            </a:pPr>
-            <a:r>
-              <a:rPr sz="1500">
+            <a:pPr algn="l"/>
+            <a:r>
+              <a:rPr sz="1350" b="0" i="0">
                 <a:solidFill>
                   <a:srgbClr val="1F2937"/>
                 </a:solidFill>
                 <a:latin typeface="Calibri"/>
               </a:rPr>
-              <a:t>•  DES output validated against real aggregated ED statistics before being trusted as a data source.</a:t>
-            </a:r>
-          </a:p>
-          <a:p>
-            <a:pPr>
-              <a:spcAft>
-                <a:spcPts val="1000"/>
-              </a:spcAft>
-            </a:pPr>
-            <a:r>
-              <a:rPr sz="1500">
-                <a:solidFill>
-                  <a:srgbClr val="1F2937"/>
-                </a:solidFill>
-                <a:latin typeface="Calibri"/>
-              </a:rPr>
-              <a:t>•  Surrogate accuracy validated against DES outputs held out from training.</a:t>
-            </a:r>
-          </a:p>
-          <a:p>
-            <a:pPr>
-              <a:spcAft>
-                <a:spcPts val="1000"/>
-              </a:spcAft>
-            </a:pPr>
-            <a:r>
-              <a:rPr sz="1500">
-                <a:solidFill>
-                  <a:srgbClr val="1F2937"/>
-                </a:solidFill>
-                <a:latin typeface="Calibri"/>
-              </a:rPr>
-              <a:t>•  Every UQ method evaluated on the same test data and the same target coverage level, so results are directly comparable across methods.</a:t>
+              <a:t>Calibrates a separate interval width per category (e.g. staffing level x arrival-rate regime) instead of one pooled value — targets conditional coverage, addressing Gap 1 directly.</a:t>
             </a:r>
           </a:p>
         </p:txBody>
@@ -6709,7 +8942,7 @@
                 </a:solidFill>
                 <a:latin typeface="Calibri"/>
               </a:rPr>
-              <a:t>PLAN</a:t>
+              <a:t>PRELIMINARY</a:t>
             </a:r>
           </a:p>
         </p:txBody>
@@ -6744,7 +8977,7 @@
                 </a:solidFill>
                 <a:latin typeface="Calibri"/>
               </a:rPr>
-              <a:t>Project Roadmap</a:t>
+              <a:t>Results</a:t>
             </a:r>
           </a:p>
         </p:txBody>
@@ -6823,101 +9056,699 @@
                 </a:solidFill>
                 <a:latin typeface="Calibri"/>
               </a:rPr>
-              <a:t>9 / 9</a:t>
-            </a:r>
-          </a:p>
-        </p:txBody>
-      </p:sp>
-      <p:sp>
-        <p:nvSpPr>
-          <p:cNvPr id="7" name="Rectangle 6"/>
-          <p:cNvSpPr/>
-          <p:nvPr/>
-        </p:nvSpPr>
-        <p:spPr>
-          <a:xfrm>
-            <a:off x="640080" y="1508760"/>
-            <a:ext cx="5257800" cy="4572000"/>
-          </a:xfrm>
-          <a:prstGeom prst="rect">
-            <a:avLst/>
-          </a:prstGeom>
-          <a:solidFill>
-            <a:srgbClr val="FFFFFF"/>
-          </a:solidFill>
-          <a:ln w="9525">
-            <a:solidFill>
-              <a:srgbClr val="E2E8F0"/>
-            </a:solidFill>
-          </a:ln>
-          <a:effectLst/>
-        </p:spPr>
-        <p:style>
-          <a:lnRef idx="1">
-            <a:schemeClr val="accent1"/>
-          </a:lnRef>
-          <a:fillRef idx="3">
-            <a:schemeClr val="accent1"/>
-          </a:fillRef>
-          <a:effectRef idx="2">
-            <a:schemeClr val="accent1"/>
-          </a:effectRef>
-          <a:fontRef idx="minor">
-            <a:schemeClr val="lt1"/>
-          </a:fontRef>
-        </p:style>
-        <p:txBody>
-          <a:bodyPr rtlCol="0" anchor="ctr"/>
-          <a:lstStyle/>
-          <a:p>
-            <a:pPr algn="ctr"/>
-          </a:p>
-        </p:txBody>
-      </p:sp>
-      <p:sp>
-        <p:nvSpPr>
-          <p:cNvPr id="8" name="Rectangle 7"/>
-          <p:cNvSpPr/>
-          <p:nvPr/>
-        </p:nvSpPr>
-        <p:spPr>
-          <a:xfrm>
-            <a:off x="640080" y="1508760"/>
-            <a:ext cx="5257800" cy="502920"/>
-          </a:xfrm>
-          <a:prstGeom prst="rect">
-            <a:avLst/>
-          </a:prstGeom>
-          <a:solidFill>
-            <a:srgbClr val="1E40AF"/>
-          </a:solidFill>
-          <a:ln>
-            <a:noFill/>
-          </a:ln>
-          <a:effectLst/>
-        </p:spPr>
-        <p:style>
-          <a:lnRef idx="1">
-            <a:schemeClr val="accent1"/>
-          </a:lnRef>
-          <a:fillRef idx="3">
-            <a:schemeClr val="accent1"/>
-          </a:fillRef>
-          <a:effectRef idx="2">
-            <a:schemeClr val="accent1"/>
-          </a:effectRef>
-          <a:fontRef idx="minor">
-            <a:schemeClr val="lt1"/>
-          </a:fontRef>
-        </p:style>
-        <p:txBody>
-          <a:bodyPr rtlCol="0" anchor="ctr"/>
-          <a:lstStyle/>
-          <a:p>
-            <a:pPr algn="ctr"/>
-          </a:p>
-        </p:txBody>
-      </p:sp>
+              <a:t>9 / 12</a:t>
+            </a:r>
+          </a:p>
+        </p:txBody>
+      </p:sp>
+      <p:graphicFrame>
+        <p:nvGraphicFramePr>
+          <p:cNvPr id="7" name="Table 6"/>
+          <p:cNvGraphicFramePr>
+            <a:graphicFrameLocks noGrp="1"/>
+          </p:cNvGraphicFramePr>
+          <p:nvPr/>
+        </p:nvGraphicFramePr>
+        <p:xfrm>
+          <a:off x="640080" y="1554480"/>
+          <a:ext cx="10881360" cy="1371600"/>
+        </p:xfrm>
+        <a:graphic>
+          <a:graphicData uri="http://schemas.openxmlformats.org/drawingml/2006/table">
+            <a:tbl>
+              <a:tblPr firstRow="1" bandRow="1">
+                <a:tableStyleId>{5C22544A-7EE6-4342-B048-85BDC9FD1C3A}</a:tableStyleId>
+              </a:tblPr>
+              <a:tblGrid>
+                <a:gridCol w="7772400"/>
+                <a:gridCol w="3108960"/>
+              </a:tblGrid>
+              <a:tr h="342900">
+                <a:tc>
+                  <a:txBody>
+                    <a:bodyPr/>
+                    <a:lstStyle/>
+                    <a:p>
+                      <a:pPr algn="l"/>
+                      <a:r>
+                        <a:rPr sz="1400" b="1">
+                          <a:solidFill>
+                            <a:srgbClr val="FFFFFF"/>
+                          </a:solidFill>
+                        </a:rPr>
+                        <a:t>DES Validation (200 simulated days)</a:t>
+                      </a:r>
+                    </a:p>
+                  </a:txBody>
+                  <a:tcPr anchor="ctr" marT="50800" marB="50800">
+                    <a:solidFill>
+                      <a:srgbClr val="1E40AF"/>
+                    </a:solidFill>
+                  </a:tcPr>
+                </a:tc>
+                <a:tc>
+                  <a:txBody>
+                    <a:bodyPr/>
+                    <a:lstStyle/>
+                    <a:p>
+                      <a:pPr algn="ctr"/>
+                      <a:r>
+                        <a:rPr sz="1400" b="1">
+                          <a:solidFill>
+                            <a:srgbClr val="FFFFFF"/>
+                          </a:solidFill>
+                        </a:rPr>
+                        <a:t>Value</a:t>
+                      </a:r>
+                    </a:p>
+                  </a:txBody>
+                  <a:tcPr anchor="ctr" marT="50800" marB="50800">
+                    <a:solidFill>
+                      <a:srgbClr val="1E40AF"/>
+                    </a:solidFill>
+                  </a:tcPr>
+                </a:tc>
+              </a:tr>
+              <a:tr h="342900">
+                <a:tc>
+                  <a:txBody>
+                    <a:bodyPr/>
+                    <a:lstStyle/>
+                    <a:p>
+                      <a:pPr algn="l"/>
+                      <a:r>
+                        <a:rPr sz="1400">
+                          <a:solidFill>
+                            <a:srgbClr val="1F2937"/>
+                          </a:solidFill>
+                        </a:rPr>
+                        <a:t>Real visits/day (Dept. A)</a:t>
+                      </a:r>
+                    </a:p>
+                  </a:txBody>
+                  <a:tcPr anchor="ctr" marT="50800" marB="50800">
+                    <a:solidFill>
+                      <a:srgbClr val="F8FAFC"/>
+                    </a:solidFill>
+                  </a:tcPr>
+                </a:tc>
+                <a:tc>
+                  <a:txBody>
+                    <a:bodyPr/>
+                    <a:lstStyle/>
+                    <a:p>
+                      <a:pPr algn="ctr"/>
+                      <a:r>
+                        <a:rPr sz="1400">
+                          <a:solidFill>
+                            <a:srgbClr val="1F2937"/>
+                          </a:solidFill>
+                        </a:rPr>
+                        <a:t>258.2</a:t>
+                      </a:r>
+                    </a:p>
+                  </a:txBody>
+                  <a:tcPr anchor="ctr" marT="50800" marB="50800">
+                    <a:solidFill>
+                      <a:srgbClr val="F8FAFC"/>
+                    </a:solidFill>
+                  </a:tcPr>
+                </a:tc>
+              </a:tr>
+              <a:tr h="342900">
+                <a:tc>
+                  <a:txBody>
+                    <a:bodyPr/>
+                    <a:lstStyle/>
+                    <a:p>
+                      <a:pPr algn="l"/>
+                      <a:r>
+                        <a:rPr sz="1400">
+                          <a:solidFill>
+                            <a:srgbClr val="1F2937"/>
+                          </a:solidFill>
+                        </a:rPr>
+                        <a:t>Simulated mean visits/day</a:t>
+                      </a:r>
+                    </a:p>
+                  </a:txBody>
+                  <a:tcPr anchor="ctr" marT="50800" marB="50800">
+                    <a:solidFill>
+                      <a:srgbClr val="FFFFFF"/>
+                    </a:solidFill>
+                  </a:tcPr>
+                </a:tc>
+                <a:tc>
+                  <a:txBody>
+                    <a:bodyPr/>
+                    <a:lstStyle/>
+                    <a:p>
+                      <a:pPr algn="ctr"/>
+                      <a:r>
+                        <a:rPr sz="1400">
+                          <a:solidFill>
+                            <a:srgbClr val="1F2937"/>
+                          </a:solidFill>
+                        </a:rPr>
+                        <a:t>235.1</a:t>
+                      </a:r>
+                    </a:p>
+                  </a:txBody>
+                  <a:tcPr anchor="ctr" marT="50800" marB="50800">
+                    <a:solidFill>
+                      <a:srgbClr val="FFFFFF"/>
+                    </a:solidFill>
+                  </a:tcPr>
+                </a:tc>
+              </a:tr>
+              <a:tr h="342900">
+                <a:tc>
+                  <a:txBody>
+                    <a:bodyPr/>
+                    <a:lstStyle/>
+                    <a:p>
+                      <a:pPr algn="l"/>
+                      <a:r>
+                        <a:rPr sz="1400">
+                          <a:solidFill>
+                            <a:srgbClr val="1F2937"/>
+                          </a:solidFill>
+                        </a:rPr>
+                        <a:t>Match to real data</a:t>
+                      </a:r>
+                    </a:p>
+                  </a:txBody>
+                  <a:tcPr anchor="ctr" marT="50800" marB="50800">
+                    <a:solidFill>
+                      <a:srgbClr val="F8FAFC"/>
+                    </a:solidFill>
+                  </a:tcPr>
+                </a:tc>
+                <a:tc>
+                  <a:txBody>
+                    <a:bodyPr/>
+                    <a:lstStyle/>
+                    <a:p>
+                      <a:pPr algn="ctr"/>
+                      <a:r>
+                        <a:rPr sz="1400">
+                          <a:solidFill>
+                            <a:srgbClr val="1F2937"/>
+                          </a:solidFill>
+                        </a:rPr>
+                        <a:t>91.0%</a:t>
+                      </a:r>
+                    </a:p>
+                  </a:txBody>
+                  <a:tcPr anchor="ctr" marT="50800" marB="50800">
+                    <a:solidFill>
+                      <a:srgbClr val="F8FAFC"/>
+                    </a:solidFill>
+                  </a:tcPr>
+                </a:tc>
+              </a:tr>
+            </a:tbl>
+          </a:graphicData>
+        </a:graphic>
+      </p:graphicFrame>
+      <p:graphicFrame>
+        <p:nvGraphicFramePr>
+          <p:cNvPr id="8" name="Table 7"/>
+          <p:cNvGraphicFramePr>
+            <a:graphicFrameLocks noGrp="1"/>
+          </p:cNvGraphicFramePr>
+          <p:nvPr/>
+        </p:nvGraphicFramePr>
+        <p:xfrm>
+          <a:off x="640080" y="3246120"/>
+          <a:ext cx="10881360" cy="1828800"/>
+        </p:xfrm>
+        <a:graphic>
+          <a:graphicData uri="http://schemas.openxmlformats.org/drawingml/2006/table">
+            <a:tbl>
+              <a:tblPr firstRow="1" bandRow="1">
+                <a:tableStyleId>{5C22544A-7EE6-4342-B048-85BDC9FD1C3A}</a:tableStyleId>
+              </a:tblPr>
+              <a:tblGrid>
+                <a:gridCol w="3566160"/>
+                <a:gridCol w="2468880"/>
+                <a:gridCol w="2468880"/>
+                <a:gridCol w="2377440"/>
+              </a:tblGrid>
+              <a:tr h="365760">
+                <a:tc>
+                  <a:txBody>
+                    <a:bodyPr/>
+                    <a:lstStyle/>
+                    <a:p>
+                      <a:pPr algn="l"/>
+                      <a:r>
+                        <a:rPr sz="1300" b="1">
+                          <a:solidFill>
+                            <a:srgbClr val="FFFFFF"/>
+                          </a:solidFill>
+                        </a:rPr>
+                        <a:t>Surrogate Target</a:t>
+                      </a:r>
+                    </a:p>
+                  </a:txBody>
+                  <a:tcPr anchor="ctr" marT="50800" marB="50800">
+                    <a:solidFill>
+                      <a:srgbClr val="1E40AF"/>
+                    </a:solidFill>
+                  </a:tcPr>
+                </a:tc>
+                <a:tc>
+                  <a:txBody>
+                    <a:bodyPr/>
+                    <a:lstStyle/>
+                    <a:p>
+                      <a:pPr algn="ctr"/>
+                      <a:r>
+                        <a:rPr sz="1300" b="1">
+                          <a:solidFill>
+                            <a:srgbClr val="FFFFFF"/>
+                          </a:solidFill>
+                        </a:rPr>
+                        <a:t>MAE</a:t>
+                      </a:r>
+                    </a:p>
+                  </a:txBody>
+                  <a:tcPr anchor="ctr" marT="50800" marB="50800">
+                    <a:solidFill>
+                      <a:srgbClr val="1E40AF"/>
+                    </a:solidFill>
+                  </a:tcPr>
+                </a:tc>
+                <a:tc>
+                  <a:txBody>
+                    <a:bodyPr/>
+                    <a:lstStyle/>
+                    <a:p>
+                      <a:pPr algn="ctr"/>
+                      <a:r>
+                        <a:rPr sz="1300" b="1">
+                          <a:solidFill>
+                            <a:srgbClr val="FFFFFF"/>
+                          </a:solidFill>
+                        </a:rPr>
+                        <a:t>RMSE</a:t>
+                      </a:r>
+                    </a:p>
+                  </a:txBody>
+                  <a:tcPr anchor="ctr" marT="50800" marB="50800">
+                    <a:solidFill>
+                      <a:srgbClr val="1E40AF"/>
+                    </a:solidFill>
+                  </a:tcPr>
+                </a:tc>
+                <a:tc>
+                  <a:txBody>
+                    <a:bodyPr/>
+                    <a:lstStyle/>
+                    <a:p>
+                      <a:pPr algn="ctr"/>
+                      <a:r>
+                        <a:rPr sz="1300" b="1">
+                          <a:solidFill>
+                            <a:srgbClr val="FFFFFF"/>
+                          </a:solidFill>
+                        </a:rPr>
+                        <a:t>R²</a:t>
+                      </a:r>
+                    </a:p>
+                  </a:txBody>
+                  <a:tcPr anchor="ctr" marT="50800" marB="50800">
+                    <a:solidFill>
+                      <a:srgbClr val="1E40AF"/>
+                    </a:solidFill>
+                  </a:tcPr>
+                </a:tc>
+              </a:tr>
+              <a:tr h="365760">
+                <a:tc>
+                  <a:txBody>
+                    <a:bodyPr/>
+                    <a:lstStyle/>
+                    <a:p>
+                      <a:pPr algn="l"/>
+                      <a:r>
+                        <a:rPr sz="1300">
+                          <a:solidFill>
+                            <a:srgbClr val="1F2937"/>
+                          </a:solidFill>
+                        </a:rPr>
+                        <a:t>n_patients</a:t>
+                      </a:r>
+                    </a:p>
+                  </a:txBody>
+                  <a:tcPr anchor="ctr" marT="50800" marB="50800">
+                    <a:solidFill>
+                      <a:srgbClr val="F8FAFC"/>
+                    </a:solidFill>
+                  </a:tcPr>
+                </a:tc>
+                <a:tc>
+                  <a:txBody>
+                    <a:bodyPr/>
+                    <a:lstStyle/>
+                    <a:p>
+                      <a:pPr algn="ctr"/>
+                      <a:r>
+                        <a:rPr sz="1300">
+                          <a:solidFill>
+                            <a:srgbClr val="1F2937"/>
+                          </a:solidFill>
+                        </a:rPr>
+                        <a:t>9.90</a:t>
+                      </a:r>
+                    </a:p>
+                  </a:txBody>
+                  <a:tcPr anchor="ctr" marT="50800" marB="50800">
+                    <a:solidFill>
+                      <a:srgbClr val="F8FAFC"/>
+                    </a:solidFill>
+                  </a:tcPr>
+                </a:tc>
+                <a:tc>
+                  <a:txBody>
+                    <a:bodyPr/>
+                    <a:lstStyle/>
+                    <a:p>
+                      <a:pPr algn="ctr"/>
+                      <a:r>
+                        <a:rPr sz="1300">
+                          <a:solidFill>
+                            <a:srgbClr val="1F2937"/>
+                          </a:solidFill>
+                        </a:rPr>
+                        <a:t>12.59</a:t>
+                      </a:r>
+                    </a:p>
+                  </a:txBody>
+                  <a:tcPr anchor="ctr" marT="50800" marB="50800">
+                    <a:solidFill>
+                      <a:srgbClr val="F8FAFC"/>
+                    </a:solidFill>
+                  </a:tcPr>
+                </a:tc>
+                <a:tc>
+                  <a:txBody>
+                    <a:bodyPr/>
+                    <a:lstStyle/>
+                    <a:p>
+                      <a:pPr algn="ctr"/>
+                      <a:r>
+                        <a:rPr sz="1300">
+                          <a:solidFill>
+                            <a:srgbClr val="1F2937"/>
+                          </a:solidFill>
+                        </a:rPr>
+                        <a:t>0.929</a:t>
+                      </a:r>
+                    </a:p>
+                  </a:txBody>
+                  <a:tcPr anchor="ctr" marT="50800" marB="50800">
+                    <a:solidFill>
+                      <a:srgbClr val="F8FAFC"/>
+                    </a:solidFill>
+                  </a:tcPr>
+                </a:tc>
+              </a:tr>
+              <a:tr h="365760">
+                <a:tc>
+                  <a:txBody>
+                    <a:bodyPr/>
+                    <a:lstStyle/>
+                    <a:p>
+                      <a:pPr algn="l"/>
+                      <a:r>
+                        <a:rPr sz="1300">
+                          <a:solidFill>
+                            <a:srgbClr val="1F2937"/>
+                          </a:solidFill>
+                        </a:rPr>
+                        <a:t>mean_wait_minutes</a:t>
+                      </a:r>
+                    </a:p>
+                  </a:txBody>
+                  <a:tcPr anchor="ctr" marT="50800" marB="50800">
+                    <a:solidFill>
+                      <a:srgbClr val="FFFFFF"/>
+                    </a:solidFill>
+                  </a:tcPr>
+                </a:tc>
+                <a:tc>
+                  <a:txBody>
+                    <a:bodyPr/>
+                    <a:lstStyle/>
+                    <a:p>
+                      <a:pPr algn="ctr"/>
+                      <a:r>
+                        <a:rPr sz="1300">
+                          <a:solidFill>
+                            <a:srgbClr val="1F2937"/>
+                          </a:solidFill>
+                        </a:rPr>
+                        <a:t>8.86</a:t>
+                      </a:r>
+                    </a:p>
+                  </a:txBody>
+                  <a:tcPr anchor="ctr" marT="50800" marB="50800">
+                    <a:solidFill>
+                      <a:srgbClr val="FFFFFF"/>
+                    </a:solidFill>
+                  </a:tcPr>
+                </a:tc>
+                <a:tc>
+                  <a:txBody>
+                    <a:bodyPr/>
+                    <a:lstStyle/>
+                    <a:p>
+                      <a:pPr algn="ctr"/>
+                      <a:r>
+                        <a:rPr sz="1300">
+                          <a:solidFill>
+                            <a:srgbClr val="1F2937"/>
+                          </a:solidFill>
+                        </a:rPr>
+                        <a:t>13.23</a:t>
+                      </a:r>
+                    </a:p>
+                  </a:txBody>
+                  <a:tcPr anchor="ctr" marT="50800" marB="50800">
+                    <a:solidFill>
+                      <a:srgbClr val="FFFFFF"/>
+                    </a:solidFill>
+                  </a:tcPr>
+                </a:tc>
+                <a:tc>
+                  <a:txBody>
+                    <a:bodyPr/>
+                    <a:lstStyle/>
+                    <a:p>
+                      <a:pPr algn="ctr"/>
+                      <a:r>
+                        <a:rPr sz="1300">
+                          <a:solidFill>
+                            <a:srgbClr val="1F2937"/>
+                          </a:solidFill>
+                        </a:rPr>
+                        <a:t>0.787</a:t>
+                      </a:r>
+                    </a:p>
+                  </a:txBody>
+                  <a:tcPr anchor="ctr" marT="50800" marB="50800">
+                    <a:solidFill>
+                      <a:srgbClr val="FFFFFF"/>
+                    </a:solidFill>
+                  </a:tcPr>
+                </a:tc>
+              </a:tr>
+              <a:tr h="365760">
+                <a:tc>
+                  <a:txBody>
+                    <a:bodyPr/>
+                    <a:lstStyle/>
+                    <a:p>
+                      <a:pPr algn="l"/>
+                      <a:r>
+                        <a:rPr sz="1300">
+                          <a:solidFill>
+                            <a:srgbClr val="1F2937"/>
+                          </a:solidFill>
+                        </a:rPr>
+                        <a:t>mean_total_minutes</a:t>
+                      </a:r>
+                    </a:p>
+                  </a:txBody>
+                  <a:tcPr anchor="ctr" marT="50800" marB="50800">
+                    <a:solidFill>
+                      <a:srgbClr val="F8FAFC"/>
+                    </a:solidFill>
+                  </a:tcPr>
+                </a:tc>
+                <a:tc>
+                  <a:txBody>
+                    <a:bodyPr/>
+                    <a:lstStyle/>
+                    <a:p>
+                      <a:pPr algn="ctr"/>
+                      <a:r>
+                        <a:rPr sz="1300">
+                          <a:solidFill>
+                            <a:srgbClr val="1F2937"/>
+                          </a:solidFill>
+                        </a:rPr>
+                        <a:t>9.88</a:t>
+                      </a:r>
+                    </a:p>
+                  </a:txBody>
+                  <a:tcPr anchor="ctr" marT="50800" marB="50800">
+                    <a:solidFill>
+                      <a:srgbClr val="F8FAFC"/>
+                    </a:solidFill>
+                  </a:tcPr>
+                </a:tc>
+                <a:tc>
+                  <a:txBody>
+                    <a:bodyPr/>
+                    <a:lstStyle/>
+                    <a:p>
+                      <a:pPr algn="ctr"/>
+                      <a:r>
+                        <a:rPr sz="1300">
+                          <a:solidFill>
+                            <a:srgbClr val="1F2937"/>
+                          </a:solidFill>
+                        </a:rPr>
+                        <a:t>13.61</a:t>
+                      </a:r>
+                    </a:p>
+                  </a:txBody>
+                  <a:tcPr anchor="ctr" marT="50800" marB="50800">
+                    <a:solidFill>
+                      <a:srgbClr val="F8FAFC"/>
+                    </a:solidFill>
+                  </a:tcPr>
+                </a:tc>
+                <a:tc>
+                  <a:txBody>
+                    <a:bodyPr/>
+                    <a:lstStyle/>
+                    <a:p>
+                      <a:pPr algn="ctr"/>
+                      <a:r>
+                        <a:rPr sz="1300">
+                          <a:solidFill>
+                            <a:srgbClr val="1F2937"/>
+                          </a:solidFill>
+                        </a:rPr>
+                        <a:t>0.762</a:t>
+                      </a:r>
+                    </a:p>
+                  </a:txBody>
+                  <a:tcPr anchor="ctr" marT="50800" marB="50800">
+                    <a:solidFill>
+                      <a:srgbClr val="F8FAFC"/>
+                    </a:solidFill>
+                  </a:tcPr>
+                </a:tc>
+              </a:tr>
+              <a:tr h="365760">
+                <a:tc>
+                  <a:txBody>
+                    <a:bodyPr/>
+                    <a:lstStyle/>
+                    <a:p>
+                      <a:pPr algn="l"/>
+                      <a:r>
+                        <a:rPr sz="1300">
+                          <a:solidFill>
+                            <a:srgbClr val="1F2937"/>
+                          </a:solidFill>
+                        </a:rPr>
+                        <a:t>p95_wait_minutes</a:t>
+                      </a:r>
+                    </a:p>
+                  </a:txBody>
+                  <a:tcPr anchor="ctr" marT="50800" marB="50800">
+                    <a:solidFill>
+                      <a:srgbClr val="FFFFFF"/>
+                    </a:solidFill>
+                  </a:tcPr>
+                </a:tc>
+                <a:tc>
+                  <a:txBody>
+                    <a:bodyPr/>
+                    <a:lstStyle/>
+                    <a:p>
+                      <a:pPr algn="ctr"/>
+                      <a:r>
+                        <a:rPr sz="1300">
+                          <a:solidFill>
+                            <a:srgbClr val="1F2937"/>
+                          </a:solidFill>
+                        </a:rPr>
+                        <a:t>66.94</a:t>
+                      </a:r>
+                    </a:p>
+                  </a:txBody>
+                  <a:tcPr anchor="ctr" marT="50800" marB="50800">
+                    <a:solidFill>
+                      <a:srgbClr val="FFFFFF"/>
+                    </a:solidFill>
+                  </a:tcPr>
+                </a:tc>
+                <a:tc>
+                  <a:txBody>
+                    <a:bodyPr/>
+                    <a:lstStyle/>
+                    <a:p>
+                      <a:pPr algn="ctr"/>
+                      <a:r>
+                        <a:rPr sz="1300">
+                          <a:solidFill>
+                            <a:srgbClr val="1F2937"/>
+                          </a:solidFill>
+                        </a:rPr>
+                        <a:t>102.47</a:t>
+                      </a:r>
+                    </a:p>
+                  </a:txBody>
+                  <a:tcPr anchor="ctr" marT="50800" marB="50800">
+                    <a:solidFill>
+                      <a:srgbClr val="FFFFFF"/>
+                    </a:solidFill>
+                  </a:tcPr>
+                </a:tc>
+                <a:tc>
+                  <a:txBody>
+                    <a:bodyPr/>
+                    <a:lstStyle/>
+                    <a:p>
+                      <a:pPr algn="ctr"/>
+                      <a:r>
+                        <a:rPr sz="1300">
+                          <a:solidFill>
+                            <a:srgbClr val="1F2937"/>
+                          </a:solidFill>
+                        </a:rPr>
+                        <a:t>0.647</a:t>
+                      </a:r>
+                    </a:p>
+                  </a:txBody>
+                  <a:tcPr anchor="ctr" marT="50800" marB="50800">
+                    <a:solidFill>
+                      <a:srgbClr val="FFFFFF"/>
+                    </a:solidFill>
+                  </a:tcPr>
+                </a:tc>
+              </a:tr>
+            </a:tbl>
+          </a:graphicData>
+        </a:graphic>
+      </p:graphicFrame>
       <p:sp>
         <p:nvSpPr>
           <p:cNvPr id="9" name="TextBox 8"/>
@@ -6926,8 +9757,8 @@
         </p:nvSpPr>
         <p:spPr>
           <a:xfrm>
-            <a:off x="868680" y="1618488"/>
-            <a:ext cx="4800600" cy="365760"/>
+            <a:off x="640080" y="5349240"/>
+            <a:ext cx="10881360" cy="822960"/>
           </a:xfrm>
           <a:prstGeom prst="rect">
             <a:avLst/>
@@ -6942,344 +9773,13 @@
           <a:p>
             <a:pPr algn="l"/>
             <a:r>
-              <a:rPr sz="1500" b="1" i="0">
-                <a:solidFill>
-                  <a:srgbClr val="FFFFFF"/>
+              <a:rPr sz="1400" b="0" i="1">
+                <a:solidFill>
+                  <a:srgbClr val="6B7280"/>
                 </a:solidFill>
                 <a:latin typeface="Calibri"/>
               </a:rPr>
-              <a:t>Phase 1 — Mid-Semester</a:t>
-            </a:r>
-          </a:p>
-        </p:txBody>
-      </p:sp>
-      <p:sp>
-        <p:nvSpPr>
-          <p:cNvPr id="10" name="TextBox 9"/>
-          <p:cNvSpPr txBox="1"/>
-          <p:nvPr/>
-        </p:nvSpPr>
-        <p:spPr>
-          <a:xfrm>
-            <a:off x="868680" y="2194560"/>
-            <a:ext cx="4800600" cy="3749039"/>
-          </a:xfrm>
-          <a:prstGeom prst="rect">
-            <a:avLst/>
-          </a:prstGeom>
-          <a:noFill/>
-        </p:spPr>
-        <p:txBody>
-          <a:bodyPr wrap="square">
-            <a:spAutoFit/>
-          </a:bodyPr>
-          <a:lstStyle/>
-          <a:p>
-            <a:pPr>
-              <a:spcAft>
-                <a:spcPts val="1300"/>
-              </a:spcAft>
-            </a:pPr>
-            <a:r>
-              <a:rPr sz="1400">
-                <a:solidFill>
-                  <a:srgbClr val="1F2937"/>
-                </a:solidFill>
-                <a:latin typeface="Calibri"/>
-              </a:rPr>
-              <a:t>•  Literature review + environment setup</a:t>
-            </a:r>
-          </a:p>
-          <a:p>
-            <a:pPr>
-              <a:spcAft>
-                <a:spcPts val="1300"/>
-              </a:spcAft>
-            </a:pPr>
-            <a:r>
-              <a:rPr sz="1400">
-                <a:solidFill>
-                  <a:srgbClr val="1F2937"/>
-                </a:solidFill>
-                <a:latin typeface="Calibri"/>
-              </a:rPr>
-              <a:t>•  Explore real hospital dataset, extract calibration distributions</a:t>
-            </a:r>
-          </a:p>
-          <a:p>
-            <a:pPr>
-              <a:spcAft>
-                <a:spcPts val="1300"/>
-              </a:spcAft>
-            </a:pPr>
-            <a:r>
-              <a:rPr sz="1400">
-                <a:solidFill>
-                  <a:srgbClr val="1F2937"/>
-                </a:solidFill>
-                <a:latin typeface="Calibri"/>
-              </a:rPr>
-              <a:t>•  Build and validate the discrete-event ER simulation</a:t>
-            </a:r>
-          </a:p>
-          <a:p>
-            <a:pPr>
-              <a:spcAft>
-                <a:spcPts val="1300"/>
-              </a:spcAft>
-            </a:pPr>
-            <a:r>
-              <a:rPr sz="1400">
-                <a:solidFill>
-                  <a:srgbClr val="1F2937"/>
-                </a:solidFill>
-                <a:latin typeface="Calibri"/>
-              </a:rPr>
-              <a:t>•  Generate training data and train the surrogate model</a:t>
-            </a:r>
-          </a:p>
-          <a:p>
-            <a:pPr>
-              <a:spcAft>
-                <a:spcPts val="1300"/>
-              </a:spcAft>
-            </a:pPr>
-            <a:r>
-              <a:rPr sz="1400">
-                <a:solidFill>
-                  <a:srgbClr val="1F2937"/>
-                </a:solidFill>
-                <a:latin typeface="Calibri"/>
-              </a:rPr>
-              <a:t>•  Implement Gaussian Process baseline for UQ</a:t>
-            </a:r>
-          </a:p>
-        </p:txBody>
-      </p:sp>
-      <p:sp>
-        <p:nvSpPr>
-          <p:cNvPr id="11" name="Rectangle 10"/>
-          <p:cNvSpPr/>
-          <p:nvPr/>
-        </p:nvSpPr>
-        <p:spPr>
-          <a:xfrm>
-            <a:off x="6309360" y="1508760"/>
-            <a:ext cx="5257800" cy="4572000"/>
-          </a:xfrm>
-          <a:prstGeom prst="rect">
-            <a:avLst/>
-          </a:prstGeom>
-          <a:solidFill>
-            <a:srgbClr val="FFFFFF"/>
-          </a:solidFill>
-          <a:ln w="9525">
-            <a:solidFill>
-              <a:srgbClr val="E2E8F0"/>
-            </a:solidFill>
-          </a:ln>
-          <a:effectLst/>
-        </p:spPr>
-        <p:style>
-          <a:lnRef idx="1">
-            <a:schemeClr val="accent1"/>
-          </a:lnRef>
-          <a:fillRef idx="3">
-            <a:schemeClr val="accent1"/>
-          </a:fillRef>
-          <a:effectRef idx="2">
-            <a:schemeClr val="accent1"/>
-          </a:effectRef>
-          <a:fontRef idx="minor">
-            <a:schemeClr val="lt1"/>
-          </a:fontRef>
-        </p:style>
-        <p:txBody>
-          <a:bodyPr rtlCol="0" anchor="ctr"/>
-          <a:lstStyle/>
-          <a:p>
-            <a:pPr algn="ctr"/>
-          </a:p>
-        </p:txBody>
-      </p:sp>
-      <p:sp>
-        <p:nvSpPr>
-          <p:cNvPr id="12" name="Rectangle 11"/>
-          <p:cNvSpPr/>
-          <p:nvPr/>
-        </p:nvSpPr>
-        <p:spPr>
-          <a:xfrm>
-            <a:off x="6309360" y="1508760"/>
-            <a:ext cx="5257800" cy="502920"/>
-          </a:xfrm>
-          <a:prstGeom prst="rect">
-            <a:avLst/>
-          </a:prstGeom>
-          <a:solidFill>
-            <a:srgbClr val="1E40AF"/>
-          </a:solidFill>
-          <a:ln>
-            <a:noFill/>
-          </a:ln>
-          <a:effectLst/>
-        </p:spPr>
-        <p:style>
-          <a:lnRef idx="1">
-            <a:schemeClr val="accent1"/>
-          </a:lnRef>
-          <a:fillRef idx="3">
-            <a:schemeClr val="accent1"/>
-          </a:fillRef>
-          <a:effectRef idx="2">
-            <a:schemeClr val="accent1"/>
-          </a:effectRef>
-          <a:fontRef idx="minor">
-            <a:schemeClr val="lt1"/>
-          </a:fontRef>
-        </p:style>
-        <p:txBody>
-          <a:bodyPr rtlCol="0" anchor="ctr"/>
-          <a:lstStyle/>
-          <a:p>
-            <a:pPr algn="ctr"/>
-          </a:p>
-        </p:txBody>
-      </p:sp>
-      <p:sp>
-        <p:nvSpPr>
-          <p:cNvPr id="13" name="TextBox 12"/>
-          <p:cNvSpPr txBox="1"/>
-          <p:nvPr/>
-        </p:nvSpPr>
-        <p:spPr>
-          <a:xfrm>
-            <a:off x="6537960" y="1618488"/>
-            <a:ext cx="4800600" cy="365760"/>
-          </a:xfrm>
-          <a:prstGeom prst="rect">
-            <a:avLst/>
-          </a:prstGeom>
-          <a:noFill/>
-        </p:spPr>
-        <p:txBody>
-          <a:bodyPr wrap="square" anchor="t" lIns="0" rIns="0" tIns="0" bIns="0">
-            <a:spAutoFit/>
-          </a:bodyPr>
-          <a:lstStyle/>
-          <a:p>
-            <a:pPr algn="l"/>
-            <a:r>
-              <a:rPr sz="1500" b="1" i="0">
-                <a:solidFill>
-                  <a:srgbClr val="FFFFFF"/>
-                </a:solidFill>
-                <a:latin typeface="Calibri"/>
-              </a:rPr>
-              <a:t>Phase 2 — End-Semester</a:t>
-            </a:r>
-          </a:p>
-        </p:txBody>
-      </p:sp>
-      <p:sp>
-        <p:nvSpPr>
-          <p:cNvPr id="14" name="TextBox 13"/>
-          <p:cNvSpPr txBox="1"/>
-          <p:nvPr/>
-        </p:nvSpPr>
-        <p:spPr>
-          <a:xfrm>
-            <a:off x="6537960" y="2194560"/>
-            <a:ext cx="4800600" cy="3749039"/>
-          </a:xfrm>
-          <a:prstGeom prst="rect">
-            <a:avLst/>
-          </a:prstGeom>
-          <a:noFill/>
-        </p:spPr>
-        <p:txBody>
-          <a:bodyPr wrap="square">
-            <a:spAutoFit/>
-          </a:bodyPr>
-          <a:lstStyle/>
-          <a:p>
-            <a:pPr>
-              <a:spcAft>
-                <a:spcPts val="1300"/>
-              </a:spcAft>
-            </a:pPr>
-            <a:r>
-              <a:rPr sz="1400">
-                <a:solidFill>
-                  <a:srgbClr val="1F2937"/>
-                </a:solidFill>
-                <a:latin typeface="Calibri"/>
-              </a:rPr>
-              <a:t>•  Implement standard Conformal Prediction on surrogate residuals</a:t>
-            </a:r>
-          </a:p>
-          <a:p>
-            <a:pPr>
-              <a:spcAft>
-                <a:spcPts val="1300"/>
-              </a:spcAft>
-            </a:pPr>
-            <a:r>
-              <a:rPr sz="1400">
-                <a:solidFill>
-                  <a:srgbClr val="1F2937"/>
-                </a:solidFill>
-                <a:latin typeface="Calibri"/>
-              </a:rPr>
-              <a:t>•  Implement Mondrian CP — per-category calibration and coverage</a:t>
-            </a:r>
-          </a:p>
-          <a:p>
-            <a:pPr>
-              <a:spcAft>
-                <a:spcPts val="1300"/>
-              </a:spcAft>
-            </a:pPr>
-            <a:r>
-              <a:rPr sz="1400">
-                <a:solidFill>
-                  <a:srgbClr val="1F2937"/>
-                </a:solidFill>
-                <a:latin typeface="Calibri"/>
-              </a:rPr>
-              <a:t>•  Stress-test the exchangeability assumption (out-of-distribution scenario)</a:t>
-            </a:r>
-          </a:p>
-          <a:p>
-            <a:pPr>
-              <a:spcAft>
-                <a:spcPts val="1300"/>
-              </a:spcAft>
-            </a:pPr>
-            <a:r>
-              <a:rPr sz="1400">
-                <a:solidFill>
-                  <a:srgbClr val="1F2937"/>
-                </a:solidFill>
-                <a:latin typeface="Calibri"/>
-              </a:rPr>
-              <a:t>•  Full comparison: GP vs. standard CP vs. Mondrian CP</a:t>
-            </a:r>
-          </a:p>
-          <a:p>
-            <a:pPr>
-              <a:spcAft>
-                <a:spcPts val="1300"/>
-              </a:spcAft>
-            </a:pPr>
-            <a:r>
-              <a:rPr sz="1400">
-                <a:solidFill>
-                  <a:srgbClr val="1F2937"/>
-                </a:solidFill>
-                <a:latin typeface="Calibri"/>
-              </a:rPr>
-              <a:t>•  Final report and end-semester presentation</a:t>
+              <a:t>The simulation is validated against real hospital data and the surrogate model fits well on 3 of 4 targets. Full evaluation of GP baseline, standard CP, and Mondrian CP coverage is in progress.</a:t>
             </a:r>
           </a:p>
         </p:txBody>
